--- a/docs/BreatheIQ-Team-Purity.pptx
+++ b/docs/BreatheIQ-Team-Purity.pptx
@@ -19,9 +19,11 @@
     <p:sldId id="267" r:id="rId13"/>
     <p:sldId id="268" r:id="rId14"/>
     <p:sldId id="269" r:id="rId15"/>
+    <p:sldId id="270" r:id="rId16"/>
+    <p:sldId id="271" r:id="rId17"/>
   </p:sldIdLst>
   <p:notesMasterIdLst>
-    <p:notesMasterId r:id="rId16"/>
+    <p:notesMasterId r:id="rId18"/>
   </p:notesMasterIdLst>
   <p:sldSz cx="12192000" cy="6858000"/>
   <p:notesSz cx="6858000" cy="12192000"/>
@@ -120,19 +122,19 @@
   <p:extLst>
     <p:ext uri="{521415D9-36F7-43E2-AB2F-B90AF26B5E84}">
       <p14:sectionLst xmlns:p14="http://schemas.microsoft.com/office/powerpoint/2010/main">
-        <p14:section name="Why" id="{e20382b1-c010-624a-5ae0-d3c887a9d7e1}">
+        <p14:section name="Why" id="{315f904b-b20b-52dc-45e6-9824f4250526}">
           <p14:sldIdLst>
             <p14:sldId id="256"/>
             <p14:sldId id="257"/>
             <p14:sldId id="258"/>
           </p14:sldIdLst>
         </p14:section>
-        <p14:section name="Answer" id="{6f22626f-3112-e398-8383-262b5d6b68a2}">
+        <p14:section name="Answer" id="{4f440979-437d-6517-541d-c0ee7485a7b1}">
           <p14:sldIdLst>
             <p14:sldId id="259"/>
           </p14:sldIdLst>
         </p14:section>
-        <p14:section name="How" id="{12389665-c15e-39d1-be44-c3521000c042}">
+        <p14:section name="How" id="{e144cdf7-b3eb-343c-a928-e34d289554b1}">
           <p14:sldIdLst>
             <p14:sldId id="260"/>
             <p14:sldId id="261"/>
@@ -140,22 +142,24 @@
             <p14:sldId id="263"/>
           </p14:sldIdLst>
         </p14:section>
-        <p14:section name="Bad days" id="{3cd3ebeb-b135-abfe-b97d-1037887b1bfd}">
+        <p14:section name="Bad days" id="{947b7956-04a3-1a83-16a7-1b92f7983574}">
           <p14:sldIdLst>
             <p14:sldId id="264"/>
             <p14:sldId id="265"/>
           </p14:sldIdLst>
         </p14:section>
-        <p14:section name="AWS" id="{64ce530e-2848-2908-9d79-6755f8148d4f}">
+        <p14:section name="AWS" id="{c5a51b95-3fdc-0c16-def9-6934f395050c}">
           <p14:sldIdLst>
             <p14:sldId id="266"/>
             <p14:sldId id="267"/>
+            <p14:sldId id="268"/>
+            <p14:sldId id="269"/>
           </p14:sldIdLst>
         </p14:section>
-        <p14:section name="Close" id="{adf26795-157d-920f-f936-65c767893b80}">
+        <p14:section name="Close" id="{dab5d066-86a6-b021-d7c0-21bad9e63f02}">
           <p14:sldIdLst>
-            <p14:sldId id="268"/>
-            <p14:sldId id="269"/>
+            <p14:sldId id="270"/>
+            <p14:sldId id="271"/>
           </p14:sldIdLst>
         </p14:section>
       </p14:sectionLst>
@@ -826,7 +830,7 @@
           <a:p>
             <a:r>
               <a:rPr lang="en-US" dirty="0"/>
-              <a:t>Seven pages: Live, Fleet, Exposure, ML Lab, Controls, System and Playbook, plus Ask BreatheIQ on every page with the J key. The page starts instantly and keeps running on its own engine if the network drops, so it never shows a blank screen. Everything here is a real screenshot of our deployment.</a:t>
+              <a:t>This is the live dashboard, captured from our AWS deployment. Coach B2 reports every two seconds through AWS IoT Core. In this frame the gas heads have fired, so the model asks for ozone, and the interlock blocks it because the cabin is occupied: the exhaust fan runs instead. Seven pages in all: Live, Fleet, Exposure, ML Lab, Controls, System and Playbook.</a:t>
             </a:r>
             <a:endParaRPr lang="en-US" dirty="0"/>
           </a:p>
@@ -914,7 +918,7 @@
           <a:p>
             <a:r>
               <a:rPr lang="en-US" dirty="0"/>
-              <a:t>Next steps are concrete: send all three PM values from the firmware, add occupancy sensing for the interlock, let the ESP8266 publish straight to IoT Core with the certificate we already issued, and put one node in every coach.</a:t>
+              <a:t>The System page draws our AWS architecture with live numbers: messages per minute into IoT Core, the processing latency of the Lambda, frames and incidents in DynamoDB, and the state of the latest Step Functions run.</a:t>
             </a:r>
             <a:endParaRPr lang="en-US" dirty="0"/>
           </a:p>
@@ -1002,7 +1006,7 @@
           <a:p>
             <a:r>
               <a:rPr lang="en-US" dirty="0"/>
-              <a:t>Thank you. BreatheIQ tracks the pollution, warns the most exposed, and changes what happens on the days the AQI goes off the chart. The dashboard is live at the link on screen. Team Purity, team ID YGJPRG.</a:t>
+              <a:t>Amazon Location tracks the train along the route. We drew geofences around the polluted stretches: a stubble-burning belt, a tunnel, an industrial stretch and a freight yard. When the train enters one, ventilation is boosted before the cabin air turns bad.</a:t>
             </a:r>
             <a:endParaRPr lang="en-US" dirty="0"/>
           </a:p>
@@ -1026,6 +1030,182 @@
             <a:fld id="{F7021451-1387-4CA6-816F-3879F97B5CBC}" type="slidenum">
               <a:rPr lang="en-US"/>
               <a:t>14</a:t>
+            </a:fld>
+            <a:endParaRPr lang="en-US"/>
+          </a:p>
+        </p:txBody>
+      </p:sp>
+    </p:spTree>
+    <p:extLst>
+      <p:ext uri="{BB962C8B-B14F-4D97-AF65-F5344CB8AC3E}">
+        <p14:creationId xmlns:p14="http://schemas.microsoft.com/office/powerpoint/2010/main" val="1024086991"/>
+      </p:ext>
+    </p:extLst>
+  </p:cSld>
+  <p:clrMapOvr>
+    <a:masterClrMapping/>
+  </p:clrMapOvr>
+</p:notes>
+</file>
+
+<file path=ppt/notesSlides/notesSlide15.xml><?xml version="1.0" encoding="utf-8"?>
+<p:notes xmlns:a="http://schemas.openxmlformats.org/drawingml/2006/main" xmlns:r="http://schemas.openxmlformats.org/officeDocument/2006/relationships" xmlns:p="http://schemas.openxmlformats.org/presentationml/2006/main">
+  <p:cSld>
+    <p:spTree>
+      <p:nvGrpSpPr>
+        <p:cNvPr id="1" name=""/>
+        <p:cNvGrpSpPr/>
+        <p:nvPr/>
+      </p:nvGrpSpPr>
+      <p:grpSpPr>
+        <a:xfrm>
+          <a:off x="0" y="0"/>
+          <a:ext cx="0" cy="0"/>
+          <a:chOff x="0" y="0"/>
+          <a:chExt cx="0" cy="0"/>
+        </a:xfrm>
+      </p:grpSpPr>
+      <p:sp>
+        <p:nvSpPr>
+          <p:cNvPr id="2" name="Slide Image Placeholder 1"/>
+          <p:cNvSpPr>
+            <a:spLocks noGrp="1" noRot="1" noChangeAspect="1"/>
+          </p:cNvSpPr>
+          <p:nvPr>
+            <p:ph type="sldImg"/>
+          </p:nvPr>
+        </p:nvSpPr>
+        <p:spPr/>
+      </p:sp>
+      <p:sp>
+        <p:nvSpPr>
+          <p:cNvPr id="3" name="Notes Placeholder 2"/>
+          <p:cNvSpPr>
+            <a:spLocks noGrp="1"/>
+          </p:cNvSpPr>
+          <p:nvPr>
+            <p:ph type="body" idx="1"/>
+          </p:nvPr>
+        </p:nvSpPr>
+        <p:spPr/>
+        <p:txBody>
+          <a:bodyPr/>
+          <a:lstStyle/>
+          <a:p>
+            <a:r>
+              <a:rPr lang="en-US" dirty="0"/>
+              <a:t>Next steps are concrete: send all three PM values from the firmware, add occupancy sensing for the interlock, let the ESP8266 publish straight to IoT Core with the certificate we already issued, and put one node in every coach.</a:t>
+            </a:r>
+            <a:endParaRPr lang="en-US" dirty="0"/>
+          </a:p>
+        </p:txBody>
+      </p:sp>
+      <p:sp>
+        <p:nvSpPr>
+          <p:cNvPr id="4" name="Slide Number Placeholder 3"/>
+          <p:cNvSpPr>
+            <a:spLocks noGrp="1"/>
+          </p:cNvSpPr>
+          <p:nvPr>
+            <p:ph type="sldNum" sz="quarter" idx="10"/>
+          </p:nvPr>
+        </p:nvSpPr>
+        <p:spPr/>
+        <p:txBody>
+          <a:bodyPr/>
+          <a:lstStyle/>
+          <a:p>
+            <a:fld id="{F7021451-1387-4CA6-816F-3879F97B5CBC}" type="slidenum">
+              <a:rPr lang="en-US"/>
+              <a:t>15</a:t>
+            </a:fld>
+            <a:endParaRPr lang="en-US"/>
+          </a:p>
+        </p:txBody>
+      </p:sp>
+    </p:spTree>
+    <p:extLst>
+      <p:ext uri="{BB962C8B-B14F-4D97-AF65-F5344CB8AC3E}">
+        <p14:creationId xmlns:p14="http://schemas.microsoft.com/office/powerpoint/2010/main" val="1024086991"/>
+      </p:ext>
+    </p:extLst>
+  </p:cSld>
+  <p:clrMapOvr>
+    <a:masterClrMapping/>
+  </p:clrMapOvr>
+</p:notes>
+</file>
+
+<file path=ppt/notesSlides/notesSlide16.xml><?xml version="1.0" encoding="utf-8"?>
+<p:notes xmlns:a="http://schemas.openxmlformats.org/drawingml/2006/main" xmlns:r="http://schemas.openxmlformats.org/officeDocument/2006/relationships" xmlns:p="http://schemas.openxmlformats.org/presentationml/2006/main">
+  <p:cSld>
+    <p:spTree>
+      <p:nvGrpSpPr>
+        <p:cNvPr id="1" name=""/>
+        <p:cNvGrpSpPr/>
+        <p:nvPr/>
+      </p:nvGrpSpPr>
+      <p:grpSpPr>
+        <a:xfrm>
+          <a:off x="0" y="0"/>
+          <a:ext cx="0" cy="0"/>
+          <a:chOff x="0" y="0"/>
+          <a:chExt cx="0" cy="0"/>
+        </a:xfrm>
+      </p:grpSpPr>
+      <p:sp>
+        <p:nvSpPr>
+          <p:cNvPr id="2" name="Slide Image Placeholder 1"/>
+          <p:cNvSpPr>
+            <a:spLocks noGrp="1" noRot="1" noChangeAspect="1"/>
+          </p:cNvSpPr>
+          <p:nvPr>
+            <p:ph type="sldImg"/>
+          </p:nvPr>
+        </p:nvSpPr>
+        <p:spPr/>
+      </p:sp>
+      <p:sp>
+        <p:nvSpPr>
+          <p:cNvPr id="3" name="Notes Placeholder 2"/>
+          <p:cNvSpPr>
+            <a:spLocks noGrp="1"/>
+          </p:cNvSpPr>
+          <p:nvPr>
+            <p:ph type="body" idx="1"/>
+          </p:nvPr>
+        </p:nvSpPr>
+        <p:spPr/>
+        <p:txBody>
+          <a:bodyPr/>
+          <a:lstStyle/>
+          <a:p>
+            <a:r>
+              <a:rPr lang="en-US" dirty="0"/>
+              <a:t>Thank you. BreatheIQ tracks the pollution, warns the most exposed, and changes what happens on the days the AQI goes off the chart. The dashboard is live at the link on screen, and the video demo is linked below it. Team Purity, team ID YGJPRG.</a:t>
+            </a:r>
+            <a:endParaRPr lang="en-US" dirty="0"/>
+          </a:p>
+        </p:txBody>
+      </p:sp>
+      <p:sp>
+        <p:nvSpPr>
+          <p:cNvPr id="4" name="Slide Number Placeholder 3"/>
+          <p:cNvSpPr>
+            <a:spLocks noGrp="1"/>
+          </p:cNvSpPr>
+          <p:nvPr>
+            <p:ph type="sldNum" sz="quarter" idx="10"/>
+          </p:nvPr>
+        </p:nvSpPr>
+        <p:spPr/>
+        <p:txBody>
+          <a:bodyPr/>
+          <a:lstStyle/>
+          <a:p>
+            <a:fld id="{F7021451-1387-4CA6-816F-3879F97B5CBC}" type="slidenum">
+              <a:rPr lang="en-US"/>
+              <a:t>16</a:t>
             </a:fld>
             <a:endParaRPr lang="en-US"/>
           </a:p>
@@ -1354,7 +1534,7 @@
           <a:p>
             <a:r>
               <a:rPr lang="en-US" dirty="0"/>
-              <a:t>The prototype is real hardware: an Arduino Mega with a DHT11, an MQ-2, an MQ-135 and a PMS7003 laser dust sensor, a relay board for the exhaust fan and two ozone generators, an LCD on the coach wall and an ESP8266 for Wi-Fi. It sends one compact frame and gets one compact command back.</a:t>
+              <a:t>This is our working prototype. An Arduino Mega 2560 reads a DHT11, an MQ-2, an MQ-135 and a PMS7003 laser dust sensor, shows the verdict on a 16x2 LCD and switches the exhaust fan and two ozone generators through a relay board. Every two seconds it sends one compact frame, like a26.60b1c1d3e, and gets one command back, like t0u0v0x0y: one bit per model head.</a:t>
             </a:r>
             <a:endParaRPr lang="en-US" dirty="0"/>
           </a:p>
@@ -3234,7 +3414,7 @@
         </p:nvSpPr>
         <p:spPr>
           <a:xfrm>
-            <a:off x="813816" y="2560320"/>
+            <a:off x="813816" y="2286000"/>
             <a:ext cx="411480" cy="274320"/>
           </a:xfrm>
           <a:prstGeom prst="rect">
@@ -3273,8 +3453,8 @@
         </p:nvSpPr>
         <p:spPr>
           <a:xfrm>
-            <a:off x="1316736" y="2514600"/>
-            <a:ext cx="3749040" cy="365760"/>
+            <a:off x="1316736" y="2240280"/>
+            <a:ext cx="3663904" cy="384048"/>
           </a:xfrm>
           <a:prstGeom prst="rect">
             <a:avLst/>
@@ -3312,7 +3492,7 @@
         </p:nvSpPr>
         <p:spPr>
           <a:xfrm>
-            <a:off x="813816" y="2999232"/>
+            <a:off x="813816" y="2743200"/>
             <a:ext cx="411480" cy="274320"/>
           </a:xfrm>
           <a:prstGeom prst="rect">
@@ -3351,8 +3531,8 @@
         </p:nvSpPr>
         <p:spPr>
           <a:xfrm>
-            <a:off x="1316736" y="2953512"/>
-            <a:ext cx="3749040" cy="365760"/>
+            <a:off x="1316736" y="2697480"/>
+            <a:ext cx="3663904" cy="384048"/>
           </a:xfrm>
           <a:prstGeom prst="rect">
             <a:avLst/>
@@ -3390,7 +3570,7 @@
         </p:nvSpPr>
         <p:spPr>
           <a:xfrm>
-            <a:off x="813816" y="3438144"/>
+            <a:off x="813816" y="3200400"/>
             <a:ext cx="411480" cy="274320"/>
           </a:xfrm>
           <a:prstGeom prst="rect">
@@ -3429,8 +3609,8 @@
         </p:nvSpPr>
         <p:spPr>
           <a:xfrm>
-            <a:off x="1316736" y="3392424"/>
-            <a:ext cx="3749040" cy="365760"/>
+            <a:off x="1316736" y="3154680"/>
+            <a:ext cx="3663904" cy="384048"/>
           </a:xfrm>
           <a:prstGeom prst="rect">
             <a:avLst/>
@@ -3468,7 +3648,7 @@
         </p:nvSpPr>
         <p:spPr>
           <a:xfrm>
-            <a:off x="813816" y="3877056"/>
+            <a:off x="813816" y="3657600"/>
             <a:ext cx="411480" cy="274320"/>
           </a:xfrm>
           <a:prstGeom prst="rect">
@@ -3507,8 +3687,8 @@
         </p:nvSpPr>
         <p:spPr>
           <a:xfrm>
-            <a:off x="1316736" y="3831336"/>
-            <a:ext cx="3749040" cy="365760"/>
+            <a:off x="1316736" y="3611880"/>
+            <a:ext cx="3663904" cy="384048"/>
           </a:xfrm>
           <a:prstGeom prst="rect">
             <a:avLst/>
@@ -3546,7 +3726,7 @@
         </p:nvSpPr>
         <p:spPr>
           <a:xfrm>
-            <a:off x="813816" y="4315968"/>
+            <a:off x="813816" y="4114800"/>
             <a:ext cx="411480" cy="274320"/>
           </a:xfrm>
           <a:prstGeom prst="rect">
@@ -3585,8 +3765,8 @@
         </p:nvSpPr>
         <p:spPr>
           <a:xfrm>
-            <a:off x="1316736" y="4270248"/>
-            <a:ext cx="3749040" cy="365760"/>
+            <a:off x="1316736" y="4069080"/>
+            <a:ext cx="3663904" cy="384048"/>
           </a:xfrm>
           <a:prstGeom prst="rect">
             <a:avLst/>
@@ -3624,7 +3804,7 @@
         </p:nvSpPr>
         <p:spPr>
           <a:xfrm>
-            <a:off x="813816" y="4754880"/>
+            <a:off x="813816" y="4572000"/>
             <a:ext cx="411480" cy="274320"/>
           </a:xfrm>
           <a:prstGeom prst="rect">
@@ -3663,8 +3843,8 @@
         </p:nvSpPr>
         <p:spPr>
           <a:xfrm>
-            <a:off x="1316736" y="4709160"/>
-            <a:ext cx="3749040" cy="365760"/>
+            <a:off x="1316736" y="4526280"/>
+            <a:ext cx="3663904" cy="384048"/>
           </a:xfrm>
           <a:prstGeom prst="rect">
             <a:avLst/>
@@ -3702,7 +3882,7 @@
         </p:nvSpPr>
         <p:spPr>
           <a:xfrm>
-            <a:off x="813816" y="5193792"/>
+            <a:off x="813816" y="5029200"/>
             <a:ext cx="411480" cy="274320"/>
           </a:xfrm>
           <a:prstGeom prst="rect">
@@ -3741,8 +3921,8 @@
         </p:nvSpPr>
         <p:spPr>
           <a:xfrm>
-            <a:off x="1316736" y="5148072"/>
-            <a:ext cx="3749040" cy="365760"/>
+            <a:off x="1316736" y="4983480"/>
+            <a:ext cx="3663904" cy="384048"/>
           </a:xfrm>
           <a:prstGeom prst="rect">
             <a:avLst/>
@@ -3780,8 +3960,8 @@
         </p:nvSpPr>
         <p:spPr>
           <a:xfrm>
-            <a:off x="5358384" y="2487168"/>
-            <a:ext cx="6046927" cy="3214472"/>
+            <a:off x="5273248" y="2212848"/>
+            <a:ext cx="6132063" cy="3867912"/>
           </a:xfrm>
           <a:prstGeom prst="rect">
             <a:avLst/>
@@ -3799,7 +3979,7 @@
       </p:sp>
       <p:pic>
         <p:nvPicPr>
-          <p:cNvPr id="19" name="Image 0" descr="A real AWS Step Functions run of the BreatheIQ bad-day playbook, every state succeeded, beside the English and Hindi announcement with its audio and the staff alert">    </p:cNvPr>
+          <p:cNvPr id="19" name="Image 0" descr="A real AWS Step Functions run of the BreatheIQ bad-day playbook, every state succeeded, beside the English and Hindi announcement with its audio, the staff alert and the incident report">    </p:cNvPr>
           <p:cNvPicPr>
             <a:picLocks noChangeAspect="1"/>
           </p:cNvPicPr>
@@ -3813,8 +3993,8 @@
         </p:blipFill>
         <p:spPr>
           <a:xfrm>
-            <a:off x="5385816" y="2514600"/>
-            <a:ext cx="5992063" cy="3159608"/>
+            <a:off x="5300680" y="2240280"/>
+            <a:ext cx="6077199" cy="3813048"/>
           </a:xfrm>
           <a:prstGeom prst="rect">
             <a:avLst/>
@@ -3829,8 +4009,8 @@
         </p:nvSpPr>
         <p:spPr>
           <a:xfrm>
-            <a:off x="5385816" y="5783936"/>
-            <a:ext cx="5992063" cy="274320"/>
+            <a:off x="813816" y="5623560"/>
+            <a:ext cx="4166824" cy="548640"/>
           </a:xfrm>
           <a:prstGeom prst="rect">
             <a:avLst/>
@@ -5602,8 +5782,8 @@
         </p:nvSpPr>
         <p:spPr>
           <a:xfrm>
-            <a:off x="786384" y="2487168"/>
-            <a:ext cx="6400800" cy="3306852"/>
+            <a:off x="786384" y="2075688"/>
+            <a:ext cx="6526481" cy="4005072"/>
           </a:xfrm>
           <a:prstGeom prst="rect">
             <a:avLst/>
@@ -5621,7 +5801,7 @@
       </p:sp>
       <p:pic>
         <p:nvPicPr>
-          <p:cNvPr id="6" name="Image 0" descr="BreatheIQ Live page: cabin AQI gauge on the CPCB scale, the coach-wall LCD, the four Random Forest heads and the relays, fed from AWS IoT Core">    </p:cNvPr>
+          <p:cNvPr id="6" name="Image 0" descr="BreatheIQ Live page fed from AWS IoT Core: cabin AQI gauge on the CPCB scale, the coach-wall LCD, the four Random Forest heads with the gas heads fired, and the relays with ozone blocked by the interlock while the fan runs">    </p:cNvPr>
           <p:cNvPicPr>
             <a:picLocks noChangeAspect="1"/>
           </p:cNvPicPr>
@@ -5635,8 +5815,8 @@
         </p:blipFill>
         <p:spPr>
           <a:xfrm>
-            <a:off x="813816" y="2514600"/>
-            <a:ext cx="6345936" cy="3251988"/>
+            <a:off x="813816" y="2103120"/>
+            <a:ext cx="6471617" cy="3950208"/>
           </a:xfrm>
           <a:prstGeom prst="rect">
             <a:avLst/>
@@ -5645,59 +5825,22 @@
       </p:pic>
       <p:sp>
         <p:nvSpPr>
-          <p:cNvPr id="7" name="Text 4"/>
-          <p:cNvSpPr txBox="1"/>
-          <p:nvPr/>
-        </p:nvSpPr>
-        <p:spPr>
-          <a:xfrm>
-            <a:off x="813816" y="5858028"/>
-            <a:ext cx="6345936" cy="274320"/>
-          </a:xfrm>
-          <a:prstGeom prst="rect">
-            <a:avLst/>
-          </a:prstGeom>
-          <a:noFill/>
-          <a:ln/>
-        </p:spPr>
-        <p:txBody>
-          <a:bodyPr wrap="square" lIns="0" tIns="0" rIns="0" bIns="0" rtlCol="0" anchor="t"/>
-          <a:lstStyle/>
-          <a:p>
-            <a:pPr indent="0" marL="0">
-              <a:buNone/>
-            </a:pPr>
-            <a:r>
-              <a:rPr lang="en-US" sz="1200" dirty="0">
-                <a:solidFill>
-                  <a:srgbClr val="9AABBA"/>
-                </a:solidFill>
-                <a:latin typeface="Calibri" pitchFamily="34" charset="0"/>
-                <a:ea typeface="Calibri" pitchFamily="34" charset="-122"/>
-                <a:cs typeface="Calibri" pitchFamily="34" charset="-120"/>
-              </a:rPr>
-              <a:t>Live: cabin AQI, the four model heads and the relays, every two seconds from AWS IoT Core.</a:t>
-            </a:r>
-            <a:endParaRPr lang="en-US" sz="1200" dirty="0"/>
-          </a:p>
-        </p:txBody>
-      </p:sp>
-      <p:sp>
-        <p:nvSpPr>
-          <p:cNvPr id="8" name="Shape 5"/>
+          <p:cNvPr id="7" name="Shape 4"/>
           <p:cNvSpPr/>
           <p:nvPr/>
         </p:nvSpPr>
         <p:spPr>
           <a:xfrm>
-            <a:off x="7333488" y="2487168"/>
-            <a:ext cx="4071823" cy="1474651"/>
-          </a:xfrm>
-          <a:prstGeom prst="rect">
-            <a:avLst/>
+            <a:off x="7605473" y="2103120"/>
+            <a:ext cx="3772406" cy="884682"/>
+          </a:xfrm>
+          <a:prstGeom prst="roundRect">
+            <a:avLst>
+              <a:gd name="adj" fmla="val 10336"/>
+            </a:avLst>
           </a:prstGeom>
           <a:solidFill>
-            <a:srgbClr val="22303D"/>
+            <a:srgbClr val="121B24"/>
           </a:solidFill>
           <a:ln w="12700">
             <a:solidFill>
@@ -5707,40 +5850,55 @@
           </a:ln>
         </p:spPr>
       </p:sp>
-      <p:pic>
-        <p:nvPicPr>
-          <p:cNvPr id="9" name="Image 1" descr="System page, Cloud tab: the AWS pipeline with live numbers for IoT Core, Lambda, DynamoDB and Step Functions">    </p:cNvPr>
-          <p:cNvPicPr>
-            <a:picLocks noChangeAspect="1"/>
-          </p:cNvPicPr>
-          <p:nvPr/>
-        </p:nvPicPr>
-        <p:blipFill>
-          <a:blip r:embed="rId3"/>
-          <a:stretch>
-            <a:fillRect/>
-          </a:stretch>
-        </p:blipFill>
-        <p:spPr>
-          <a:xfrm>
-            <a:off x="7360920" y="2514600"/>
-            <a:ext cx="4016959" cy="1419787"/>
-          </a:xfrm>
-          <a:prstGeom prst="rect">
-            <a:avLst/>
-          </a:prstGeom>
-        </p:spPr>
-      </p:pic>
-      <p:sp>
-        <p:nvSpPr>
-          <p:cNvPr id="10" name="Text 6"/>
-          <p:cNvSpPr txBox="1"/>
-          <p:nvPr/>
-        </p:nvSpPr>
-        <p:spPr>
-          <a:xfrm>
-            <a:off x="7360920" y="4007539"/>
-            <a:ext cx="4016959" cy="274320"/>
+      <p:sp>
+        <p:nvSpPr>
+          <p:cNvPr id="8" name="Text 5"/>
+          <p:cNvSpPr txBox="1"/>
+          <p:nvPr/>
+        </p:nvSpPr>
+        <p:spPr>
+          <a:xfrm>
+            <a:off x="7806641" y="2221992"/>
+            <a:ext cx="3370070" cy="274320"/>
+          </a:xfrm>
+          <a:prstGeom prst="rect">
+            <a:avLst/>
+          </a:prstGeom>
+          <a:noFill/>
+          <a:ln/>
+        </p:spPr>
+        <p:txBody>
+          <a:bodyPr wrap="square" lIns="0" tIns="0" rIns="0" bIns="0" rtlCol="0" anchor="t"/>
+          <a:lstStyle/>
+          <a:p>
+            <a:pPr indent="0" marL="0">
+              <a:buNone/>
+            </a:pPr>
+            <a:r>
+              <a:rPr lang="en-US" sz="1500" b="1" dirty="0">
+                <a:solidFill>
+                  <a:srgbClr val="E8EEF2"/>
+                </a:solidFill>
+                <a:latin typeface="Calibri" pitchFamily="34" charset="0"/>
+                <a:ea typeface="Calibri" pitchFamily="34" charset="-122"/>
+                <a:cs typeface="Calibri" pitchFamily="34" charset="-120"/>
+              </a:rPr>
+              <a:t>Cabin AQI, CPCB scale</a:t>
+            </a:r>
+            <a:endParaRPr lang="en-US" sz="1500" dirty="0"/>
+          </a:p>
+        </p:txBody>
+      </p:sp>
+      <p:sp>
+        <p:nvSpPr>
+          <p:cNvPr id="9" name="Text 6"/>
+          <p:cNvSpPr txBox="1"/>
+          <p:nvPr/>
+        </p:nvSpPr>
+        <p:spPr>
+          <a:xfrm>
+            <a:off x="7806641" y="2514600"/>
+            <a:ext cx="3370070" cy="409194"/>
           </a:xfrm>
           <a:prstGeom prst="rect">
             <a:avLst/>
@@ -5764,7 +5922,7 @@
                 <a:ea typeface="Calibri" pitchFamily="34" charset="-122"/>
                 <a:cs typeface="Calibri" pitchFamily="34" charset="-120"/>
               </a:rPr>
-              <a:t>System: the AWS pipeline with live numbers.</a:t>
+              <a:t>From AWS IoT Core every two seconds, never capped at 500.</a:t>
             </a:r>
             <a:endParaRPr lang="en-US" sz="1200" dirty="0"/>
           </a:p>
@@ -5772,20 +5930,22 @@
       </p:sp>
       <p:sp>
         <p:nvSpPr>
-          <p:cNvPr id="11" name="Shape 7"/>
+          <p:cNvPr id="10" name="Shape 7"/>
           <p:cNvSpPr/>
           <p:nvPr/>
         </p:nvSpPr>
         <p:spPr>
           <a:xfrm>
-            <a:off x="7333488" y="4364155"/>
-            <a:ext cx="4071823" cy="1324592"/>
-          </a:xfrm>
-          <a:prstGeom prst="rect">
-            <a:avLst/>
+            <a:off x="7605473" y="3124962"/>
+            <a:ext cx="3772406" cy="884682"/>
+          </a:xfrm>
+          <a:prstGeom prst="roundRect">
+            <a:avLst>
+              <a:gd name="adj" fmla="val 10336"/>
+            </a:avLst>
           </a:prstGeom>
           <a:solidFill>
-            <a:srgbClr val="22303D"/>
+            <a:srgbClr val="121B24"/>
           </a:solidFill>
           <a:ln w="12700">
             <a:solidFill>
@@ -5795,40 +5955,55 @@
           </a:ln>
         </p:spPr>
       </p:sp>
-      <p:pic>
-        <p:nvPicPr>
-          <p:cNvPr id="12" name="Image 2" descr="Fleet page: the route from New Delhi to Prayagraj with the pollution-zone geofences and the train">    </p:cNvPr>
-          <p:cNvPicPr>
-            <a:picLocks noChangeAspect="1"/>
-          </p:cNvPicPr>
-          <p:nvPr/>
-        </p:nvPicPr>
-        <p:blipFill>
-          <a:blip r:embed="rId4"/>
-          <a:stretch>
-            <a:fillRect/>
-          </a:stretch>
-        </p:blipFill>
-        <p:spPr>
-          <a:xfrm>
-            <a:off x="7360920" y="4391587"/>
-            <a:ext cx="4016959" cy="1269728"/>
-          </a:xfrm>
-          <a:prstGeom prst="rect">
-            <a:avLst/>
-          </a:prstGeom>
-        </p:spPr>
-      </p:pic>
-      <p:sp>
-        <p:nvSpPr>
-          <p:cNvPr id="13" name="Text 8"/>
-          <p:cNvSpPr txBox="1"/>
-          <p:nvPr/>
-        </p:nvSpPr>
-        <p:spPr>
-          <a:xfrm>
-            <a:off x="7360920" y="5734468"/>
-            <a:ext cx="4016959" cy="274320"/>
+      <p:sp>
+        <p:nvSpPr>
+          <p:cNvPr id="11" name="Text 8"/>
+          <p:cNvSpPr txBox="1"/>
+          <p:nvPr/>
+        </p:nvSpPr>
+        <p:spPr>
+          <a:xfrm>
+            <a:off x="7806641" y="3243834"/>
+            <a:ext cx="3370070" cy="274320"/>
+          </a:xfrm>
+          <a:prstGeom prst="rect">
+            <a:avLst/>
+          </a:prstGeom>
+          <a:noFill/>
+          <a:ln/>
+        </p:spPr>
+        <p:txBody>
+          <a:bodyPr wrap="square" lIns="0" tIns="0" rIns="0" bIns="0" rtlCol="0" anchor="t"/>
+          <a:lstStyle/>
+          <a:p>
+            <a:pPr indent="0" marL="0">
+              <a:buNone/>
+            </a:pPr>
+            <a:r>
+              <a:rPr lang="en-US" sz="1500" b="1" dirty="0">
+                <a:solidFill>
+                  <a:srgbClr val="E8EEF2"/>
+                </a:solidFill>
+                <a:latin typeface="Calibri" pitchFamily="34" charset="0"/>
+                <a:ea typeface="Calibri" pitchFamily="34" charset="-122"/>
+                <a:cs typeface="Calibri" pitchFamily="34" charset="-120"/>
+              </a:rPr>
+              <a:t>Four Random Forest heads</a:t>
+            </a:r>
+            <a:endParaRPr lang="en-US" sz="1500" dirty="0"/>
+          </a:p>
+        </p:txBody>
+      </p:sp>
+      <p:sp>
+        <p:nvSpPr>
+          <p:cNvPr id="12" name="Text 9"/>
+          <p:cNvSpPr txBox="1"/>
+          <p:nvPr/>
+        </p:nvSpPr>
+        <p:spPr>
+          <a:xfrm>
+            <a:off x="7806641" y="3536442"/>
+            <a:ext cx="3370070" cy="409194"/>
           </a:xfrm>
           <a:prstGeom prst="rect">
             <a:avLst/>
@@ -5852,7 +6027,217 @@
                 <a:ea typeface="Calibri" pitchFamily="34" charset="-122"/>
                 <a:cs typeface="Calibri" pitchFamily="34" charset="-120"/>
               </a:rPr>
-              <a:t>Fleet: route map with pollution-zone geofences.</a:t>
+              <a:t>Served by AWS Lambda. Here the gas heads have fired.</a:t>
+            </a:r>
+            <a:endParaRPr lang="en-US" sz="1200" dirty="0"/>
+          </a:p>
+        </p:txBody>
+      </p:sp>
+      <p:sp>
+        <p:nvSpPr>
+          <p:cNvPr id="13" name="Shape 10"/>
+          <p:cNvSpPr/>
+          <p:nvPr/>
+        </p:nvSpPr>
+        <p:spPr>
+          <a:xfrm>
+            <a:off x="7605473" y="4146804"/>
+            <a:ext cx="3772406" cy="884682"/>
+          </a:xfrm>
+          <a:prstGeom prst="roundRect">
+            <a:avLst>
+              <a:gd name="adj" fmla="val 10336"/>
+            </a:avLst>
+          </a:prstGeom>
+          <a:solidFill>
+            <a:srgbClr val="121B24"/>
+          </a:solidFill>
+          <a:ln w="12700">
+            <a:solidFill>
+              <a:srgbClr val="FBBF24"/>
+            </a:solidFill>
+            <a:prstDash val="solid"/>
+          </a:ln>
+        </p:spPr>
+      </p:sp>
+      <p:sp>
+        <p:nvSpPr>
+          <p:cNvPr id="14" name="Text 11"/>
+          <p:cNvSpPr txBox="1"/>
+          <p:nvPr/>
+        </p:nvSpPr>
+        <p:spPr>
+          <a:xfrm>
+            <a:off x="7806641" y="4265676"/>
+            <a:ext cx="3370070" cy="274320"/>
+          </a:xfrm>
+          <a:prstGeom prst="rect">
+            <a:avLst/>
+          </a:prstGeom>
+          <a:noFill/>
+          <a:ln/>
+        </p:spPr>
+        <p:txBody>
+          <a:bodyPr wrap="square" lIns="0" tIns="0" rIns="0" bIns="0" rtlCol="0" anchor="t"/>
+          <a:lstStyle/>
+          <a:p>
+            <a:pPr indent="0" marL="0">
+              <a:buNone/>
+            </a:pPr>
+            <a:r>
+              <a:rPr lang="en-US" sz="1500" b="1" dirty="0">
+                <a:solidFill>
+                  <a:srgbClr val="FBBF24"/>
+                </a:solidFill>
+                <a:latin typeface="Calibri" pitchFamily="34" charset="0"/>
+                <a:ea typeface="Calibri" pitchFamily="34" charset="-122"/>
+                <a:cs typeface="Calibri" pitchFamily="34" charset="-120"/>
+              </a:rPr>
+              <a:t>The interlock at work</a:t>
+            </a:r>
+            <a:endParaRPr lang="en-US" sz="1500" dirty="0"/>
+          </a:p>
+        </p:txBody>
+      </p:sp>
+      <p:sp>
+        <p:nvSpPr>
+          <p:cNvPr id="15" name="Text 12"/>
+          <p:cNvSpPr txBox="1"/>
+          <p:nvPr/>
+        </p:nvSpPr>
+        <p:spPr>
+          <a:xfrm>
+            <a:off x="7806641" y="4558284"/>
+            <a:ext cx="3370070" cy="409194"/>
+          </a:xfrm>
+          <a:prstGeom prst="rect">
+            <a:avLst/>
+          </a:prstGeom>
+          <a:noFill/>
+          <a:ln/>
+        </p:spPr>
+        <p:txBody>
+          <a:bodyPr wrap="square" lIns="0" tIns="0" rIns="0" bIns="0" rtlCol="0" anchor="t"/>
+          <a:lstStyle/>
+          <a:p>
+            <a:pPr indent="0" marL="0">
+              <a:buNone/>
+            </a:pPr>
+            <a:r>
+              <a:rPr lang="en-US" sz="1200" dirty="0">
+                <a:solidFill>
+                  <a:srgbClr val="9AABBA"/>
+                </a:solidFill>
+                <a:latin typeface="Calibri" pitchFamily="34" charset="0"/>
+                <a:ea typeface="Calibri" pitchFamily="34" charset="-122"/>
+                <a:cs typeface="Calibri" pitchFamily="34" charset="-120"/>
+              </a:rPr>
+              <a:t>Ozone is blocked because the cabin is occupied; the fan runs instead.</a:t>
+            </a:r>
+            <a:endParaRPr lang="en-US" sz="1200" dirty="0"/>
+          </a:p>
+        </p:txBody>
+      </p:sp>
+      <p:sp>
+        <p:nvSpPr>
+          <p:cNvPr id="16" name="Shape 13"/>
+          <p:cNvSpPr/>
+          <p:nvPr/>
+        </p:nvSpPr>
+        <p:spPr>
+          <a:xfrm>
+            <a:off x="7605473" y="5168646"/>
+            <a:ext cx="3772406" cy="884682"/>
+          </a:xfrm>
+          <a:prstGeom prst="roundRect">
+            <a:avLst>
+              <a:gd name="adj" fmla="val 10336"/>
+            </a:avLst>
+          </a:prstGeom>
+          <a:solidFill>
+            <a:srgbClr val="121B24"/>
+          </a:solidFill>
+          <a:ln w="12700">
+            <a:solidFill>
+              <a:srgbClr val="22303D"/>
+            </a:solidFill>
+            <a:prstDash val="solid"/>
+          </a:ln>
+        </p:spPr>
+      </p:sp>
+      <p:sp>
+        <p:nvSpPr>
+          <p:cNvPr id="17" name="Text 14"/>
+          <p:cNvSpPr txBox="1"/>
+          <p:nvPr/>
+        </p:nvSpPr>
+        <p:spPr>
+          <a:xfrm>
+            <a:off x="7806641" y="5287518"/>
+            <a:ext cx="3370070" cy="274320"/>
+          </a:xfrm>
+          <a:prstGeom prst="rect">
+            <a:avLst/>
+          </a:prstGeom>
+          <a:noFill/>
+          <a:ln/>
+        </p:spPr>
+        <p:txBody>
+          <a:bodyPr wrap="square" lIns="0" tIns="0" rIns="0" bIns="0" rtlCol="0" anchor="t"/>
+          <a:lstStyle/>
+          <a:p>
+            <a:pPr indent="0" marL="0">
+              <a:buNone/>
+            </a:pPr>
+            <a:r>
+              <a:rPr lang="en-US" sz="1500" b="1" dirty="0">
+                <a:solidFill>
+                  <a:srgbClr val="E8EEF2"/>
+                </a:solidFill>
+                <a:latin typeface="Calibri" pitchFamily="34" charset="0"/>
+                <a:ea typeface="Calibri" pitchFamily="34" charset="-122"/>
+                <a:cs typeface="Calibri" pitchFamily="34" charset="-120"/>
+              </a:rPr>
+              <a:t>Command back to the coach</a:t>
+            </a:r>
+            <a:endParaRPr lang="en-US" sz="1500" dirty="0"/>
+          </a:p>
+        </p:txBody>
+      </p:sp>
+      <p:sp>
+        <p:nvSpPr>
+          <p:cNvPr id="18" name="Text 15"/>
+          <p:cNvSpPr txBox="1"/>
+          <p:nvPr/>
+        </p:nvSpPr>
+        <p:spPr>
+          <a:xfrm>
+            <a:off x="7806641" y="5580126"/>
+            <a:ext cx="3370070" cy="409194"/>
+          </a:xfrm>
+          <a:prstGeom prst="rect">
+            <a:avLst/>
+          </a:prstGeom>
+          <a:noFill/>
+          <a:ln/>
+        </p:spPr>
+        <p:txBody>
+          <a:bodyPr wrap="square" lIns="0" tIns="0" rIns="0" bIns="0" rtlCol="0" anchor="t"/>
+          <a:lstStyle/>
+          <a:p>
+            <a:pPr indent="0" marL="0">
+              <a:buNone/>
+            </a:pPr>
+            <a:r>
+              <a:rPr lang="en-US" sz="1200" dirty="0">
+                <a:solidFill>
+                  <a:srgbClr val="9AABBA"/>
+                </a:solidFill>
+                <a:latin typeface="Calibri" pitchFamily="34" charset="0"/>
+                <a:ea typeface="Calibri" pitchFamily="34" charset="-122"/>
+                <a:cs typeface="Calibri" pitchFamily="34" charset="-120"/>
+              </a:rPr>
+              <a:t>The relay command returns over the IoT Core command topic.</a:t>
             </a:r>
             <a:endParaRPr lang="en-US" sz="1200" dirty="0"/>
           </a:p>
@@ -5958,13 +6343,13 @@
             <a:r>
               <a:rPr lang="en-US" sz="1200" spc="300" kern="0" dirty="0">
                 <a:solidFill>
-                  <a:srgbClr val="0F766E"/>
+                  <a:srgbClr val="5EEAD4"/>
                 </a:solidFill>
                 <a:latin typeface="Consolas" pitchFamily="34" charset="0"/>
                 <a:ea typeface="Consolas" pitchFamily="34" charset="-122"/>
                 <a:cs typeface="Consolas" pitchFamily="34" charset="-120"/>
               </a:rPr>
-              <a:t>12 · ROADMAP</a:t>
+              <a:t>12 · LIVE ON AWS</a:t>
             </a:r>
             <a:endParaRPr lang="en-US" sz="1200" dirty="0"/>
           </a:p>
@@ -5999,13 +6384,13 @@
             <a:r>
               <a:rPr lang="en-US" sz="3600" b="1" dirty="0">
                 <a:solidFill>
-                  <a:srgbClr val="14202B"/>
-                </a:solidFill>
-                <a:latin typeface="Calibri" pitchFamily="34" charset="0"/>
-                <a:ea typeface="Calibri" pitchFamily="34" charset="-122"/>
-                <a:cs typeface="Calibri" pitchFamily="34" charset="-120"/>
-              </a:rPr>
-              <a:t>From one coach to the whole train</a:t>
+                  <a:srgbClr val="E8EEF2"/>
+                </a:solidFill>
+                <a:latin typeface="Calibri" pitchFamily="34" charset="0"/>
+                <a:ea typeface="Calibri" pitchFamily="34" charset="-122"/>
+                <a:cs typeface="Calibri" pitchFamily="34" charset="-120"/>
+              </a:rPr>
+              <a:t>The AWS pipeline, with live numbers</a:t>
             </a:r>
             <a:endParaRPr lang="en-US" sz="3600" dirty="0"/>
           </a:p>
@@ -6019,671 +6404,83 @@
         </p:nvSpPr>
         <p:spPr>
           <a:xfrm>
-            <a:off x="813816" y="2514600"/>
-            <a:ext cx="5181448" cy="1659636"/>
-          </a:xfrm>
-          <a:prstGeom prst="roundRect">
-            <a:avLst>
-              <a:gd name="adj" fmla="val 5510"/>
-            </a:avLst>
+            <a:off x="970946" y="2075688"/>
+            <a:ext cx="10249803" cy="3712464"/>
+          </a:xfrm>
+          <a:prstGeom prst="rect">
+            <a:avLst/>
           </a:prstGeom>
           <a:solidFill>
-            <a:srgbClr val="FBFCFB"/>
+            <a:srgbClr val="22303D"/>
           </a:solidFill>
           <a:ln w="12700">
             <a:solidFill>
-              <a:srgbClr val="D9E1DF"/>
+              <a:srgbClr val="22303D"/>
             </a:solidFill>
             <a:prstDash val="solid"/>
           </a:ln>
         </p:spPr>
       </p:sp>
-      <p:sp>
-        <p:nvSpPr>
-          <p:cNvPr id="5" name="Shape 3"/>
-          <p:cNvSpPr/>
-          <p:nvPr/>
-        </p:nvSpPr>
-        <p:spPr>
-          <a:xfrm>
-            <a:off x="1088136" y="2788920"/>
-            <a:ext cx="502920" cy="502920"/>
-          </a:xfrm>
-          <a:prstGeom prst="ellipse">
-            <a:avLst/>
-          </a:prstGeom>
-          <a:solidFill>
-            <a:srgbClr val="0F766E"/>
-          </a:solidFill>
-          <a:ln w="12700">
-            <a:solidFill>
-              <a:srgbClr val="0F766E"/>
-            </a:solidFill>
-            <a:prstDash val="solid"/>
-          </a:ln>
-        </p:spPr>
-      </p:sp>
-      <p:sp>
-        <p:nvSpPr>
-          <p:cNvPr id="6" name="Text 4"/>
-          <p:cNvSpPr txBox="1"/>
-          <p:nvPr/>
-        </p:nvSpPr>
-        <p:spPr>
-          <a:xfrm>
-            <a:off x="1088136" y="2788920"/>
-            <a:ext cx="502920" cy="502920"/>
-          </a:xfrm>
-          <a:prstGeom prst="rect">
-            <a:avLst/>
-          </a:prstGeom>
-          <a:noFill/>
-          <a:ln/>
-        </p:spPr>
-        <p:txBody>
-          <a:bodyPr wrap="square" lIns="0" tIns="0" rIns="0" bIns="0" rtlCol="0" anchor="ctr"/>
-          <a:lstStyle/>
-          <a:p>
-            <a:pPr algn="ctr" indent="0" marL="0">
-              <a:buNone/>
-            </a:pPr>
-            <a:r>
-              <a:rPr lang="en-US" sz="1500" b="1" dirty="0">
-                <a:solidFill>
-                  <a:srgbClr val="F2F5F4"/>
-                </a:solidFill>
-                <a:latin typeface="Calibri" pitchFamily="34" charset="0"/>
-                <a:ea typeface="Calibri" pitchFamily="34" charset="-122"/>
-                <a:cs typeface="Calibri" pitchFamily="34" charset="-120"/>
-              </a:rPr>
-              <a:t>1</a:t>
-            </a:r>
-            <a:endParaRPr lang="en-US" sz="1500" dirty="0"/>
-          </a:p>
-        </p:txBody>
-      </p:sp>
-      <p:sp>
-        <p:nvSpPr>
-          <p:cNvPr id="7" name="Text 5"/>
-          <p:cNvSpPr txBox="1"/>
-          <p:nvPr/>
-        </p:nvSpPr>
-        <p:spPr>
-          <a:xfrm>
-            <a:off x="1773936" y="2807208"/>
-            <a:ext cx="3947008" cy="384048"/>
-          </a:xfrm>
-          <a:prstGeom prst="rect">
-            <a:avLst/>
-          </a:prstGeom>
-          <a:noFill/>
-          <a:ln/>
-        </p:spPr>
-        <p:txBody>
-          <a:bodyPr wrap="square" lIns="0" tIns="0" rIns="0" bIns="0" rtlCol="0" anchor="t"/>
-          <a:lstStyle/>
-          <a:p>
-            <a:pPr indent="0" marL="0">
-              <a:buNone/>
-            </a:pPr>
-            <a:r>
-              <a:rPr lang="en-US" sz="1800" b="1" dirty="0">
-                <a:solidFill>
-                  <a:srgbClr val="14202B"/>
-                </a:solidFill>
-                <a:latin typeface="Calibri" pitchFamily="34" charset="0"/>
-                <a:ea typeface="Calibri" pitchFamily="34" charset="-122"/>
-                <a:cs typeface="Calibri" pitchFamily="34" charset="-120"/>
-              </a:rPr>
-              <a:t>PM2.5 and PM10 in the frame</a:t>
-            </a:r>
-            <a:endParaRPr lang="en-US" sz="1800" dirty="0"/>
-          </a:p>
-        </p:txBody>
-      </p:sp>
-      <p:sp>
-        <p:nvSpPr>
-          <p:cNvPr id="8" name="Text 6"/>
-          <p:cNvSpPr txBox="1"/>
-          <p:nvPr/>
-        </p:nvSpPr>
-        <p:spPr>
-          <a:xfrm>
-            <a:off x="1773936" y="3246120"/>
-            <a:ext cx="3947008" cy="777240"/>
-          </a:xfrm>
-          <a:prstGeom prst="rect">
-            <a:avLst/>
-          </a:prstGeom>
-          <a:noFill/>
-          <a:ln/>
-        </p:spPr>
-        <p:txBody>
-          <a:bodyPr wrap="square" lIns="0" tIns="0" rIns="0" bIns="0" rtlCol="0" anchor="t"/>
-          <a:lstStyle/>
-          <a:p>
-            <a:pPr indent="0" marL="0">
-              <a:buNone/>
-            </a:pPr>
-            <a:r>
-              <a:rPr lang="en-US" sz="1400" dirty="0">
-                <a:solidFill>
-                  <a:srgbClr val="4A5A68"/>
-                </a:solidFill>
-                <a:latin typeface="Calibri" pitchFamily="34" charset="0"/>
-                <a:ea typeface="Calibri" pitchFamily="34" charset="-122"/>
-                <a:cs typeface="Calibri" pitchFamily="34" charset="-120"/>
-              </a:rPr>
-              <a:t>The firmware sends PM1.0 today; sending all three removes the estimate.</a:t>
-            </a:r>
-            <a:endParaRPr lang="en-US" sz="1400" dirty="0"/>
-          </a:p>
-        </p:txBody>
-      </p:sp>
-      <p:sp>
-        <p:nvSpPr>
-          <p:cNvPr id="9" name="Shape 7"/>
-          <p:cNvSpPr/>
-          <p:nvPr/>
-        </p:nvSpPr>
-        <p:spPr>
-          <a:xfrm>
-            <a:off x="6196432" y="2514600"/>
-            <a:ext cx="5181448" cy="1659636"/>
-          </a:xfrm>
-          <a:prstGeom prst="roundRect">
-            <a:avLst>
-              <a:gd name="adj" fmla="val 5510"/>
-            </a:avLst>
-          </a:prstGeom>
-          <a:solidFill>
-            <a:srgbClr val="FBFCFB"/>
-          </a:solidFill>
-          <a:ln w="12700">
-            <a:solidFill>
-              <a:srgbClr val="D9E1DF"/>
-            </a:solidFill>
-            <a:prstDash val="solid"/>
-          </a:ln>
-        </p:spPr>
-      </p:sp>
-      <p:sp>
-        <p:nvSpPr>
-          <p:cNvPr id="10" name="Shape 8"/>
-          <p:cNvSpPr/>
-          <p:nvPr/>
-        </p:nvSpPr>
-        <p:spPr>
-          <a:xfrm>
-            <a:off x="6470752" y="2788920"/>
-            <a:ext cx="502920" cy="502920"/>
-          </a:xfrm>
-          <a:prstGeom prst="ellipse">
-            <a:avLst/>
-          </a:prstGeom>
-          <a:solidFill>
-            <a:srgbClr val="0F766E"/>
-          </a:solidFill>
-          <a:ln w="12700">
-            <a:solidFill>
-              <a:srgbClr val="0F766E"/>
-            </a:solidFill>
-            <a:prstDash val="solid"/>
-          </a:ln>
-        </p:spPr>
-      </p:sp>
-      <p:sp>
-        <p:nvSpPr>
-          <p:cNvPr id="11" name="Text 9"/>
-          <p:cNvSpPr txBox="1"/>
-          <p:nvPr/>
-        </p:nvSpPr>
-        <p:spPr>
-          <a:xfrm>
-            <a:off x="6470752" y="2788920"/>
-            <a:ext cx="502920" cy="502920"/>
-          </a:xfrm>
-          <a:prstGeom prst="rect">
-            <a:avLst/>
-          </a:prstGeom>
-          <a:noFill/>
-          <a:ln/>
-        </p:spPr>
-        <p:txBody>
-          <a:bodyPr wrap="square" lIns="0" tIns="0" rIns="0" bIns="0" rtlCol="0" anchor="ctr"/>
-          <a:lstStyle/>
-          <a:p>
-            <a:pPr algn="ctr" indent="0" marL="0">
-              <a:buNone/>
-            </a:pPr>
-            <a:r>
-              <a:rPr lang="en-US" sz="1500" b="1" dirty="0">
-                <a:solidFill>
-                  <a:srgbClr val="F2F5F4"/>
-                </a:solidFill>
-                <a:latin typeface="Calibri" pitchFamily="34" charset="0"/>
-                <a:ea typeface="Calibri" pitchFamily="34" charset="-122"/>
-                <a:cs typeface="Calibri" pitchFamily="34" charset="-120"/>
-              </a:rPr>
-              <a:t>2</a:t>
-            </a:r>
-            <a:endParaRPr lang="en-US" sz="1500" dirty="0"/>
-          </a:p>
-        </p:txBody>
-      </p:sp>
-      <p:sp>
-        <p:nvSpPr>
-          <p:cNvPr id="12" name="Text 10"/>
-          <p:cNvSpPr txBox="1"/>
-          <p:nvPr/>
-        </p:nvSpPr>
-        <p:spPr>
-          <a:xfrm>
-            <a:off x="7156552" y="2807208"/>
-            <a:ext cx="3947008" cy="384048"/>
-          </a:xfrm>
-          <a:prstGeom prst="rect">
-            <a:avLst/>
-          </a:prstGeom>
-          <a:noFill/>
-          <a:ln/>
-        </p:spPr>
-        <p:txBody>
-          <a:bodyPr wrap="square" lIns="0" tIns="0" rIns="0" bIns="0" rtlCol="0" anchor="t"/>
-          <a:lstStyle/>
-          <a:p>
-            <a:pPr indent="0" marL="0">
-              <a:buNone/>
-            </a:pPr>
-            <a:r>
-              <a:rPr lang="en-US" sz="1800" b="1" dirty="0">
-                <a:solidFill>
-                  <a:srgbClr val="14202B"/>
-                </a:solidFill>
-                <a:latin typeface="Calibri" pitchFamily="34" charset="0"/>
-                <a:ea typeface="Calibri" pitchFamily="34" charset="-122"/>
-                <a:cs typeface="Calibri" pitchFamily="34" charset="-120"/>
-              </a:rPr>
-              <a:t>Occupancy sensing</a:t>
-            </a:r>
-            <a:endParaRPr lang="en-US" sz="1800" dirty="0"/>
-          </a:p>
-        </p:txBody>
-      </p:sp>
-      <p:sp>
-        <p:nvSpPr>
-          <p:cNvPr id="13" name="Text 11"/>
-          <p:cNvSpPr txBox="1"/>
-          <p:nvPr/>
-        </p:nvSpPr>
-        <p:spPr>
-          <a:xfrm>
-            <a:off x="7156552" y="3246120"/>
-            <a:ext cx="3947008" cy="777240"/>
-          </a:xfrm>
-          <a:prstGeom prst="rect">
-            <a:avLst/>
-          </a:prstGeom>
-          <a:noFill/>
-          <a:ln/>
-        </p:spPr>
-        <p:txBody>
-          <a:bodyPr wrap="square" lIns="0" tIns="0" rIns="0" bIns="0" rtlCol="0" anchor="t"/>
-          <a:lstStyle/>
-          <a:p>
-            <a:pPr indent="0" marL="0">
-              <a:buNone/>
-            </a:pPr>
-            <a:r>
-              <a:rPr lang="en-US" sz="1400" dirty="0">
-                <a:solidFill>
-                  <a:srgbClr val="4A5A68"/>
-                </a:solidFill>
-                <a:latin typeface="Calibri" pitchFamily="34" charset="0"/>
-                <a:ea typeface="Calibri" pitchFamily="34" charset="-122"/>
-                <a:cs typeface="Calibri" pitchFamily="34" charset="-120"/>
-              </a:rPr>
-              <a:t>The ozone interlock then runs on a measured signal.</a:t>
-            </a:r>
-            <a:endParaRPr lang="en-US" sz="1400" dirty="0"/>
-          </a:p>
-        </p:txBody>
-      </p:sp>
-      <p:sp>
-        <p:nvSpPr>
-          <p:cNvPr id="14" name="Shape 12"/>
-          <p:cNvSpPr/>
-          <p:nvPr/>
-        </p:nvSpPr>
-        <p:spPr>
-          <a:xfrm>
-            <a:off x="813816" y="4375404"/>
-            <a:ext cx="5181448" cy="1659636"/>
-          </a:xfrm>
-          <a:prstGeom prst="roundRect">
-            <a:avLst>
-              <a:gd name="adj" fmla="val 5510"/>
-            </a:avLst>
-          </a:prstGeom>
-          <a:solidFill>
-            <a:srgbClr val="FBFCFB"/>
-          </a:solidFill>
-          <a:ln w="12700">
-            <a:solidFill>
-              <a:srgbClr val="D9E1DF"/>
-            </a:solidFill>
-            <a:prstDash val="solid"/>
-          </a:ln>
-        </p:spPr>
-      </p:sp>
-      <p:sp>
-        <p:nvSpPr>
-          <p:cNvPr id="15" name="Shape 13"/>
-          <p:cNvSpPr/>
-          <p:nvPr/>
-        </p:nvSpPr>
-        <p:spPr>
-          <a:xfrm>
-            <a:off x="1088136" y="4649724"/>
-            <a:ext cx="502920" cy="502920"/>
-          </a:xfrm>
-          <a:prstGeom prst="ellipse">
-            <a:avLst/>
-          </a:prstGeom>
-          <a:solidFill>
-            <a:srgbClr val="0F766E"/>
-          </a:solidFill>
-          <a:ln w="12700">
-            <a:solidFill>
-              <a:srgbClr val="0F766E"/>
-            </a:solidFill>
-            <a:prstDash val="solid"/>
-          </a:ln>
-        </p:spPr>
-      </p:sp>
-      <p:sp>
-        <p:nvSpPr>
-          <p:cNvPr id="16" name="Text 14"/>
-          <p:cNvSpPr txBox="1"/>
-          <p:nvPr/>
-        </p:nvSpPr>
-        <p:spPr>
-          <a:xfrm>
-            <a:off x="1088136" y="4649724"/>
-            <a:ext cx="502920" cy="502920"/>
-          </a:xfrm>
-          <a:prstGeom prst="rect">
-            <a:avLst/>
-          </a:prstGeom>
-          <a:noFill/>
-          <a:ln/>
-        </p:spPr>
-        <p:txBody>
-          <a:bodyPr wrap="square" lIns="0" tIns="0" rIns="0" bIns="0" rtlCol="0" anchor="ctr"/>
-          <a:lstStyle/>
-          <a:p>
-            <a:pPr algn="ctr" indent="0" marL="0">
-              <a:buNone/>
-            </a:pPr>
-            <a:r>
-              <a:rPr lang="en-US" sz="1500" b="1" dirty="0">
-                <a:solidFill>
-                  <a:srgbClr val="F2F5F4"/>
-                </a:solidFill>
-                <a:latin typeface="Calibri" pitchFamily="34" charset="0"/>
-                <a:ea typeface="Calibri" pitchFamily="34" charset="-122"/>
-                <a:cs typeface="Calibri" pitchFamily="34" charset="-120"/>
-              </a:rPr>
-              <a:t>3</a:t>
-            </a:r>
-            <a:endParaRPr lang="en-US" sz="1500" dirty="0"/>
-          </a:p>
-        </p:txBody>
-      </p:sp>
-      <p:sp>
-        <p:nvSpPr>
-          <p:cNvPr id="17" name="Text 15"/>
-          <p:cNvSpPr txBox="1"/>
-          <p:nvPr/>
-        </p:nvSpPr>
-        <p:spPr>
-          <a:xfrm>
-            <a:off x="1773936" y="4668012"/>
-            <a:ext cx="3947008" cy="384048"/>
-          </a:xfrm>
-          <a:prstGeom prst="rect">
-            <a:avLst/>
-          </a:prstGeom>
-          <a:noFill/>
-          <a:ln/>
-        </p:spPr>
-        <p:txBody>
-          <a:bodyPr wrap="square" lIns="0" tIns="0" rIns="0" bIns="0" rtlCol="0" anchor="t"/>
-          <a:lstStyle/>
-          <a:p>
-            <a:pPr indent="0" marL="0">
-              <a:buNone/>
-            </a:pPr>
-            <a:r>
-              <a:rPr lang="en-US" sz="1800" b="1" dirty="0">
-                <a:solidFill>
-                  <a:srgbClr val="14202B"/>
-                </a:solidFill>
-                <a:latin typeface="Calibri" pitchFamily="34" charset="0"/>
-                <a:ea typeface="Calibri" pitchFamily="34" charset="-122"/>
-                <a:cs typeface="Calibri" pitchFamily="34" charset="-120"/>
-              </a:rPr>
-              <a:t>Straight to AWS IoT Core</a:t>
-            </a:r>
-            <a:endParaRPr lang="en-US" sz="1800" dirty="0"/>
-          </a:p>
-        </p:txBody>
-      </p:sp>
-      <p:sp>
-        <p:nvSpPr>
-          <p:cNvPr id="18" name="Text 16"/>
-          <p:cNvSpPr txBox="1"/>
-          <p:nvPr/>
-        </p:nvSpPr>
-        <p:spPr>
-          <a:xfrm>
-            <a:off x="1773936" y="5106924"/>
-            <a:ext cx="3947008" cy="777240"/>
-          </a:xfrm>
-          <a:prstGeom prst="rect">
-            <a:avLst/>
-          </a:prstGeom>
-          <a:noFill/>
-          <a:ln/>
-        </p:spPr>
-        <p:txBody>
-          <a:bodyPr wrap="square" lIns="0" tIns="0" rIns="0" bIns="0" rtlCol="0" anchor="t"/>
-          <a:lstStyle/>
-          <a:p>
-            <a:pPr indent="0" marL="0">
-              <a:buNone/>
-            </a:pPr>
-            <a:r>
-              <a:rPr lang="en-US" sz="1400" dirty="0">
-                <a:solidFill>
-                  <a:srgbClr val="4A5A68"/>
-                </a:solidFill>
-                <a:latin typeface="Calibri" pitchFamily="34" charset="0"/>
-                <a:ea typeface="Calibri" pitchFamily="34" charset="-122"/>
-                <a:cs typeface="Calibri" pitchFamily="34" charset="-120"/>
-              </a:rPr>
-              <a:t>The ESP8266 publishes with its own X.509 certificate, already issued.</a:t>
-            </a:r>
-            <a:endParaRPr lang="en-US" sz="1400" dirty="0"/>
-          </a:p>
-        </p:txBody>
-      </p:sp>
-      <p:sp>
-        <p:nvSpPr>
-          <p:cNvPr id="19" name="Shape 17"/>
-          <p:cNvSpPr/>
-          <p:nvPr/>
-        </p:nvSpPr>
-        <p:spPr>
-          <a:xfrm>
-            <a:off x="6196432" y="4375404"/>
-            <a:ext cx="5181448" cy="1659636"/>
-          </a:xfrm>
-          <a:prstGeom prst="roundRect">
-            <a:avLst>
-              <a:gd name="adj" fmla="val 5510"/>
-            </a:avLst>
-          </a:prstGeom>
-          <a:solidFill>
-            <a:srgbClr val="FBFCFB"/>
-          </a:solidFill>
-          <a:ln w="12700">
-            <a:solidFill>
-              <a:srgbClr val="D9E1DF"/>
-            </a:solidFill>
-            <a:prstDash val="solid"/>
-          </a:ln>
-        </p:spPr>
-      </p:sp>
-      <p:sp>
-        <p:nvSpPr>
-          <p:cNvPr id="20" name="Shape 18"/>
-          <p:cNvSpPr/>
-          <p:nvPr/>
-        </p:nvSpPr>
-        <p:spPr>
-          <a:xfrm>
-            <a:off x="6470752" y="4649724"/>
-            <a:ext cx="502920" cy="502920"/>
-          </a:xfrm>
-          <a:prstGeom prst="ellipse">
-            <a:avLst/>
-          </a:prstGeom>
-          <a:solidFill>
-            <a:srgbClr val="0F766E"/>
-          </a:solidFill>
-          <a:ln w="12700">
-            <a:solidFill>
-              <a:srgbClr val="0F766E"/>
-            </a:solidFill>
-            <a:prstDash val="solid"/>
-          </a:ln>
-        </p:spPr>
-      </p:sp>
-      <p:sp>
-        <p:nvSpPr>
-          <p:cNvPr id="21" name="Text 19"/>
-          <p:cNvSpPr txBox="1"/>
-          <p:nvPr/>
-        </p:nvSpPr>
-        <p:spPr>
-          <a:xfrm>
-            <a:off x="6470752" y="4649724"/>
-            <a:ext cx="502920" cy="502920"/>
-          </a:xfrm>
-          <a:prstGeom prst="rect">
-            <a:avLst/>
-          </a:prstGeom>
-          <a:noFill/>
-          <a:ln/>
-        </p:spPr>
-        <p:txBody>
-          <a:bodyPr wrap="square" lIns="0" tIns="0" rIns="0" bIns="0" rtlCol="0" anchor="ctr"/>
-          <a:lstStyle/>
-          <a:p>
-            <a:pPr algn="ctr" indent="0" marL="0">
-              <a:buNone/>
-            </a:pPr>
-            <a:r>
-              <a:rPr lang="en-US" sz="1500" b="1" dirty="0">
-                <a:solidFill>
-                  <a:srgbClr val="F2F5F4"/>
-                </a:solidFill>
-                <a:latin typeface="Calibri" pitchFamily="34" charset="0"/>
-                <a:ea typeface="Calibri" pitchFamily="34" charset="-122"/>
-                <a:cs typeface="Calibri" pitchFamily="34" charset="-120"/>
-              </a:rPr>
-              <a:t>4</a:t>
-            </a:r>
-            <a:endParaRPr lang="en-US" sz="1500" dirty="0"/>
-          </a:p>
-        </p:txBody>
-      </p:sp>
-      <p:sp>
-        <p:nvSpPr>
-          <p:cNvPr id="22" name="Text 20"/>
-          <p:cNvSpPr txBox="1"/>
-          <p:nvPr/>
-        </p:nvSpPr>
-        <p:spPr>
-          <a:xfrm>
-            <a:off x="7156552" y="4668012"/>
-            <a:ext cx="3947008" cy="384048"/>
-          </a:xfrm>
-          <a:prstGeom prst="rect">
-            <a:avLst/>
-          </a:prstGeom>
-          <a:noFill/>
-          <a:ln/>
-        </p:spPr>
-        <p:txBody>
-          <a:bodyPr wrap="square" lIns="0" tIns="0" rIns="0" bIns="0" rtlCol="0" anchor="t"/>
-          <a:lstStyle/>
-          <a:p>
-            <a:pPr indent="0" marL="0">
-              <a:buNone/>
-            </a:pPr>
-            <a:r>
-              <a:rPr lang="en-US" sz="1800" b="1" dirty="0">
-                <a:solidFill>
-                  <a:srgbClr val="14202B"/>
-                </a:solidFill>
-                <a:latin typeface="Calibri" pitchFamily="34" charset="0"/>
-                <a:ea typeface="Calibri" pitchFamily="34" charset="-122"/>
-                <a:cs typeface="Calibri" pitchFamily="34" charset="-120"/>
-              </a:rPr>
-              <a:t>One node per coach</a:t>
-            </a:r>
-            <a:endParaRPr lang="en-US" sz="1800" dirty="0"/>
-          </a:p>
-        </p:txBody>
-      </p:sp>
-      <p:sp>
-        <p:nvSpPr>
-          <p:cNvPr id="23" name="Text 21"/>
-          <p:cNvSpPr txBox="1"/>
-          <p:nvPr/>
-        </p:nvSpPr>
-        <p:spPr>
-          <a:xfrm>
-            <a:off x="7156552" y="5106924"/>
-            <a:ext cx="3947008" cy="777240"/>
-          </a:xfrm>
-          <a:prstGeom prst="rect">
-            <a:avLst/>
-          </a:prstGeom>
-          <a:noFill/>
-          <a:ln/>
-        </p:spPr>
-        <p:txBody>
-          <a:bodyPr wrap="square" lIns="0" tIns="0" rIns="0" bIns="0" rtlCol="0" anchor="t"/>
-          <a:lstStyle/>
-          <a:p>
-            <a:pPr indent="0" marL="0">
-              <a:buNone/>
-            </a:pPr>
-            <a:r>
-              <a:rPr lang="en-US" sz="1400" dirty="0">
-                <a:solidFill>
-                  <a:srgbClr val="4A5A68"/>
-                </a:solidFill>
-                <a:latin typeface="Calibri" pitchFamily="34" charset="0"/>
-                <a:ea typeface="Calibri" pitchFamily="34" charset="-122"/>
-                <a:cs typeface="Calibri" pitchFamily="34" charset="-120"/>
-              </a:rPr>
-              <a:t>A fleet-wide view, and advisories for passengers who flag a health condition when booking.</a:t>
-            </a:r>
-            <a:endParaRPr lang="en-US" sz="1400" dirty="0"/>
+      <p:pic>
+        <p:nvPicPr>
+          <p:cNvPr id="5" name="Image 0" descr="System page, Cloud tab: the AWS architecture from the device through IoT Core, Lambda, DynamoDB, EventBridge, Step Functions, Polly and SNS to the dashboard, with live numbers">    </p:cNvPr>
+          <p:cNvPicPr>
+            <a:picLocks noChangeAspect="1"/>
+          </p:cNvPicPr>
+          <p:nvPr/>
+        </p:nvPicPr>
+        <p:blipFill>
+          <a:blip r:embed="rId1"/>
+          <a:stretch>
+            <a:fillRect/>
+          </a:stretch>
+        </p:blipFill>
+        <p:spPr>
+          <a:xfrm>
+            <a:off x="998378" y="2103120"/>
+            <a:ext cx="10194939" cy="3657600"/>
+          </a:xfrm>
+          <a:prstGeom prst="rect">
+            <a:avLst/>
+          </a:prstGeom>
+        </p:spPr>
+      </p:pic>
+      <p:sp>
+        <p:nvSpPr>
+          <p:cNvPr id="6" name="Text 3"/>
+          <p:cNvSpPr txBox="1"/>
+          <p:nvPr/>
+        </p:nvSpPr>
+        <p:spPr>
+          <a:xfrm>
+            <a:off x="998378" y="5870448"/>
+            <a:ext cx="10194939" cy="274320"/>
+          </a:xfrm>
+          <a:prstGeom prst="rect">
+            <a:avLst/>
+          </a:prstGeom>
+          <a:noFill/>
+          <a:ln/>
+        </p:spPr>
+        <p:txBody>
+          <a:bodyPr wrap="square" lIns="0" tIns="0" rIns="0" bIns="0" rtlCol="0" anchor="t"/>
+          <a:lstStyle/>
+          <a:p>
+            <a:pPr indent="0" marL="0">
+              <a:buNone/>
+            </a:pPr>
+            <a:r>
+              <a:rPr lang="en-US" sz="1200" dirty="0">
+                <a:solidFill>
+                  <a:srgbClr val="9AABBA"/>
+                </a:solidFill>
+                <a:latin typeface="Calibri" pitchFamily="34" charset="0"/>
+                <a:ea typeface="Calibri" pitchFamily="34" charset="-122"/>
+                <a:cs typeface="Calibri" pitchFamily="34" charset="-120"/>
+              </a:rPr>
+              <a:t>System page, Cloud tab: every box is a deployed AWS service, with live numbers from CloudWatch and DynamoDB.</a:t>
+            </a:r>
+            <a:endParaRPr lang="en-US" sz="1200" dirty="0"/>
           </a:p>
         </p:txBody>
       </p:sp>
@@ -6717,7 +6514,7 @@
             <a:lvl1pPr>
               <a:defRPr sz="1200">
                 <a:solidFill>
-                  <a:srgbClr val="4A5A68"/>
+                  <a:srgbClr val="7D90A3"/>
                 </a:solidFill>
                 <a:latin typeface="Consolas"/>
                 <a:ea typeface="Consolas"/>
@@ -6760,9 +6557,114 @@
           <a:chExt cx="0" cy="0"/>
         </a:xfrm>
       </p:grpSpPr>
+      <p:sp>
+        <p:nvSpPr>
+          <p:cNvPr id="2" name="Text 0"/>
+          <p:cNvSpPr txBox="1"/>
+          <p:nvPr/>
+        </p:nvSpPr>
+        <p:spPr>
+          <a:xfrm>
+            <a:off x="813816" y="813816"/>
+            <a:ext cx="10564063" cy="292608"/>
+          </a:xfrm>
+          <a:prstGeom prst="rect">
+            <a:avLst/>
+          </a:prstGeom>
+          <a:noFill/>
+          <a:ln/>
+        </p:spPr>
+        <p:txBody>
+          <a:bodyPr wrap="square" lIns="0" tIns="0" rIns="0" bIns="0" rtlCol="0" anchor="t"/>
+          <a:lstStyle/>
+          <a:p>
+            <a:pPr indent="0" marL="0">
+              <a:buNone/>
+            </a:pPr>
+            <a:r>
+              <a:rPr lang="en-US" sz="1200" spc="300" kern="0" dirty="0">
+                <a:solidFill>
+                  <a:srgbClr val="5EEAD4"/>
+                </a:solidFill>
+                <a:latin typeface="Consolas" pitchFamily="34" charset="0"/>
+                <a:ea typeface="Consolas" pitchFamily="34" charset="-122"/>
+                <a:cs typeface="Consolas" pitchFamily="34" charset="-120"/>
+              </a:rPr>
+              <a:t>13 · AMAZON LOCATION</a:t>
+            </a:r>
+            <a:endParaRPr lang="en-US" sz="1200" dirty="0"/>
+          </a:p>
+        </p:txBody>
+      </p:sp>
+      <p:sp>
+        <p:nvSpPr>
+          <p:cNvPr id="3" name="Text 0"/>
+          <p:cNvSpPr/>
+          <p:nvPr>
+            <p:ph idx="100" type="title" hasCustomPrompt="1"/>
+          </p:nvPr>
+        </p:nvSpPr>
+        <p:spPr>
+          <a:xfrm>
+            <a:off x="813816" y="1161288"/>
+            <a:ext cx="10564063" cy="1188720"/>
+          </a:xfrm>
+          <a:prstGeom prst="rect">
+            <a:avLst/>
+          </a:prstGeom>
+          <a:noFill/>
+          <a:ln/>
+        </p:spPr>
+        <p:txBody>
+          <a:bodyPr wrap="square" lIns="0" tIns="0" rIns="0" bIns="0" rtlCol="0" anchor="t"/>
+          <a:lstStyle/>
+          <a:p>
+            <a:pPr algn="l" indent="0" marL="0">
+              <a:buNone/>
+            </a:pPr>
+            <a:r>
+              <a:rPr lang="en-US" sz="3600" b="1" dirty="0">
+                <a:solidFill>
+                  <a:srgbClr val="E8EEF2"/>
+                </a:solidFill>
+                <a:latin typeface="Calibri" pitchFamily="34" charset="0"/>
+                <a:ea typeface="Calibri" pitchFamily="34" charset="-122"/>
+                <a:cs typeface="Calibri" pitchFamily="34" charset="-120"/>
+              </a:rPr>
+              <a:t>Geofences switch the fans on before the air turns</a:t>
+            </a:r>
+            <a:endParaRPr lang="en-US" sz="3600" dirty="0"/>
+          </a:p>
+        </p:txBody>
+      </p:sp>
+      <p:sp>
+        <p:nvSpPr>
+          <p:cNvPr id="4" name="Shape 2"/>
+          <p:cNvSpPr/>
+          <p:nvPr/>
+        </p:nvSpPr>
+        <p:spPr>
+          <a:xfrm>
+            <a:off x="947776" y="2075688"/>
+            <a:ext cx="10296144" cy="3712464"/>
+          </a:xfrm>
+          <a:prstGeom prst="rect">
+            <a:avLst/>
+          </a:prstGeom>
+          <a:solidFill>
+            <a:srgbClr val="22303D"/>
+          </a:solidFill>
+          <a:ln w="12700">
+            <a:solidFill>
+              <a:srgbClr val="22303D"/>
+            </a:solidFill>
+            <a:prstDash val="solid"/>
+          </a:ln>
+        </p:spPr>
+      </p:sp>
       <p:pic>
         <p:nvPicPr>
-          <p:cNvPr id="2" name="Image 0" descr="BreatheIQ logo">    </p:cNvPr>
+          <p:cNvPr id="5" name="Image 0" descr="Fleet page: Amazon Location map of the route from New Delhi to Prayagraj with the pollution-zone geofences and the train">    </p:cNvPr>
           <p:cNvPicPr>
             <a:picLocks noChangeAspect="1"/>
           </p:cNvPicPr>
@@ -6776,6 +6678,971 @@
         </p:blipFill>
         <p:spPr>
           <a:xfrm>
+            <a:off x="975208" y="2103120"/>
+            <a:ext cx="10241280" cy="3657600"/>
+          </a:xfrm>
+          <a:prstGeom prst="rect">
+            <a:avLst/>
+          </a:prstGeom>
+        </p:spPr>
+      </p:pic>
+      <p:sp>
+        <p:nvSpPr>
+          <p:cNvPr id="6" name="Text 3"/>
+          <p:cNvSpPr txBox="1"/>
+          <p:nvPr/>
+        </p:nvSpPr>
+        <p:spPr>
+          <a:xfrm>
+            <a:off x="975208" y="5870448"/>
+            <a:ext cx="10241280" cy="274320"/>
+          </a:xfrm>
+          <a:prstGeom prst="rect">
+            <a:avLst/>
+          </a:prstGeom>
+          <a:noFill/>
+          <a:ln/>
+        </p:spPr>
+        <p:txBody>
+          <a:bodyPr wrap="square" lIns="0" tIns="0" rIns="0" bIns="0" rtlCol="0" anchor="t"/>
+          <a:lstStyle/>
+          <a:p>
+            <a:pPr indent="0" marL="0">
+              <a:buNone/>
+            </a:pPr>
+            <a:r>
+              <a:rPr lang="en-US" sz="1200" dirty="0">
+                <a:solidFill>
+                  <a:srgbClr val="9AABBA"/>
+                </a:solidFill>
+                <a:latin typeface="Calibri" pitchFamily="34" charset="0"/>
+                <a:ea typeface="Calibri" pitchFamily="34" charset="-122"/>
+                <a:cs typeface="Calibri" pitchFamily="34" charset="-120"/>
+              </a:rPr>
+              <a:t>Fleet page: Amazon Location tracks coach B2 from New Delhi to Prayagraj. Entering a pollution-zone geofence boosts ventilation early.</a:t>
+            </a:r>
+            <a:endParaRPr lang="en-US" sz="1200" dirty="0"/>
+          </a:p>
+        </p:txBody>
+      </p:sp>
+      <p:sp>
+        <p:nvSpPr>
+          <p:cNvPr id="25" name="Slide Number Placeholder 0"/>
+          <p:cNvSpPr>
+            <a:spLocks noGrp="1"/>
+          </p:cNvSpPr>
+          <p:nvPr>
+            <p:ph type="sldNum" sz="quarter" idx="4294967295"/>
+          </p:nvPr>
+        </p:nvSpPr>
+        <p:spPr>
+          <a:xfrm>
+            <a:off x="10463479" y="6263640"/>
+            <a:ext cx="914400" cy="274320"/>
+          </a:xfrm>
+          <a:prstGeom prst="rect">
+            <a:avLst/>
+          </a:prstGeom>
+          <a:extLst>
+            <a:ext uri="{C572A759-6A51-4108-AA02-DFA0A04FC94B}">
+              <ma14:wrappingTextBoxFlag xmlns:ma14="http://schemas.microsoft.com/office/mac/drawingml/2011/main" val="0"/>
+            </a:ext>
+          </a:extLst>
+        </p:spPr>
+        <p:txBody>
+          <a:bodyPr/>
+          <a:lstStyle>
+            <a:lvl1pPr>
+              <a:defRPr sz="1200">
+                <a:solidFill>
+                  <a:srgbClr val="7D90A3"/>
+                </a:solidFill>
+                <a:latin typeface="Consolas"/>
+                <a:ea typeface="Consolas"/>
+                <a:cs typeface="Consolas"/>
+              </a:defRPr>
+            </a:lvl1pPr>
+          </a:lstStyle>
+          <a:p>
+            <a:pPr algn="r"/>
+            <a:fld id="{F7021451-1387-4CA6-816F-3879F97B5CBC}" type="slidenum">
+              <a:rPr b="0" lang="en-US"/>
+              <a:t>14</a:t>
+            </a:fld>
+            <a:endParaRPr lang="en-US"/>
+          </a:p>
+        </p:txBody>
+      </p:sp>
+    </p:spTree>
+  </p:cSld>
+  <p:clrMapOvr>
+    <a:masterClrMapping/>
+  </p:clrMapOvr>
+</p:sld>
+</file>
+
+<file path=ppt/slides/slide15.xml><?xml version="1.0" encoding="utf-8"?>
+<p:sld xmlns:a="http://schemas.openxmlformats.org/drawingml/2006/main" xmlns:r="http://schemas.openxmlformats.org/officeDocument/2006/relationships" xmlns:p="http://schemas.openxmlformats.org/presentationml/2006/main">
+  <p:cSld name="Slide 15">
+    <p:spTree>
+      <p:nvGrpSpPr>
+        <p:cNvPr id="1" name=""/>
+        <p:cNvGrpSpPr/>
+        <p:nvPr/>
+      </p:nvGrpSpPr>
+      <p:grpSpPr>
+        <a:xfrm>
+          <a:off x="0" y="0"/>
+          <a:ext cx="0" cy="0"/>
+          <a:chOff x="0" y="0"/>
+          <a:chExt cx="0" cy="0"/>
+        </a:xfrm>
+      </p:grpSpPr>
+      <p:sp>
+        <p:nvSpPr>
+          <p:cNvPr id="2" name="Text 0"/>
+          <p:cNvSpPr txBox="1"/>
+          <p:nvPr/>
+        </p:nvSpPr>
+        <p:spPr>
+          <a:xfrm>
+            <a:off x="813816" y="813816"/>
+            <a:ext cx="10564063" cy="292608"/>
+          </a:xfrm>
+          <a:prstGeom prst="rect">
+            <a:avLst/>
+          </a:prstGeom>
+          <a:noFill/>
+          <a:ln/>
+        </p:spPr>
+        <p:txBody>
+          <a:bodyPr wrap="square" lIns="0" tIns="0" rIns="0" bIns="0" rtlCol="0" anchor="t"/>
+          <a:lstStyle/>
+          <a:p>
+            <a:pPr indent="0" marL="0">
+              <a:buNone/>
+            </a:pPr>
+            <a:r>
+              <a:rPr lang="en-US" sz="1200" spc="300" kern="0" dirty="0">
+                <a:solidFill>
+                  <a:srgbClr val="0F766E"/>
+                </a:solidFill>
+                <a:latin typeface="Consolas" pitchFamily="34" charset="0"/>
+                <a:ea typeface="Consolas" pitchFamily="34" charset="-122"/>
+                <a:cs typeface="Consolas" pitchFamily="34" charset="-120"/>
+              </a:rPr>
+              <a:t>14 · ROADMAP</a:t>
+            </a:r>
+            <a:endParaRPr lang="en-US" sz="1200" dirty="0"/>
+          </a:p>
+        </p:txBody>
+      </p:sp>
+      <p:sp>
+        <p:nvSpPr>
+          <p:cNvPr id="3" name="Text 0"/>
+          <p:cNvSpPr/>
+          <p:nvPr>
+            <p:ph idx="100" type="title" hasCustomPrompt="1"/>
+          </p:nvPr>
+        </p:nvSpPr>
+        <p:spPr>
+          <a:xfrm>
+            <a:off x="813816" y="1161288"/>
+            <a:ext cx="10564063" cy="1188720"/>
+          </a:xfrm>
+          <a:prstGeom prst="rect">
+            <a:avLst/>
+          </a:prstGeom>
+          <a:noFill/>
+          <a:ln/>
+        </p:spPr>
+        <p:txBody>
+          <a:bodyPr wrap="square" lIns="0" tIns="0" rIns="0" bIns="0" rtlCol="0" anchor="t"/>
+          <a:lstStyle/>
+          <a:p>
+            <a:pPr algn="l" indent="0" marL="0">
+              <a:buNone/>
+            </a:pPr>
+            <a:r>
+              <a:rPr lang="en-US" sz="3600" b="1" dirty="0">
+                <a:solidFill>
+                  <a:srgbClr val="14202B"/>
+                </a:solidFill>
+                <a:latin typeface="Calibri" pitchFamily="34" charset="0"/>
+                <a:ea typeface="Calibri" pitchFamily="34" charset="-122"/>
+                <a:cs typeface="Calibri" pitchFamily="34" charset="-120"/>
+              </a:rPr>
+              <a:t>From one coach to the whole train</a:t>
+            </a:r>
+            <a:endParaRPr lang="en-US" sz="3600" dirty="0"/>
+          </a:p>
+        </p:txBody>
+      </p:sp>
+      <p:sp>
+        <p:nvSpPr>
+          <p:cNvPr id="4" name="Shape 2"/>
+          <p:cNvSpPr/>
+          <p:nvPr/>
+        </p:nvSpPr>
+        <p:spPr>
+          <a:xfrm>
+            <a:off x="813816" y="2514600"/>
+            <a:ext cx="5181448" cy="1659636"/>
+          </a:xfrm>
+          <a:prstGeom prst="roundRect">
+            <a:avLst>
+              <a:gd name="adj" fmla="val 5510"/>
+            </a:avLst>
+          </a:prstGeom>
+          <a:solidFill>
+            <a:srgbClr val="FBFCFB"/>
+          </a:solidFill>
+          <a:ln w="12700">
+            <a:solidFill>
+              <a:srgbClr val="D9E1DF"/>
+            </a:solidFill>
+            <a:prstDash val="solid"/>
+          </a:ln>
+        </p:spPr>
+      </p:sp>
+      <p:sp>
+        <p:nvSpPr>
+          <p:cNvPr id="5" name="Shape 3"/>
+          <p:cNvSpPr/>
+          <p:nvPr/>
+        </p:nvSpPr>
+        <p:spPr>
+          <a:xfrm>
+            <a:off x="1088136" y="2788920"/>
+            <a:ext cx="502920" cy="502920"/>
+          </a:xfrm>
+          <a:prstGeom prst="ellipse">
+            <a:avLst/>
+          </a:prstGeom>
+          <a:solidFill>
+            <a:srgbClr val="0F766E"/>
+          </a:solidFill>
+          <a:ln w="12700">
+            <a:solidFill>
+              <a:srgbClr val="0F766E"/>
+            </a:solidFill>
+            <a:prstDash val="solid"/>
+          </a:ln>
+        </p:spPr>
+      </p:sp>
+      <p:sp>
+        <p:nvSpPr>
+          <p:cNvPr id="6" name="Text 4"/>
+          <p:cNvSpPr txBox="1"/>
+          <p:nvPr/>
+        </p:nvSpPr>
+        <p:spPr>
+          <a:xfrm>
+            <a:off x="1088136" y="2788920"/>
+            <a:ext cx="502920" cy="502920"/>
+          </a:xfrm>
+          <a:prstGeom prst="rect">
+            <a:avLst/>
+          </a:prstGeom>
+          <a:noFill/>
+          <a:ln/>
+        </p:spPr>
+        <p:txBody>
+          <a:bodyPr wrap="square" lIns="0" tIns="0" rIns="0" bIns="0" rtlCol="0" anchor="ctr"/>
+          <a:lstStyle/>
+          <a:p>
+            <a:pPr algn="ctr" indent="0" marL="0">
+              <a:buNone/>
+            </a:pPr>
+            <a:r>
+              <a:rPr lang="en-US" sz="1500" b="1" dirty="0">
+                <a:solidFill>
+                  <a:srgbClr val="F2F5F4"/>
+                </a:solidFill>
+                <a:latin typeface="Calibri" pitchFamily="34" charset="0"/>
+                <a:ea typeface="Calibri" pitchFamily="34" charset="-122"/>
+                <a:cs typeface="Calibri" pitchFamily="34" charset="-120"/>
+              </a:rPr>
+              <a:t>1</a:t>
+            </a:r>
+            <a:endParaRPr lang="en-US" sz="1500" dirty="0"/>
+          </a:p>
+        </p:txBody>
+      </p:sp>
+      <p:sp>
+        <p:nvSpPr>
+          <p:cNvPr id="7" name="Text 5"/>
+          <p:cNvSpPr txBox="1"/>
+          <p:nvPr/>
+        </p:nvSpPr>
+        <p:spPr>
+          <a:xfrm>
+            <a:off x="1773936" y="2807208"/>
+            <a:ext cx="3947008" cy="384048"/>
+          </a:xfrm>
+          <a:prstGeom prst="rect">
+            <a:avLst/>
+          </a:prstGeom>
+          <a:noFill/>
+          <a:ln/>
+        </p:spPr>
+        <p:txBody>
+          <a:bodyPr wrap="square" lIns="0" tIns="0" rIns="0" bIns="0" rtlCol="0" anchor="t"/>
+          <a:lstStyle/>
+          <a:p>
+            <a:pPr indent="0" marL="0">
+              <a:buNone/>
+            </a:pPr>
+            <a:r>
+              <a:rPr lang="en-US" sz="1800" b="1" dirty="0">
+                <a:solidFill>
+                  <a:srgbClr val="14202B"/>
+                </a:solidFill>
+                <a:latin typeface="Calibri" pitchFamily="34" charset="0"/>
+                <a:ea typeface="Calibri" pitchFamily="34" charset="-122"/>
+                <a:cs typeface="Calibri" pitchFamily="34" charset="-120"/>
+              </a:rPr>
+              <a:t>PM2.5 and PM10 in the frame</a:t>
+            </a:r>
+            <a:endParaRPr lang="en-US" sz="1800" dirty="0"/>
+          </a:p>
+        </p:txBody>
+      </p:sp>
+      <p:sp>
+        <p:nvSpPr>
+          <p:cNvPr id="8" name="Text 6"/>
+          <p:cNvSpPr txBox="1"/>
+          <p:nvPr/>
+        </p:nvSpPr>
+        <p:spPr>
+          <a:xfrm>
+            <a:off x="1773936" y="3246120"/>
+            <a:ext cx="3947008" cy="777240"/>
+          </a:xfrm>
+          <a:prstGeom prst="rect">
+            <a:avLst/>
+          </a:prstGeom>
+          <a:noFill/>
+          <a:ln/>
+        </p:spPr>
+        <p:txBody>
+          <a:bodyPr wrap="square" lIns="0" tIns="0" rIns="0" bIns="0" rtlCol="0" anchor="t"/>
+          <a:lstStyle/>
+          <a:p>
+            <a:pPr indent="0" marL="0">
+              <a:buNone/>
+            </a:pPr>
+            <a:r>
+              <a:rPr lang="en-US" sz="1400" dirty="0">
+                <a:solidFill>
+                  <a:srgbClr val="4A5A68"/>
+                </a:solidFill>
+                <a:latin typeface="Calibri" pitchFamily="34" charset="0"/>
+                <a:ea typeface="Calibri" pitchFamily="34" charset="-122"/>
+                <a:cs typeface="Calibri" pitchFamily="34" charset="-120"/>
+              </a:rPr>
+              <a:t>The firmware sends PM1.0 today; sending all three removes the estimate.</a:t>
+            </a:r>
+            <a:endParaRPr lang="en-US" sz="1400" dirty="0"/>
+          </a:p>
+        </p:txBody>
+      </p:sp>
+      <p:sp>
+        <p:nvSpPr>
+          <p:cNvPr id="9" name="Shape 7"/>
+          <p:cNvSpPr/>
+          <p:nvPr/>
+        </p:nvSpPr>
+        <p:spPr>
+          <a:xfrm>
+            <a:off x="6196432" y="2514600"/>
+            <a:ext cx="5181448" cy="1659636"/>
+          </a:xfrm>
+          <a:prstGeom prst="roundRect">
+            <a:avLst>
+              <a:gd name="adj" fmla="val 5510"/>
+            </a:avLst>
+          </a:prstGeom>
+          <a:solidFill>
+            <a:srgbClr val="FBFCFB"/>
+          </a:solidFill>
+          <a:ln w="12700">
+            <a:solidFill>
+              <a:srgbClr val="D9E1DF"/>
+            </a:solidFill>
+            <a:prstDash val="solid"/>
+          </a:ln>
+        </p:spPr>
+      </p:sp>
+      <p:sp>
+        <p:nvSpPr>
+          <p:cNvPr id="10" name="Shape 8"/>
+          <p:cNvSpPr/>
+          <p:nvPr/>
+        </p:nvSpPr>
+        <p:spPr>
+          <a:xfrm>
+            <a:off x="6470752" y="2788920"/>
+            <a:ext cx="502920" cy="502920"/>
+          </a:xfrm>
+          <a:prstGeom prst="ellipse">
+            <a:avLst/>
+          </a:prstGeom>
+          <a:solidFill>
+            <a:srgbClr val="0F766E"/>
+          </a:solidFill>
+          <a:ln w="12700">
+            <a:solidFill>
+              <a:srgbClr val="0F766E"/>
+            </a:solidFill>
+            <a:prstDash val="solid"/>
+          </a:ln>
+        </p:spPr>
+      </p:sp>
+      <p:sp>
+        <p:nvSpPr>
+          <p:cNvPr id="11" name="Text 9"/>
+          <p:cNvSpPr txBox="1"/>
+          <p:nvPr/>
+        </p:nvSpPr>
+        <p:spPr>
+          <a:xfrm>
+            <a:off x="6470752" y="2788920"/>
+            <a:ext cx="502920" cy="502920"/>
+          </a:xfrm>
+          <a:prstGeom prst="rect">
+            <a:avLst/>
+          </a:prstGeom>
+          <a:noFill/>
+          <a:ln/>
+        </p:spPr>
+        <p:txBody>
+          <a:bodyPr wrap="square" lIns="0" tIns="0" rIns="0" bIns="0" rtlCol="0" anchor="ctr"/>
+          <a:lstStyle/>
+          <a:p>
+            <a:pPr algn="ctr" indent="0" marL="0">
+              <a:buNone/>
+            </a:pPr>
+            <a:r>
+              <a:rPr lang="en-US" sz="1500" b="1" dirty="0">
+                <a:solidFill>
+                  <a:srgbClr val="F2F5F4"/>
+                </a:solidFill>
+                <a:latin typeface="Calibri" pitchFamily="34" charset="0"/>
+                <a:ea typeface="Calibri" pitchFamily="34" charset="-122"/>
+                <a:cs typeface="Calibri" pitchFamily="34" charset="-120"/>
+              </a:rPr>
+              <a:t>2</a:t>
+            </a:r>
+            <a:endParaRPr lang="en-US" sz="1500" dirty="0"/>
+          </a:p>
+        </p:txBody>
+      </p:sp>
+      <p:sp>
+        <p:nvSpPr>
+          <p:cNvPr id="12" name="Text 10"/>
+          <p:cNvSpPr txBox="1"/>
+          <p:nvPr/>
+        </p:nvSpPr>
+        <p:spPr>
+          <a:xfrm>
+            <a:off x="7156552" y="2807208"/>
+            <a:ext cx="3947008" cy="384048"/>
+          </a:xfrm>
+          <a:prstGeom prst="rect">
+            <a:avLst/>
+          </a:prstGeom>
+          <a:noFill/>
+          <a:ln/>
+        </p:spPr>
+        <p:txBody>
+          <a:bodyPr wrap="square" lIns="0" tIns="0" rIns="0" bIns="0" rtlCol="0" anchor="t"/>
+          <a:lstStyle/>
+          <a:p>
+            <a:pPr indent="0" marL="0">
+              <a:buNone/>
+            </a:pPr>
+            <a:r>
+              <a:rPr lang="en-US" sz="1800" b="1" dirty="0">
+                <a:solidFill>
+                  <a:srgbClr val="14202B"/>
+                </a:solidFill>
+                <a:latin typeface="Calibri" pitchFamily="34" charset="0"/>
+                <a:ea typeface="Calibri" pitchFamily="34" charset="-122"/>
+                <a:cs typeface="Calibri" pitchFamily="34" charset="-120"/>
+              </a:rPr>
+              <a:t>Occupancy sensing</a:t>
+            </a:r>
+            <a:endParaRPr lang="en-US" sz="1800" dirty="0"/>
+          </a:p>
+        </p:txBody>
+      </p:sp>
+      <p:sp>
+        <p:nvSpPr>
+          <p:cNvPr id="13" name="Text 11"/>
+          <p:cNvSpPr txBox="1"/>
+          <p:nvPr/>
+        </p:nvSpPr>
+        <p:spPr>
+          <a:xfrm>
+            <a:off x="7156552" y="3246120"/>
+            <a:ext cx="3947008" cy="777240"/>
+          </a:xfrm>
+          <a:prstGeom prst="rect">
+            <a:avLst/>
+          </a:prstGeom>
+          <a:noFill/>
+          <a:ln/>
+        </p:spPr>
+        <p:txBody>
+          <a:bodyPr wrap="square" lIns="0" tIns="0" rIns="0" bIns="0" rtlCol="0" anchor="t"/>
+          <a:lstStyle/>
+          <a:p>
+            <a:pPr indent="0" marL="0">
+              <a:buNone/>
+            </a:pPr>
+            <a:r>
+              <a:rPr lang="en-US" sz="1400" dirty="0">
+                <a:solidFill>
+                  <a:srgbClr val="4A5A68"/>
+                </a:solidFill>
+                <a:latin typeface="Calibri" pitchFamily="34" charset="0"/>
+                <a:ea typeface="Calibri" pitchFamily="34" charset="-122"/>
+                <a:cs typeface="Calibri" pitchFamily="34" charset="-120"/>
+              </a:rPr>
+              <a:t>The ozone interlock then runs on a measured signal.</a:t>
+            </a:r>
+            <a:endParaRPr lang="en-US" sz="1400" dirty="0"/>
+          </a:p>
+        </p:txBody>
+      </p:sp>
+      <p:sp>
+        <p:nvSpPr>
+          <p:cNvPr id="14" name="Shape 12"/>
+          <p:cNvSpPr/>
+          <p:nvPr/>
+        </p:nvSpPr>
+        <p:spPr>
+          <a:xfrm>
+            <a:off x="813816" y="4375404"/>
+            <a:ext cx="5181448" cy="1659636"/>
+          </a:xfrm>
+          <a:prstGeom prst="roundRect">
+            <a:avLst>
+              <a:gd name="adj" fmla="val 5510"/>
+            </a:avLst>
+          </a:prstGeom>
+          <a:solidFill>
+            <a:srgbClr val="FBFCFB"/>
+          </a:solidFill>
+          <a:ln w="12700">
+            <a:solidFill>
+              <a:srgbClr val="D9E1DF"/>
+            </a:solidFill>
+            <a:prstDash val="solid"/>
+          </a:ln>
+        </p:spPr>
+      </p:sp>
+      <p:sp>
+        <p:nvSpPr>
+          <p:cNvPr id="15" name="Shape 13"/>
+          <p:cNvSpPr/>
+          <p:nvPr/>
+        </p:nvSpPr>
+        <p:spPr>
+          <a:xfrm>
+            <a:off x="1088136" y="4649724"/>
+            <a:ext cx="502920" cy="502920"/>
+          </a:xfrm>
+          <a:prstGeom prst="ellipse">
+            <a:avLst/>
+          </a:prstGeom>
+          <a:solidFill>
+            <a:srgbClr val="0F766E"/>
+          </a:solidFill>
+          <a:ln w="12700">
+            <a:solidFill>
+              <a:srgbClr val="0F766E"/>
+            </a:solidFill>
+            <a:prstDash val="solid"/>
+          </a:ln>
+        </p:spPr>
+      </p:sp>
+      <p:sp>
+        <p:nvSpPr>
+          <p:cNvPr id="16" name="Text 14"/>
+          <p:cNvSpPr txBox="1"/>
+          <p:nvPr/>
+        </p:nvSpPr>
+        <p:spPr>
+          <a:xfrm>
+            <a:off x="1088136" y="4649724"/>
+            <a:ext cx="502920" cy="502920"/>
+          </a:xfrm>
+          <a:prstGeom prst="rect">
+            <a:avLst/>
+          </a:prstGeom>
+          <a:noFill/>
+          <a:ln/>
+        </p:spPr>
+        <p:txBody>
+          <a:bodyPr wrap="square" lIns="0" tIns="0" rIns="0" bIns="0" rtlCol="0" anchor="ctr"/>
+          <a:lstStyle/>
+          <a:p>
+            <a:pPr algn="ctr" indent="0" marL="0">
+              <a:buNone/>
+            </a:pPr>
+            <a:r>
+              <a:rPr lang="en-US" sz="1500" b="1" dirty="0">
+                <a:solidFill>
+                  <a:srgbClr val="F2F5F4"/>
+                </a:solidFill>
+                <a:latin typeface="Calibri" pitchFamily="34" charset="0"/>
+                <a:ea typeface="Calibri" pitchFamily="34" charset="-122"/>
+                <a:cs typeface="Calibri" pitchFamily="34" charset="-120"/>
+              </a:rPr>
+              <a:t>3</a:t>
+            </a:r>
+            <a:endParaRPr lang="en-US" sz="1500" dirty="0"/>
+          </a:p>
+        </p:txBody>
+      </p:sp>
+      <p:sp>
+        <p:nvSpPr>
+          <p:cNvPr id="17" name="Text 15"/>
+          <p:cNvSpPr txBox="1"/>
+          <p:nvPr/>
+        </p:nvSpPr>
+        <p:spPr>
+          <a:xfrm>
+            <a:off x="1773936" y="4668012"/>
+            <a:ext cx="3947008" cy="384048"/>
+          </a:xfrm>
+          <a:prstGeom prst="rect">
+            <a:avLst/>
+          </a:prstGeom>
+          <a:noFill/>
+          <a:ln/>
+        </p:spPr>
+        <p:txBody>
+          <a:bodyPr wrap="square" lIns="0" tIns="0" rIns="0" bIns="0" rtlCol="0" anchor="t"/>
+          <a:lstStyle/>
+          <a:p>
+            <a:pPr indent="0" marL="0">
+              <a:buNone/>
+            </a:pPr>
+            <a:r>
+              <a:rPr lang="en-US" sz="1800" b="1" dirty="0">
+                <a:solidFill>
+                  <a:srgbClr val="14202B"/>
+                </a:solidFill>
+                <a:latin typeface="Calibri" pitchFamily="34" charset="0"/>
+                <a:ea typeface="Calibri" pitchFamily="34" charset="-122"/>
+                <a:cs typeface="Calibri" pitchFamily="34" charset="-120"/>
+              </a:rPr>
+              <a:t>Straight to AWS IoT Core</a:t>
+            </a:r>
+            <a:endParaRPr lang="en-US" sz="1800" dirty="0"/>
+          </a:p>
+        </p:txBody>
+      </p:sp>
+      <p:sp>
+        <p:nvSpPr>
+          <p:cNvPr id="18" name="Text 16"/>
+          <p:cNvSpPr txBox="1"/>
+          <p:nvPr/>
+        </p:nvSpPr>
+        <p:spPr>
+          <a:xfrm>
+            <a:off x="1773936" y="5106924"/>
+            <a:ext cx="3947008" cy="777240"/>
+          </a:xfrm>
+          <a:prstGeom prst="rect">
+            <a:avLst/>
+          </a:prstGeom>
+          <a:noFill/>
+          <a:ln/>
+        </p:spPr>
+        <p:txBody>
+          <a:bodyPr wrap="square" lIns="0" tIns="0" rIns="0" bIns="0" rtlCol="0" anchor="t"/>
+          <a:lstStyle/>
+          <a:p>
+            <a:pPr indent="0" marL="0">
+              <a:buNone/>
+            </a:pPr>
+            <a:r>
+              <a:rPr lang="en-US" sz="1400" dirty="0">
+                <a:solidFill>
+                  <a:srgbClr val="4A5A68"/>
+                </a:solidFill>
+                <a:latin typeface="Calibri" pitchFamily="34" charset="0"/>
+                <a:ea typeface="Calibri" pitchFamily="34" charset="-122"/>
+                <a:cs typeface="Calibri" pitchFamily="34" charset="-120"/>
+              </a:rPr>
+              <a:t>The ESP8266 publishes with its own X.509 certificate, already issued.</a:t>
+            </a:r>
+            <a:endParaRPr lang="en-US" sz="1400" dirty="0"/>
+          </a:p>
+        </p:txBody>
+      </p:sp>
+      <p:sp>
+        <p:nvSpPr>
+          <p:cNvPr id="19" name="Shape 17"/>
+          <p:cNvSpPr/>
+          <p:nvPr/>
+        </p:nvSpPr>
+        <p:spPr>
+          <a:xfrm>
+            <a:off x="6196432" y="4375404"/>
+            <a:ext cx="5181448" cy="1659636"/>
+          </a:xfrm>
+          <a:prstGeom prst="roundRect">
+            <a:avLst>
+              <a:gd name="adj" fmla="val 5510"/>
+            </a:avLst>
+          </a:prstGeom>
+          <a:solidFill>
+            <a:srgbClr val="FBFCFB"/>
+          </a:solidFill>
+          <a:ln w="12700">
+            <a:solidFill>
+              <a:srgbClr val="D9E1DF"/>
+            </a:solidFill>
+            <a:prstDash val="solid"/>
+          </a:ln>
+        </p:spPr>
+      </p:sp>
+      <p:sp>
+        <p:nvSpPr>
+          <p:cNvPr id="20" name="Shape 18"/>
+          <p:cNvSpPr/>
+          <p:nvPr/>
+        </p:nvSpPr>
+        <p:spPr>
+          <a:xfrm>
+            <a:off x="6470752" y="4649724"/>
+            <a:ext cx="502920" cy="502920"/>
+          </a:xfrm>
+          <a:prstGeom prst="ellipse">
+            <a:avLst/>
+          </a:prstGeom>
+          <a:solidFill>
+            <a:srgbClr val="0F766E"/>
+          </a:solidFill>
+          <a:ln w="12700">
+            <a:solidFill>
+              <a:srgbClr val="0F766E"/>
+            </a:solidFill>
+            <a:prstDash val="solid"/>
+          </a:ln>
+        </p:spPr>
+      </p:sp>
+      <p:sp>
+        <p:nvSpPr>
+          <p:cNvPr id="21" name="Text 19"/>
+          <p:cNvSpPr txBox="1"/>
+          <p:nvPr/>
+        </p:nvSpPr>
+        <p:spPr>
+          <a:xfrm>
+            <a:off x="6470752" y="4649724"/>
+            <a:ext cx="502920" cy="502920"/>
+          </a:xfrm>
+          <a:prstGeom prst="rect">
+            <a:avLst/>
+          </a:prstGeom>
+          <a:noFill/>
+          <a:ln/>
+        </p:spPr>
+        <p:txBody>
+          <a:bodyPr wrap="square" lIns="0" tIns="0" rIns="0" bIns="0" rtlCol="0" anchor="ctr"/>
+          <a:lstStyle/>
+          <a:p>
+            <a:pPr algn="ctr" indent="0" marL="0">
+              <a:buNone/>
+            </a:pPr>
+            <a:r>
+              <a:rPr lang="en-US" sz="1500" b="1" dirty="0">
+                <a:solidFill>
+                  <a:srgbClr val="F2F5F4"/>
+                </a:solidFill>
+                <a:latin typeface="Calibri" pitchFamily="34" charset="0"/>
+                <a:ea typeface="Calibri" pitchFamily="34" charset="-122"/>
+                <a:cs typeface="Calibri" pitchFamily="34" charset="-120"/>
+              </a:rPr>
+              <a:t>4</a:t>
+            </a:r>
+            <a:endParaRPr lang="en-US" sz="1500" dirty="0"/>
+          </a:p>
+        </p:txBody>
+      </p:sp>
+      <p:sp>
+        <p:nvSpPr>
+          <p:cNvPr id="22" name="Text 20"/>
+          <p:cNvSpPr txBox="1"/>
+          <p:nvPr/>
+        </p:nvSpPr>
+        <p:spPr>
+          <a:xfrm>
+            <a:off x="7156552" y="4668012"/>
+            <a:ext cx="3947008" cy="384048"/>
+          </a:xfrm>
+          <a:prstGeom prst="rect">
+            <a:avLst/>
+          </a:prstGeom>
+          <a:noFill/>
+          <a:ln/>
+        </p:spPr>
+        <p:txBody>
+          <a:bodyPr wrap="square" lIns="0" tIns="0" rIns="0" bIns="0" rtlCol="0" anchor="t"/>
+          <a:lstStyle/>
+          <a:p>
+            <a:pPr indent="0" marL="0">
+              <a:buNone/>
+            </a:pPr>
+            <a:r>
+              <a:rPr lang="en-US" sz="1800" b="1" dirty="0">
+                <a:solidFill>
+                  <a:srgbClr val="14202B"/>
+                </a:solidFill>
+                <a:latin typeface="Calibri" pitchFamily="34" charset="0"/>
+                <a:ea typeface="Calibri" pitchFamily="34" charset="-122"/>
+                <a:cs typeface="Calibri" pitchFamily="34" charset="-120"/>
+              </a:rPr>
+              <a:t>One node per coach</a:t>
+            </a:r>
+            <a:endParaRPr lang="en-US" sz="1800" dirty="0"/>
+          </a:p>
+        </p:txBody>
+      </p:sp>
+      <p:sp>
+        <p:nvSpPr>
+          <p:cNvPr id="23" name="Text 21"/>
+          <p:cNvSpPr txBox="1"/>
+          <p:nvPr/>
+        </p:nvSpPr>
+        <p:spPr>
+          <a:xfrm>
+            <a:off x="7156552" y="5106924"/>
+            <a:ext cx="3947008" cy="777240"/>
+          </a:xfrm>
+          <a:prstGeom prst="rect">
+            <a:avLst/>
+          </a:prstGeom>
+          <a:noFill/>
+          <a:ln/>
+        </p:spPr>
+        <p:txBody>
+          <a:bodyPr wrap="square" lIns="0" tIns="0" rIns="0" bIns="0" rtlCol="0" anchor="t"/>
+          <a:lstStyle/>
+          <a:p>
+            <a:pPr indent="0" marL="0">
+              <a:buNone/>
+            </a:pPr>
+            <a:r>
+              <a:rPr lang="en-US" sz="1400" dirty="0">
+                <a:solidFill>
+                  <a:srgbClr val="4A5A68"/>
+                </a:solidFill>
+                <a:latin typeface="Calibri" pitchFamily="34" charset="0"/>
+                <a:ea typeface="Calibri" pitchFamily="34" charset="-122"/>
+                <a:cs typeface="Calibri" pitchFamily="34" charset="-120"/>
+              </a:rPr>
+              <a:t>A fleet-wide view, and advisories for passengers who flag a health condition when booking.</a:t>
+            </a:r>
+            <a:endParaRPr lang="en-US" sz="1400" dirty="0"/>
+          </a:p>
+        </p:txBody>
+      </p:sp>
+      <p:sp>
+        <p:nvSpPr>
+          <p:cNvPr id="25" name="Slide Number Placeholder 0"/>
+          <p:cNvSpPr>
+            <a:spLocks noGrp="1"/>
+          </p:cNvSpPr>
+          <p:nvPr>
+            <p:ph type="sldNum" sz="quarter" idx="4294967295"/>
+          </p:nvPr>
+        </p:nvSpPr>
+        <p:spPr>
+          <a:xfrm>
+            <a:off x="10463479" y="6263640"/>
+            <a:ext cx="914400" cy="274320"/>
+          </a:xfrm>
+          <a:prstGeom prst="rect">
+            <a:avLst/>
+          </a:prstGeom>
+          <a:extLst>
+            <a:ext uri="{C572A759-6A51-4108-AA02-DFA0A04FC94B}">
+              <ma14:wrappingTextBoxFlag xmlns:ma14="http://schemas.microsoft.com/office/mac/drawingml/2011/main" val="0"/>
+            </a:ext>
+          </a:extLst>
+        </p:spPr>
+        <p:txBody>
+          <a:bodyPr/>
+          <a:lstStyle>
+            <a:lvl1pPr>
+              <a:defRPr sz="1200">
+                <a:solidFill>
+                  <a:srgbClr val="4A5A68"/>
+                </a:solidFill>
+                <a:latin typeface="Consolas"/>
+                <a:ea typeface="Consolas"/>
+                <a:cs typeface="Consolas"/>
+              </a:defRPr>
+            </a:lvl1pPr>
+          </a:lstStyle>
+          <a:p>
+            <a:pPr algn="r"/>
+            <a:fld id="{F7021451-1387-4CA6-816F-3879F97B5CBC}" type="slidenum">
+              <a:rPr b="0" lang="en-US"/>
+              <a:t>15</a:t>
+            </a:fld>
+            <a:endParaRPr lang="en-US"/>
+          </a:p>
+        </p:txBody>
+      </p:sp>
+    </p:spTree>
+  </p:cSld>
+  <p:clrMapOvr>
+    <a:masterClrMapping/>
+  </p:clrMapOvr>
+</p:sld>
+</file>
+
+<file path=ppt/slides/slide16.xml><?xml version="1.0" encoding="utf-8"?>
+<p:sld xmlns:a="http://schemas.openxmlformats.org/drawingml/2006/main" xmlns:r="http://schemas.openxmlformats.org/officeDocument/2006/relationships" xmlns:p="http://schemas.openxmlformats.org/presentationml/2006/main">
+  <p:cSld name="Slide 16">
+    <p:spTree>
+      <p:nvGrpSpPr>
+        <p:cNvPr id="1" name=""/>
+        <p:cNvGrpSpPr/>
+        <p:nvPr/>
+      </p:nvGrpSpPr>
+      <p:grpSpPr>
+        <a:xfrm>
+          <a:off x="0" y="0"/>
+          <a:ext cx="0" cy="0"/>
+          <a:chOff x="0" y="0"/>
+          <a:chExt cx="0" cy="0"/>
+        </a:xfrm>
+      </p:grpSpPr>
+      <p:pic>
+        <p:nvPicPr>
+          <p:cNvPr id="2" name="Image 0" descr="BreatheIQ logo">    </p:cNvPr>
+          <p:cNvPicPr>
+            <a:picLocks noChangeAspect="1"/>
+          </p:cNvPicPr>
+          <p:nvPr/>
+        </p:nvPicPr>
+        <p:blipFill>
+          <a:blip r:embed="rId1"/>
+          <a:stretch>
+            <a:fillRect/>
+          </a:stretch>
+        </p:blipFill>
+        <p:spPr>
+          <a:xfrm>
             <a:off x="813816" y="740664"/>
             <a:ext cx="502920" cy="502920"/>
           </a:xfrm>
@@ -6914,7 +7781,7 @@
         <p:spPr>
           <a:xfrm>
             <a:off x="813816" y="2788920"/>
-            <a:ext cx="6400800" cy="365760"/>
+            <a:ext cx="7315200" cy="365760"/>
           </a:xfrm>
           <a:prstGeom prst="rect">
             <a:avLst/>
@@ -6945,7 +7812,7 @@
                   </a:extLst>
                 </a:hlinkClick>
               </a:rPr>
-              <a:t>main.d3abjrsxzx174i.amplifyapp.com</a:t>
+              <a:t>Live · main.d3abjrsxzx174i.amplifyapp.com</a:t>
             </a:r>
             <a:endParaRPr lang="en-US" sz="1500" dirty="0"/>
           </a:p>
@@ -6953,7 +7820,55 @@
       </p:sp>
       <p:sp>
         <p:nvSpPr>
-          <p:cNvPr id="7" name="Text 4"/>
+          <p:cNvPr id="7" name="Text 4">
+            <a:hlinkClick r:id="rId3" tooltip=""/>
+          </p:cNvPr>
+          <p:cNvSpPr txBox="1"/>
+          <p:nvPr/>
+        </p:nvSpPr>
+        <p:spPr>
+          <a:xfrm>
+            <a:off x="813816" y="3200400"/>
+            <a:ext cx="7315200" cy="365760"/>
+          </a:xfrm>
+          <a:prstGeom prst="rect">
+            <a:avLst/>
+          </a:prstGeom>
+          <a:noFill/>
+          <a:ln/>
+        </p:spPr>
+        <p:txBody>
+          <a:bodyPr wrap="square" lIns="0" tIns="0" rIns="0" bIns="0" rtlCol="0" anchor="t"/>
+          <a:lstStyle/>
+          <a:p>
+            <a:pPr indent="0" marL="0">
+              <a:buNone/>
+            </a:pPr>
+            <a:r>
+              <a:rPr lang="en-US" sz="1500" u="sng" dirty="0">
+                <a:solidFill>
+                  <a:srgbClr val="5EEAD4"/>
+                </a:solidFill>
+                <a:latin typeface="Consolas" pitchFamily="34" charset="0"/>
+                <a:ea typeface="Consolas" pitchFamily="34" charset="-122"/>
+                <a:cs typeface="Consolas" pitchFamily="34" charset="-120"/>
+                <a:hlinkClick r:id="rId3" invalidUrl="" action="" tgtFrame="" tooltip="" history="1" highlightClick="0" endSnd="0">
+                  <a:extLst>
+                    <a:ext uri="{A12FA001-AC4F-418D-AE19-62706E023703}">
+                      <ahyp:hlinkClr xmlns:ahyp="http://schemas.microsoft.com/office/drawing/2018/hyperlinkcolor" val="tx"/>
+                    </a:ext>
+                  </a:extLst>
+                </a:hlinkClick>
+              </a:rPr>
+              <a:t>Video · youtu.be/rmrwR7-hI4U</a:t>
+            </a:r>
+            <a:endParaRPr lang="en-US" sz="1500" dirty="0"/>
+          </a:p>
+        </p:txBody>
+      </p:sp>
+      <p:sp>
+        <p:nvSpPr>
+          <p:cNvPr id="8" name="Text 5"/>
           <p:cNvSpPr txBox="1"/>
           <p:nvPr/>
         </p:nvSpPr>
@@ -6992,7 +7907,7 @@
       </p:sp>
       <p:sp>
         <p:nvSpPr>
-          <p:cNvPr id="8" name="Shape 5"/>
+          <p:cNvPr id="9" name="Shape 6"/>
           <p:cNvSpPr/>
           <p:nvPr/>
         </p:nvSpPr>
@@ -7019,7 +7934,7 @@
       </p:sp>
       <p:sp>
         <p:nvSpPr>
-          <p:cNvPr id="9" name="Text 6"/>
+          <p:cNvPr id="10" name="Text 7"/>
           <p:cNvSpPr txBox="1"/>
           <p:nvPr/>
         </p:nvSpPr>
@@ -7058,7 +7973,7 @@
       </p:sp>
       <p:sp>
         <p:nvSpPr>
-          <p:cNvPr id="10" name="Shape 7"/>
+          <p:cNvPr id="11" name="Shape 8"/>
           <p:cNvSpPr/>
           <p:nvPr/>
         </p:nvSpPr>
@@ -7085,7 +8000,7 @@
       </p:sp>
       <p:sp>
         <p:nvSpPr>
-          <p:cNvPr id="11" name="Text 8"/>
+          <p:cNvPr id="12" name="Text 9"/>
           <p:cNvSpPr txBox="1"/>
           <p:nvPr/>
         </p:nvSpPr>
@@ -7124,7 +8039,7 @@
       </p:sp>
       <p:sp>
         <p:nvSpPr>
-          <p:cNvPr id="12" name="Text 9"/>
+          <p:cNvPr id="13" name="Text 10"/>
           <p:cNvSpPr txBox="1"/>
           <p:nvPr/>
         </p:nvSpPr>
@@ -7163,7 +8078,7 @@
       </p:sp>
       <p:sp>
         <p:nvSpPr>
-          <p:cNvPr id="13" name="Shape 10"/>
+          <p:cNvPr id="14" name="Shape 11"/>
           <p:cNvSpPr/>
           <p:nvPr/>
         </p:nvSpPr>
@@ -7190,7 +8105,7 @@
       </p:sp>
       <p:sp>
         <p:nvSpPr>
-          <p:cNvPr id="14" name="Text 11"/>
+          <p:cNvPr id="15" name="Text 12"/>
           <p:cNvSpPr txBox="1"/>
           <p:nvPr/>
         </p:nvSpPr>
@@ -7229,7 +8144,7 @@
       </p:sp>
       <p:sp>
         <p:nvSpPr>
-          <p:cNvPr id="15" name="Text 12"/>
+          <p:cNvPr id="16" name="Text 13"/>
           <p:cNvSpPr txBox="1"/>
           <p:nvPr/>
         </p:nvSpPr>
@@ -7268,7 +8183,7 @@
       </p:sp>
       <p:sp>
         <p:nvSpPr>
-          <p:cNvPr id="16" name="Shape 13"/>
+          <p:cNvPr id="17" name="Shape 14"/>
           <p:cNvSpPr/>
           <p:nvPr/>
         </p:nvSpPr>
@@ -7295,7 +8210,7 @@
       </p:sp>
       <p:sp>
         <p:nvSpPr>
-          <p:cNvPr id="17" name="Text 14"/>
+          <p:cNvPr id="18" name="Text 15"/>
           <p:cNvSpPr txBox="1"/>
           <p:nvPr/>
         </p:nvSpPr>
@@ -7334,7 +8249,7 @@
       </p:sp>
       <p:sp>
         <p:nvSpPr>
-          <p:cNvPr id="18" name="Text 15"/>
+          <p:cNvPr id="19" name="Text 16"/>
           <p:cNvSpPr txBox="1"/>
           <p:nvPr/>
         </p:nvSpPr>
@@ -7373,7 +8288,7 @@
       </p:sp>
       <p:sp>
         <p:nvSpPr>
-          <p:cNvPr id="19" name="Shape 16"/>
+          <p:cNvPr id="20" name="Shape 17"/>
           <p:cNvSpPr/>
           <p:nvPr/>
         </p:nvSpPr>
@@ -7400,7 +8315,7 @@
       </p:sp>
       <p:sp>
         <p:nvSpPr>
-          <p:cNvPr id="20" name="Text 17"/>
+          <p:cNvPr id="21" name="Text 18"/>
           <p:cNvSpPr txBox="1"/>
           <p:nvPr/>
         </p:nvSpPr>
@@ -7439,7 +8354,7 @@
       </p:sp>
       <p:sp>
         <p:nvSpPr>
-          <p:cNvPr id="21" name="Text 18"/>
+          <p:cNvPr id="22" name="Text 19"/>
           <p:cNvSpPr txBox="1"/>
           <p:nvPr/>
         </p:nvSpPr>
@@ -7641,7 +8556,7 @@
                 <a:ea typeface="Calibri" pitchFamily="34" charset="-122"/>
                 <a:cs typeface="Calibri" pitchFamily="34" charset="-120"/>
               </a:rPr>
-              <a:t>20M+</a:t>
+              <a:t>~20M</a:t>
             </a:r>
             <a:endParaRPr lang="en-US" sz="6000" dirty="0"/>
           </a:p>
@@ -7680,7 +8595,7 @@
                 <a:ea typeface="Calibri" pitchFamily="34" charset="-122"/>
                 <a:cs typeface="Calibri" pitchFamily="34" charset="-120"/>
               </a:rPr>
-              <a:t>passengers ride Indian Railways every day, in cramped, crowded, weakly ventilated coaches.</a:t>
+              <a:t>passengers ride Indian Railways every day, close to 2 crore, in cramped, crowded, weakly ventilated coaches.</a:t>
             </a:r>
             <a:endParaRPr lang="en-US" sz="1600" dirty="0"/>
           </a:p>
@@ -9948,1699 +10863,1845 @@
           </a:p>
         </p:txBody>
       </p:sp>
-      <p:graphicFrame>
-        <p:nvGraphicFramePr>
-          <p:cNvPr id="6" name="Table 0"/>
-          <p:cNvGraphicFramePr>
-            <a:graphicFrameLocks noGrp="1"/>
-          </p:cNvGraphicFramePr>
-          <p:nvPr>
-            <p:extLst>
-              <p:ext uri="{D42A27DB-BD31-4B8C-83A1-F6EECF244321}">
-                <p14:modId xmlns:p14="http://schemas.microsoft.com/office/powerpoint/2010/main" val="1579011935"/>
-              </p:ext>
-            </p:extLst>
-          </p:nvPr>
-        </p:nvGraphicFramePr>
-        <p:xfrm>
-          <a:off x="813816" y="2514600"/>
-          <a:ext cx="7114032" cy="914400"/>
-        </p:xfrm>
-        <a:graphic>
-          <a:graphicData uri="http://schemas.openxmlformats.org/drawingml/2006/table">
-            <a:tbl>
-              <a:tblPr/>
-              <a:tblGrid>
-                <a:gridCol w="1563624"/>
-                <a:gridCol w="2706624"/>
-                <a:gridCol w="2843784"/>
-              </a:tblGrid>
-              <a:tr h="384048">
-                <a:tc>
-                  <a:txBody>
-                    <a:bodyPr/>
-                    <a:lstStyle/>
-                    <a:p>
-                      <a:pPr indent="0" marL="0">
-                        <a:buNone/>
-                      </a:pPr>
-                      <a:r>
-                        <a:rPr lang="en-US" sz="1300" b="1" dirty="0">
-                          <a:solidFill>
-                            <a:srgbClr val="E8EEF2"/>
-                          </a:solidFill>
-                          <a:latin typeface="Calibri" pitchFamily="34" charset="0"/>
-                          <a:ea typeface="Calibri" pitchFamily="34" charset="-122"/>
-                          <a:cs typeface="Calibri" pitchFamily="34" charset="-120"/>
-                        </a:rPr>
-                        <a:t>Part</a:t>
-                      </a:r>
-                      <a:endParaRPr lang="en-US" sz="1300" dirty="0">
-                        <a:latin typeface="Calibri" charset="0"/>
-                        <a:ea typeface="Calibri" charset="0"/>
-                        <a:cs typeface="Calibri" charset="0"/>
-                      </a:endParaRPr>
-                    </a:p>
-                  </a:txBody>
-                  <a:tcPr marL="109728" marR="109728" marT="0" marB="0" anchor="ctr">
-                    <a:lnL w="12700" cap="flat" cmpd="sng" algn="ctr">
-                      <a:solidFill>
-                        <a:srgbClr val="D9E1DF"/>
-                      </a:solidFill>
-                      <a:prstDash val="solid"/>
-                      <a:round/>
-                      <a:headEnd type="none" w="med" len="med"/>
-                      <a:tailEnd type="none" w="med" len="med"/>
-                    </a:lnL>
-                    <a:lnR w="12700" cap="flat" cmpd="sng" algn="ctr">
-                      <a:solidFill>
-                        <a:srgbClr val="D9E1DF"/>
-                      </a:solidFill>
-                      <a:prstDash val="solid"/>
-                      <a:round/>
-                      <a:headEnd type="none" w="med" len="med"/>
-                      <a:tailEnd type="none" w="med" len="med"/>
-                    </a:lnR>
-                    <a:lnT w="12700" cap="flat" cmpd="sng" algn="ctr">
-                      <a:solidFill>
-                        <a:srgbClr val="D9E1DF"/>
-                      </a:solidFill>
-                      <a:prstDash val="solid"/>
-                      <a:round/>
-                      <a:headEnd type="none" w="med" len="med"/>
-                      <a:tailEnd type="none" w="med" len="med"/>
-                    </a:lnT>
-                    <a:lnB w="12700" cap="flat" cmpd="sng" algn="ctr">
-                      <a:solidFill>
-                        <a:srgbClr val="D9E1DF"/>
-                      </a:solidFill>
-                      <a:prstDash val="solid"/>
-                      <a:round/>
-                      <a:headEnd type="none" w="med" len="med"/>
-                      <a:tailEnd type="none" w="med" len="med"/>
-                    </a:lnB>
-                    <a:solidFill>
-                      <a:srgbClr val="14202B"/>
-                    </a:solidFill>
-                  </a:tcPr>
-                </a:tc>
-                <a:tc>
-                  <a:txBody>
-                    <a:bodyPr/>
-                    <a:lstStyle/>
-                    <a:p>
-                      <a:pPr indent="0" marL="0">
-                        <a:buNone/>
-                      </a:pPr>
-                      <a:r>
-                        <a:rPr lang="en-US" sz="1300" b="1" dirty="0">
-                          <a:solidFill>
-                            <a:srgbClr val="E8EEF2"/>
-                          </a:solidFill>
-                          <a:latin typeface="Calibri" pitchFamily="34" charset="0"/>
-                          <a:ea typeface="Calibri" pitchFamily="34" charset="-122"/>
-                          <a:cs typeface="Calibri" pitchFamily="34" charset="-120"/>
-                        </a:rPr>
-                        <a:t>Measures or does</a:t>
-                      </a:r>
-                      <a:endParaRPr lang="en-US" sz="1300" dirty="0">
-                        <a:latin typeface="Calibri" charset="0"/>
-                        <a:ea typeface="Calibri" charset="0"/>
-                        <a:cs typeface="Calibri" charset="0"/>
-                      </a:endParaRPr>
-                    </a:p>
-                  </a:txBody>
-                  <a:tcPr marL="109728" marR="109728" marT="0" marB="0" anchor="ctr">
-                    <a:lnL w="12700" cap="flat" cmpd="sng" algn="ctr">
-                      <a:solidFill>
-                        <a:srgbClr val="D9E1DF"/>
-                      </a:solidFill>
-                      <a:prstDash val="solid"/>
-                      <a:round/>
-                      <a:headEnd type="none" w="med" len="med"/>
-                      <a:tailEnd type="none" w="med" len="med"/>
-                    </a:lnL>
-                    <a:lnR w="12700" cap="flat" cmpd="sng" algn="ctr">
-                      <a:solidFill>
-                        <a:srgbClr val="D9E1DF"/>
-                      </a:solidFill>
-                      <a:prstDash val="solid"/>
-                      <a:round/>
-                      <a:headEnd type="none" w="med" len="med"/>
-                      <a:tailEnd type="none" w="med" len="med"/>
-                    </a:lnR>
-                    <a:lnT w="12700" cap="flat" cmpd="sng" algn="ctr">
-                      <a:solidFill>
-                        <a:srgbClr val="D9E1DF"/>
-                      </a:solidFill>
-                      <a:prstDash val="solid"/>
-                      <a:round/>
-                      <a:headEnd type="none" w="med" len="med"/>
-                      <a:tailEnd type="none" w="med" len="med"/>
-                    </a:lnT>
-                    <a:lnB w="12700" cap="flat" cmpd="sng" algn="ctr">
-                      <a:solidFill>
-                        <a:srgbClr val="D9E1DF"/>
-                      </a:solidFill>
-                      <a:prstDash val="solid"/>
-                      <a:round/>
-                      <a:headEnd type="none" w="med" len="med"/>
-                      <a:tailEnd type="none" w="med" len="med"/>
-                    </a:lnB>
-                    <a:solidFill>
-                      <a:srgbClr val="14202B"/>
-                    </a:solidFill>
-                  </a:tcPr>
-                </a:tc>
-                <a:tc>
-                  <a:txBody>
-                    <a:bodyPr/>
-                    <a:lstStyle/>
-                    <a:p>
-                      <a:pPr indent="0" marL="0">
-                        <a:buNone/>
-                      </a:pPr>
-                      <a:r>
-                        <a:rPr lang="en-US" sz="1300" b="1" dirty="0">
-                          <a:solidFill>
-                            <a:srgbClr val="E8EEF2"/>
-                          </a:solidFill>
-                          <a:latin typeface="Calibri" pitchFamily="34" charset="0"/>
-                          <a:ea typeface="Calibri" pitchFamily="34" charset="-122"/>
-                          <a:cs typeface="Calibri" pitchFamily="34" charset="-120"/>
-                        </a:rPr>
-                        <a:t>Drives</a:t>
-                      </a:r>
-                      <a:endParaRPr lang="en-US" sz="1300" dirty="0">
-                        <a:latin typeface="Calibri" charset="0"/>
-                        <a:ea typeface="Calibri" charset="0"/>
-                        <a:cs typeface="Calibri" charset="0"/>
-                      </a:endParaRPr>
-                    </a:p>
-                  </a:txBody>
-                  <a:tcPr marL="109728" marR="109728" marT="0" marB="0" anchor="ctr">
-                    <a:lnL w="12700" cap="flat" cmpd="sng" algn="ctr">
-                      <a:solidFill>
-                        <a:srgbClr val="D9E1DF"/>
-                      </a:solidFill>
-                      <a:prstDash val="solid"/>
-                      <a:round/>
-                      <a:headEnd type="none" w="med" len="med"/>
-                      <a:tailEnd type="none" w="med" len="med"/>
-                    </a:lnL>
-                    <a:lnR w="12700" cap="flat" cmpd="sng" algn="ctr">
-                      <a:solidFill>
-                        <a:srgbClr val="D9E1DF"/>
-                      </a:solidFill>
-                      <a:prstDash val="solid"/>
-                      <a:round/>
-                      <a:headEnd type="none" w="med" len="med"/>
-                      <a:tailEnd type="none" w="med" len="med"/>
-                    </a:lnR>
-                    <a:lnT w="12700" cap="flat" cmpd="sng" algn="ctr">
-                      <a:solidFill>
-                        <a:srgbClr val="D9E1DF"/>
-                      </a:solidFill>
-                      <a:prstDash val="solid"/>
-                      <a:round/>
-                      <a:headEnd type="none" w="med" len="med"/>
-                      <a:tailEnd type="none" w="med" len="med"/>
-                    </a:lnT>
-                    <a:lnB w="12700" cap="flat" cmpd="sng" algn="ctr">
-                      <a:solidFill>
-                        <a:srgbClr val="D9E1DF"/>
-                      </a:solidFill>
-                      <a:prstDash val="solid"/>
-                      <a:round/>
-                      <a:headEnd type="none" w="med" len="med"/>
-                      <a:tailEnd type="none" w="med" len="med"/>
-                    </a:lnB>
-                    <a:solidFill>
-                      <a:srgbClr val="14202B"/>
-                    </a:solidFill>
-                  </a:tcPr>
-                </a:tc>
-              </a:tr>
-              <a:tr h="384048">
-                <a:tc>
-                  <a:txBody>
-                    <a:bodyPr/>
-                    <a:lstStyle/>
-                    <a:p>
-                      <a:pPr indent="0" marL="0">
-                        <a:buNone/>
-                      </a:pPr>
-                      <a:r>
-                        <a:rPr lang="en-US" sz="1300" dirty="0">
-                          <a:solidFill>
-                            <a:srgbClr val="14202B"/>
-                          </a:solidFill>
-                          <a:latin typeface="Calibri" pitchFamily="34" charset="0"/>
-                          <a:ea typeface="Calibri" pitchFamily="34" charset="-122"/>
-                          <a:cs typeface="Calibri" pitchFamily="34" charset="-120"/>
-                        </a:rPr>
-                        <a:t>DHT11</a:t>
-                      </a:r>
-                      <a:endParaRPr lang="en-US" sz="1300" dirty="0">
-                        <a:latin typeface="Calibri" charset="0"/>
-                        <a:ea typeface="Calibri" charset="0"/>
-                        <a:cs typeface="Calibri" charset="0"/>
-                      </a:endParaRPr>
-                    </a:p>
-                  </a:txBody>
-                  <a:tcPr marL="109728" marR="109728" marT="0" marB="0" anchor="ctr">
-                    <a:lnL w="12700" cap="flat" cmpd="sng" algn="ctr">
-                      <a:solidFill>
-                        <a:srgbClr val="D9E1DF"/>
-                      </a:solidFill>
-                      <a:prstDash val="solid"/>
-                      <a:round/>
-                      <a:headEnd type="none" w="med" len="med"/>
-                      <a:tailEnd type="none" w="med" len="med"/>
-                    </a:lnL>
-                    <a:lnR w="12700" cap="flat" cmpd="sng" algn="ctr">
-                      <a:solidFill>
-                        <a:srgbClr val="D9E1DF"/>
-                      </a:solidFill>
-                      <a:prstDash val="solid"/>
-                      <a:round/>
-                      <a:headEnd type="none" w="med" len="med"/>
-                      <a:tailEnd type="none" w="med" len="med"/>
-                    </a:lnR>
-                    <a:lnT w="12700" cap="flat" cmpd="sng" algn="ctr">
-                      <a:solidFill>
-                        <a:srgbClr val="D9E1DF"/>
-                      </a:solidFill>
-                      <a:prstDash val="solid"/>
-                      <a:round/>
-                      <a:headEnd type="none" w="med" len="med"/>
-                      <a:tailEnd type="none" w="med" len="med"/>
-                    </a:lnT>
-                    <a:lnB w="12700" cap="flat" cmpd="sng" algn="ctr">
-                      <a:solidFill>
-                        <a:srgbClr val="D9E1DF"/>
-                      </a:solidFill>
-                      <a:prstDash val="solid"/>
-                      <a:round/>
-                      <a:headEnd type="none" w="med" len="med"/>
-                      <a:tailEnd type="none" w="med" len="med"/>
-                    </a:lnB>
-                    <a:solidFill>
-                      <a:srgbClr val="FBFCFB"/>
-                    </a:solidFill>
-                  </a:tcPr>
-                </a:tc>
-                <a:tc>
-                  <a:txBody>
-                    <a:bodyPr/>
-                    <a:lstStyle/>
-                    <a:p>
-                      <a:pPr indent="0" marL="0">
-                        <a:buNone/>
-                      </a:pPr>
-                      <a:r>
-                        <a:rPr lang="en-US" sz="1300" dirty="0">
-                          <a:solidFill>
-                            <a:srgbClr val="14202B"/>
-                          </a:solidFill>
-                          <a:latin typeface="Calibri" pitchFamily="34" charset="0"/>
-                          <a:ea typeface="Calibri" pitchFamily="34" charset="-122"/>
-                          <a:cs typeface="Calibri" pitchFamily="34" charset="-120"/>
-                        </a:rPr>
-                        <a:t>Temperature, humidity</a:t>
-                      </a:r>
-                      <a:endParaRPr lang="en-US" sz="1300" dirty="0">
-                        <a:latin typeface="Calibri" charset="0"/>
-                        <a:ea typeface="Calibri" charset="0"/>
-                        <a:cs typeface="Calibri" charset="0"/>
-                      </a:endParaRPr>
-                    </a:p>
-                  </a:txBody>
-                  <a:tcPr marL="109728" marR="109728" marT="0" marB="0" anchor="ctr">
-                    <a:lnL w="12700" cap="flat" cmpd="sng" algn="ctr">
-                      <a:solidFill>
-                        <a:srgbClr val="D9E1DF"/>
-                      </a:solidFill>
-                      <a:prstDash val="solid"/>
-                      <a:round/>
-                      <a:headEnd type="none" w="med" len="med"/>
-                      <a:tailEnd type="none" w="med" len="med"/>
-                    </a:lnL>
-                    <a:lnR w="12700" cap="flat" cmpd="sng" algn="ctr">
-                      <a:solidFill>
-                        <a:srgbClr val="D9E1DF"/>
-                      </a:solidFill>
-                      <a:prstDash val="solid"/>
-                      <a:round/>
-                      <a:headEnd type="none" w="med" len="med"/>
-                      <a:tailEnd type="none" w="med" len="med"/>
-                    </a:lnR>
-                    <a:lnT w="12700" cap="flat" cmpd="sng" algn="ctr">
-                      <a:solidFill>
-                        <a:srgbClr val="D9E1DF"/>
-                      </a:solidFill>
-                      <a:prstDash val="solid"/>
-                      <a:round/>
-                      <a:headEnd type="none" w="med" len="med"/>
-                      <a:tailEnd type="none" w="med" len="med"/>
-                    </a:lnT>
-                    <a:lnB w="12700" cap="flat" cmpd="sng" algn="ctr">
-                      <a:solidFill>
-                        <a:srgbClr val="D9E1DF"/>
-                      </a:solidFill>
-                      <a:prstDash val="solid"/>
-                      <a:round/>
-                      <a:headEnd type="none" w="med" len="med"/>
-                      <a:tailEnd type="none" w="med" len="med"/>
-                    </a:lnB>
-                    <a:solidFill>
-                      <a:srgbClr val="FBFCFB"/>
-                    </a:solidFill>
-                  </a:tcPr>
-                </a:tc>
-                <a:tc>
-                  <a:txBody>
-                    <a:bodyPr/>
-                    <a:lstStyle/>
-                    <a:p>
-                      <a:pPr indent="0" marL="0">
-                        <a:buNone/>
-                      </a:pPr>
-                      <a:r>
-                        <a:rPr lang="en-US" sz="1300" dirty="0">
-                          <a:solidFill>
-                            <a:srgbClr val="14202B"/>
-                          </a:solidFill>
-                          <a:latin typeface="Calibri" pitchFamily="34" charset="0"/>
-                          <a:ea typeface="Calibri" pitchFamily="34" charset="-122"/>
-                          <a:cs typeface="Calibri" pitchFamily="34" charset="-120"/>
-                        </a:rPr>
-                        <a:t>X → exhaust fan</a:t>
-                      </a:r>
-                      <a:endParaRPr lang="en-US" sz="1300" dirty="0">
-                        <a:latin typeface="Calibri" charset="0"/>
-                        <a:ea typeface="Calibri" charset="0"/>
-                        <a:cs typeface="Calibri" charset="0"/>
-                      </a:endParaRPr>
-                    </a:p>
-                  </a:txBody>
-                  <a:tcPr marL="109728" marR="109728" marT="0" marB="0" anchor="ctr">
-                    <a:lnL w="12700" cap="flat" cmpd="sng" algn="ctr">
-                      <a:solidFill>
-                        <a:srgbClr val="D9E1DF"/>
-                      </a:solidFill>
-                      <a:prstDash val="solid"/>
-                      <a:round/>
-                      <a:headEnd type="none" w="med" len="med"/>
-                      <a:tailEnd type="none" w="med" len="med"/>
-                    </a:lnL>
-                    <a:lnR w="12700" cap="flat" cmpd="sng" algn="ctr">
-                      <a:solidFill>
-                        <a:srgbClr val="D9E1DF"/>
-                      </a:solidFill>
-                      <a:prstDash val="solid"/>
-                      <a:round/>
-                      <a:headEnd type="none" w="med" len="med"/>
-                      <a:tailEnd type="none" w="med" len="med"/>
-                    </a:lnR>
-                    <a:lnT w="12700" cap="flat" cmpd="sng" algn="ctr">
-                      <a:solidFill>
-                        <a:srgbClr val="D9E1DF"/>
-                      </a:solidFill>
-                      <a:prstDash val="solid"/>
-                      <a:round/>
-                      <a:headEnd type="none" w="med" len="med"/>
-                      <a:tailEnd type="none" w="med" len="med"/>
-                    </a:lnT>
-                    <a:lnB w="12700" cap="flat" cmpd="sng" algn="ctr">
-                      <a:solidFill>
-                        <a:srgbClr val="D9E1DF"/>
-                      </a:solidFill>
-                      <a:prstDash val="solid"/>
-                      <a:round/>
-                      <a:headEnd type="none" w="med" len="med"/>
-                      <a:tailEnd type="none" w="med" len="med"/>
-                    </a:lnB>
-                    <a:solidFill>
-                      <a:srgbClr val="FBFCFB"/>
-                    </a:solidFill>
-                  </a:tcPr>
-                </a:tc>
-              </a:tr>
-              <a:tr h="384048">
-                <a:tc>
-                  <a:txBody>
-                    <a:bodyPr/>
-                    <a:lstStyle/>
-                    <a:p>
-                      <a:pPr indent="0" marL="0">
-                        <a:buNone/>
-                      </a:pPr>
-                      <a:r>
-                        <a:rPr lang="en-US" sz="1300" dirty="0">
-                          <a:solidFill>
-                            <a:srgbClr val="14202B"/>
-                          </a:solidFill>
-                          <a:latin typeface="Calibri" pitchFamily="34" charset="0"/>
-                          <a:ea typeface="Calibri" pitchFamily="34" charset="-122"/>
-                          <a:cs typeface="Calibri" pitchFamily="34" charset="-120"/>
-                        </a:rPr>
-                        <a:t>MQ-2</a:t>
-                      </a:r>
-                      <a:endParaRPr lang="en-US" sz="1300" dirty="0">
-                        <a:latin typeface="Calibri" charset="0"/>
-                        <a:ea typeface="Calibri" charset="0"/>
-                        <a:cs typeface="Calibri" charset="0"/>
-                      </a:endParaRPr>
-                    </a:p>
-                  </a:txBody>
-                  <a:tcPr marL="109728" marR="109728" marT="0" marB="0" anchor="ctr">
-                    <a:lnL w="12700" cap="flat" cmpd="sng" algn="ctr">
-                      <a:solidFill>
-                        <a:srgbClr val="D9E1DF"/>
-                      </a:solidFill>
-                      <a:prstDash val="solid"/>
-                      <a:round/>
-                      <a:headEnd type="none" w="med" len="med"/>
-                      <a:tailEnd type="none" w="med" len="med"/>
-                    </a:lnL>
-                    <a:lnR w="12700" cap="flat" cmpd="sng" algn="ctr">
-                      <a:solidFill>
-                        <a:srgbClr val="D9E1DF"/>
-                      </a:solidFill>
-                      <a:prstDash val="solid"/>
-                      <a:round/>
-                      <a:headEnd type="none" w="med" len="med"/>
-                      <a:tailEnd type="none" w="med" len="med"/>
-                    </a:lnR>
-                    <a:lnT w="12700" cap="flat" cmpd="sng" algn="ctr">
-                      <a:solidFill>
-                        <a:srgbClr val="D9E1DF"/>
-                      </a:solidFill>
-                      <a:prstDash val="solid"/>
-                      <a:round/>
-                      <a:headEnd type="none" w="med" len="med"/>
-                      <a:tailEnd type="none" w="med" len="med"/>
-                    </a:lnT>
-                    <a:lnB w="12700" cap="flat" cmpd="sng" algn="ctr">
-                      <a:solidFill>
-                        <a:srgbClr val="D9E1DF"/>
-                      </a:solidFill>
-                      <a:prstDash val="solid"/>
-                      <a:round/>
-                      <a:headEnd type="none" w="med" len="med"/>
-                      <a:tailEnd type="none" w="med" len="med"/>
-                    </a:lnB>
-                    <a:solidFill>
-                      <a:srgbClr val="FBFCFB"/>
-                    </a:solidFill>
-                  </a:tcPr>
-                </a:tc>
-                <a:tc>
-                  <a:txBody>
-                    <a:bodyPr/>
-                    <a:lstStyle/>
-                    <a:p>
-                      <a:pPr indent="0" marL="0">
-                        <a:buNone/>
-                      </a:pPr>
-                      <a:r>
-                        <a:rPr lang="en-US" sz="1300" dirty="0">
-                          <a:solidFill>
-                            <a:srgbClr val="14202B"/>
-                          </a:solidFill>
-                          <a:latin typeface="Calibri" pitchFamily="34" charset="0"/>
-                          <a:ea typeface="Calibri" pitchFamily="34" charset="-122"/>
-                          <a:cs typeface="Calibri" pitchFamily="34" charset="-120"/>
-                        </a:rPr>
-                        <a:t>Gas and smoke</a:t>
-                      </a:r>
-                      <a:endParaRPr lang="en-US" sz="1300" dirty="0">
-                        <a:latin typeface="Calibri" charset="0"/>
-                        <a:ea typeface="Calibri" charset="0"/>
-                        <a:cs typeface="Calibri" charset="0"/>
-                      </a:endParaRPr>
-                    </a:p>
-                  </a:txBody>
-                  <a:tcPr marL="109728" marR="109728" marT="0" marB="0" anchor="ctr">
-                    <a:lnL w="12700" cap="flat" cmpd="sng" algn="ctr">
-                      <a:solidFill>
-                        <a:srgbClr val="D9E1DF"/>
-                      </a:solidFill>
-                      <a:prstDash val="solid"/>
-                      <a:round/>
-                      <a:headEnd type="none" w="med" len="med"/>
-                      <a:tailEnd type="none" w="med" len="med"/>
-                    </a:lnL>
-                    <a:lnR w="12700" cap="flat" cmpd="sng" algn="ctr">
-                      <a:solidFill>
-                        <a:srgbClr val="D9E1DF"/>
-                      </a:solidFill>
-                      <a:prstDash val="solid"/>
-                      <a:round/>
-                      <a:headEnd type="none" w="med" len="med"/>
-                      <a:tailEnd type="none" w="med" len="med"/>
-                    </a:lnR>
-                    <a:lnT w="12700" cap="flat" cmpd="sng" algn="ctr">
-                      <a:solidFill>
-                        <a:srgbClr val="D9E1DF"/>
-                      </a:solidFill>
-                      <a:prstDash val="solid"/>
-                      <a:round/>
-                      <a:headEnd type="none" w="med" len="med"/>
-                      <a:tailEnd type="none" w="med" len="med"/>
-                    </a:lnT>
-                    <a:lnB w="12700" cap="flat" cmpd="sng" algn="ctr">
-                      <a:solidFill>
-                        <a:srgbClr val="D9E1DF"/>
-                      </a:solidFill>
-                      <a:prstDash val="solid"/>
-                      <a:round/>
-                      <a:headEnd type="none" w="med" len="med"/>
-                      <a:tailEnd type="none" w="med" len="med"/>
-                    </a:lnB>
-                    <a:solidFill>
-                      <a:srgbClr val="FBFCFB"/>
-                    </a:solidFill>
-                  </a:tcPr>
-                </a:tc>
-                <a:tc>
-                  <a:txBody>
-                    <a:bodyPr/>
-                    <a:lstStyle/>
-                    <a:p>
-                      <a:pPr indent="0" marL="0">
-                        <a:buNone/>
-                      </a:pPr>
-                      <a:r>
-                        <a:rPr lang="en-US" sz="1300" dirty="0">
-                          <a:solidFill>
-                            <a:srgbClr val="14202B"/>
-                          </a:solidFill>
-                          <a:latin typeface="Calibri" pitchFamily="34" charset="0"/>
-                          <a:ea typeface="Calibri" pitchFamily="34" charset="-122"/>
-                          <a:cs typeface="Calibri" pitchFamily="34" charset="-120"/>
-                        </a:rPr>
-                        <a:t>Y → ozone generator 2</a:t>
-                      </a:r>
-                      <a:endParaRPr lang="en-US" sz="1300" dirty="0">
-                        <a:latin typeface="Calibri" charset="0"/>
-                        <a:ea typeface="Calibri" charset="0"/>
-                        <a:cs typeface="Calibri" charset="0"/>
-                      </a:endParaRPr>
-                    </a:p>
-                  </a:txBody>
-                  <a:tcPr marL="109728" marR="109728" marT="0" marB="0" anchor="ctr">
-                    <a:lnL w="12700" cap="flat" cmpd="sng" algn="ctr">
-                      <a:solidFill>
-                        <a:srgbClr val="D9E1DF"/>
-                      </a:solidFill>
-                      <a:prstDash val="solid"/>
-                      <a:round/>
-                      <a:headEnd type="none" w="med" len="med"/>
-                      <a:tailEnd type="none" w="med" len="med"/>
-                    </a:lnL>
-                    <a:lnR w="12700" cap="flat" cmpd="sng" algn="ctr">
-                      <a:solidFill>
-                        <a:srgbClr val="D9E1DF"/>
-                      </a:solidFill>
-                      <a:prstDash val="solid"/>
-                      <a:round/>
-                      <a:headEnd type="none" w="med" len="med"/>
-                      <a:tailEnd type="none" w="med" len="med"/>
-                    </a:lnR>
-                    <a:lnT w="12700" cap="flat" cmpd="sng" algn="ctr">
-                      <a:solidFill>
-                        <a:srgbClr val="D9E1DF"/>
-                      </a:solidFill>
-                      <a:prstDash val="solid"/>
-                      <a:round/>
-                      <a:headEnd type="none" w="med" len="med"/>
-                      <a:tailEnd type="none" w="med" len="med"/>
-                    </a:lnT>
-                    <a:lnB w="12700" cap="flat" cmpd="sng" algn="ctr">
-                      <a:solidFill>
-                        <a:srgbClr val="D9E1DF"/>
-                      </a:solidFill>
-                      <a:prstDash val="solid"/>
-                      <a:round/>
-                      <a:headEnd type="none" w="med" len="med"/>
-                      <a:tailEnd type="none" w="med" len="med"/>
-                    </a:lnB>
-                    <a:solidFill>
-                      <a:srgbClr val="FBFCFB"/>
-                    </a:solidFill>
-                  </a:tcPr>
-                </a:tc>
-              </a:tr>
-              <a:tr h="384048">
-                <a:tc>
-                  <a:txBody>
-                    <a:bodyPr/>
-                    <a:lstStyle/>
-                    <a:p>
-                      <a:pPr indent="0" marL="0">
-                        <a:buNone/>
-                      </a:pPr>
-                      <a:r>
-                        <a:rPr lang="en-US" sz="1300" dirty="0">
-                          <a:solidFill>
-                            <a:srgbClr val="14202B"/>
-                          </a:solidFill>
-                          <a:latin typeface="Calibri" pitchFamily="34" charset="0"/>
-                          <a:ea typeface="Calibri" pitchFamily="34" charset="-122"/>
-                          <a:cs typeface="Calibri" pitchFamily="34" charset="-120"/>
-                        </a:rPr>
-                        <a:t>MQ-135</a:t>
-                      </a:r>
-                      <a:endParaRPr lang="en-US" sz="1300" dirty="0">
-                        <a:latin typeface="Calibri" charset="0"/>
-                        <a:ea typeface="Calibri" charset="0"/>
-                        <a:cs typeface="Calibri" charset="0"/>
-                      </a:endParaRPr>
-                    </a:p>
-                  </a:txBody>
-                  <a:tcPr marL="109728" marR="109728" marT="0" marB="0" anchor="ctr">
-                    <a:lnL w="12700" cap="flat" cmpd="sng" algn="ctr">
-                      <a:solidFill>
-                        <a:srgbClr val="D9E1DF"/>
-                      </a:solidFill>
-                      <a:prstDash val="solid"/>
-                      <a:round/>
-                      <a:headEnd type="none" w="med" len="med"/>
-                      <a:tailEnd type="none" w="med" len="med"/>
-                    </a:lnL>
-                    <a:lnR w="12700" cap="flat" cmpd="sng" algn="ctr">
-                      <a:solidFill>
-                        <a:srgbClr val="D9E1DF"/>
-                      </a:solidFill>
-                      <a:prstDash val="solid"/>
-                      <a:round/>
-                      <a:headEnd type="none" w="med" len="med"/>
-                      <a:tailEnd type="none" w="med" len="med"/>
-                    </a:lnR>
-                    <a:lnT w="12700" cap="flat" cmpd="sng" algn="ctr">
-                      <a:solidFill>
-                        <a:srgbClr val="D9E1DF"/>
-                      </a:solidFill>
-                      <a:prstDash val="solid"/>
-                      <a:round/>
-                      <a:headEnd type="none" w="med" len="med"/>
-                      <a:tailEnd type="none" w="med" len="med"/>
-                    </a:lnT>
-                    <a:lnB w="12700" cap="flat" cmpd="sng" algn="ctr">
-                      <a:solidFill>
-                        <a:srgbClr val="D9E1DF"/>
-                      </a:solidFill>
-                      <a:prstDash val="solid"/>
-                      <a:round/>
-                      <a:headEnd type="none" w="med" len="med"/>
-                      <a:tailEnd type="none" w="med" len="med"/>
-                    </a:lnB>
-                    <a:solidFill>
-                      <a:srgbClr val="FBFCFB"/>
-                    </a:solidFill>
-                  </a:tcPr>
-                </a:tc>
-                <a:tc>
-                  <a:txBody>
-                    <a:bodyPr/>
-                    <a:lstStyle/>
-                    <a:p>
-                      <a:pPr indent="0" marL="0">
-                        <a:buNone/>
-                      </a:pPr>
-                      <a:r>
-                        <a:rPr lang="en-US" sz="1300" dirty="0">
-                          <a:solidFill>
-                            <a:srgbClr val="14202B"/>
-                          </a:solidFill>
-                          <a:latin typeface="Calibri" pitchFamily="34" charset="0"/>
-                          <a:ea typeface="Calibri" pitchFamily="34" charset="-122"/>
-                          <a:cs typeface="Calibri" pitchFamily="34" charset="-120"/>
-                        </a:rPr>
-                        <a:t>CO₂, air-quality gases</a:t>
-                      </a:r>
-                      <a:endParaRPr lang="en-US" sz="1300" dirty="0">
-                        <a:latin typeface="Calibri" charset="0"/>
-                        <a:ea typeface="Calibri" charset="0"/>
-                        <a:cs typeface="Calibri" charset="0"/>
-                      </a:endParaRPr>
-                    </a:p>
-                  </a:txBody>
-                  <a:tcPr marL="109728" marR="109728" marT="0" marB="0" anchor="ctr">
-                    <a:lnL w="12700" cap="flat" cmpd="sng" algn="ctr">
-                      <a:solidFill>
-                        <a:srgbClr val="D9E1DF"/>
-                      </a:solidFill>
-                      <a:prstDash val="solid"/>
-                      <a:round/>
-                      <a:headEnd type="none" w="med" len="med"/>
-                      <a:tailEnd type="none" w="med" len="med"/>
-                    </a:lnL>
-                    <a:lnR w="12700" cap="flat" cmpd="sng" algn="ctr">
-                      <a:solidFill>
-                        <a:srgbClr val="D9E1DF"/>
-                      </a:solidFill>
-                      <a:prstDash val="solid"/>
-                      <a:round/>
-                      <a:headEnd type="none" w="med" len="med"/>
-                      <a:tailEnd type="none" w="med" len="med"/>
-                    </a:lnR>
-                    <a:lnT w="12700" cap="flat" cmpd="sng" algn="ctr">
-                      <a:solidFill>
-                        <a:srgbClr val="D9E1DF"/>
-                      </a:solidFill>
-                      <a:prstDash val="solid"/>
-                      <a:round/>
-                      <a:headEnd type="none" w="med" len="med"/>
-                      <a:tailEnd type="none" w="med" len="med"/>
-                    </a:lnT>
-                    <a:lnB w="12700" cap="flat" cmpd="sng" algn="ctr">
-                      <a:solidFill>
-                        <a:srgbClr val="D9E1DF"/>
-                      </a:solidFill>
-                      <a:prstDash val="solid"/>
-                      <a:round/>
-                      <a:headEnd type="none" w="med" len="med"/>
-                      <a:tailEnd type="none" w="med" len="med"/>
-                    </a:lnB>
-                    <a:solidFill>
-                      <a:srgbClr val="FBFCFB"/>
-                    </a:solidFill>
-                  </a:tcPr>
-                </a:tc>
-                <a:tc>
-                  <a:txBody>
-                    <a:bodyPr/>
-                    <a:lstStyle/>
-                    <a:p>
-                      <a:pPr indent="0" marL="0">
-                        <a:buNone/>
-                      </a:pPr>
-                      <a:r>
-                        <a:rPr lang="en-US" sz="1300" dirty="0">
-                          <a:solidFill>
-                            <a:srgbClr val="14202B"/>
-                          </a:solidFill>
-                          <a:latin typeface="Calibri" pitchFamily="34" charset="0"/>
-                          <a:ea typeface="Calibri" pitchFamily="34" charset="-122"/>
-                          <a:cs typeface="Calibri" pitchFamily="34" charset="-120"/>
-                        </a:rPr>
-                        <a:t>Z → ozone generator 1</a:t>
-                      </a:r>
-                      <a:endParaRPr lang="en-US" sz="1300" dirty="0">
-                        <a:latin typeface="Calibri" charset="0"/>
-                        <a:ea typeface="Calibri" charset="0"/>
-                        <a:cs typeface="Calibri" charset="0"/>
-                      </a:endParaRPr>
-                    </a:p>
-                  </a:txBody>
-                  <a:tcPr marL="109728" marR="109728" marT="0" marB="0" anchor="ctr">
-                    <a:lnL w="12700" cap="flat" cmpd="sng" algn="ctr">
-                      <a:solidFill>
-                        <a:srgbClr val="D9E1DF"/>
-                      </a:solidFill>
-                      <a:prstDash val="solid"/>
-                      <a:round/>
-                      <a:headEnd type="none" w="med" len="med"/>
-                      <a:tailEnd type="none" w="med" len="med"/>
-                    </a:lnL>
-                    <a:lnR w="12700" cap="flat" cmpd="sng" algn="ctr">
-                      <a:solidFill>
-                        <a:srgbClr val="D9E1DF"/>
-                      </a:solidFill>
-                      <a:prstDash val="solid"/>
-                      <a:round/>
-                      <a:headEnd type="none" w="med" len="med"/>
-                      <a:tailEnd type="none" w="med" len="med"/>
-                    </a:lnR>
-                    <a:lnT w="12700" cap="flat" cmpd="sng" algn="ctr">
-                      <a:solidFill>
-                        <a:srgbClr val="D9E1DF"/>
-                      </a:solidFill>
-                      <a:prstDash val="solid"/>
-                      <a:round/>
-                      <a:headEnd type="none" w="med" len="med"/>
-                      <a:tailEnd type="none" w="med" len="med"/>
-                    </a:lnT>
-                    <a:lnB w="12700" cap="flat" cmpd="sng" algn="ctr">
-                      <a:solidFill>
-                        <a:srgbClr val="D9E1DF"/>
-                      </a:solidFill>
-                      <a:prstDash val="solid"/>
-                      <a:round/>
-                      <a:headEnd type="none" w="med" len="med"/>
-                      <a:tailEnd type="none" w="med" len="med"/>
-                    </a:lnB>
-                    <a:solidFill>
-                      <a:srgbClr val="FBFCFB"/>
-                    </a:solidFill>
-                  </a:tcPr>
-                </a:tc>
-              </a:tr>
-              <a:tr h="384048">
-                <a:tc>
-                  <a:txBody>
-                    <a:bodyPr/>
-                    <a:lstStyle/>
-                    <a:p>
-                      <a:pPr indent="0" marL="0">
-                        <a:buNone/>
-                      </a:pPr>
-                      <a:r>
-                        <a:rPr lang="en-US" sz="1300" dirty="0">
-                          <a:solidFill>
-                            <a:srgbClr val="14202B"/>
-                          </a:solidFill>
-                          <a:latin typeface="Calibri" pitchFamily="34" charset="0"/>
-                          <a:ea typeface="Calibri" pitchFamily="34" charset="-122"/>
-                          <a:cs typeface="Calibri" pitchFamily="34" charset="-120"/>
-                        </a:rPr>
-                        <a:t>PMS7003</a:t>
-                      </a:r>
-                      <a:endParaRPr lang="en-US" sz="1300" dirty="0">
-                        <a:latin typeface="Calibri" charset="0"/>
-                        <a:ea typeface="Calibri" charset="0"/>
-                        <a:cs typeface="Calibri" charset="0"/>
-                      </a:endParaRPr>
-                    </a:p>
-                  </a:txBody>
-                  <a:tcPr marL="109728" marR="109728" marT="0" marB="0" anchor="ctr">
-                    <a:lnL w="12700" cap="flat" cmpd="sng" algn="ctr">
-                      <a:solidFill>
-                        <a:srgbClr val="D9E1DF"/>
-                      </a:solidFill>
-                      <a:prstDash val="solid"/>
-                      <a:round/>
-                      <a:headEnd type="none" w="med" len="med"/>
-                      <a:tailEnd type="none" w="med" len="med"/>
-                    </a:lnL>
-                    <a:lnR w="12700" cap="flat" cmpd="sng" algn="ctr">
-                      <a:solidFill>
-                        <a:srgbClr val="D9E1DF"/>
-                      </a:solidFill>
-                      <a:prstDash val="solid"/>
-                      <a:round/>
-                      <a:headEnd type="none" w="med" len="med"/>
-                      <a:tailEnd type="none" w="med" len="med"/>
-                    </a:lnR>
-                    <a:lnT w="12700" cap="flat" cmpd="sng" algn="ctr">
-                      <a:solidFill>
-                        <a:srgbClr val="D9E1DF"/>
-                      </a:solidFill>
-                      <a:prstDash val="solid"/>
-                      <a:round/>
-                      <a:headEnd type="none" w="med" len="med"/>
-                      <a:tailEnd type="none" w="med" len="med"/>
-                    </a:lnT>
-                    <a:lnB w="12700" cap="flat" cmpd="sng" algn="ctr">
-                      <a:solidFill>
-                        <a:srgbClr val="D9E1DF"/>
-                      </a:solidFill>
-                      <a:prstDash val="solid"/>
-                      <a:round/>
-                      <a:headEnd type="none" w="med" len="med"/>
-                      <a:tailEnd type="none" w="med" len="med"/>
-                    </a:lnB>
-                    <a:solidFill>
-                      <a:srgbClr val="FBFCFB"/>
-                    </a:solidFill>
-                  </a:tcPr>
-                </a:tc>
-                <a:tc>
-                  <a:txBody>
-                    <a:bodyPr/>
-                    <a:lstStyle/>
-                    <a:p>
-                      <a:pPr indent="0" marL="0">
-                        <a:buNone/>
-                      </a:pPr>
-                      <a:r>
-                        <a:rPr lang="en-US" sz="1300" dirty="0">
-                          <a:solidFill>
-                            <a:srgbClr val="14202B"/>
-                          </a:solidFill>
-                          <a:latin typeface="Calibri" pitchFamily="34" charset="0"/>
-                          <a:ea typeface="Calibri" pitchFamily="34" charset="-122"/>
-                          <a:cs typeface="Calibri" pitchFamily="34" charset="-120"/>
-                        </a:rPr>
-                        <a:t>PM1.0, PM2.5, PM10</a:t>
-                      </a:r>
-                      <a:endParaRPr lang="en-US" sz="1300" dirty="0">
-                        <a:latin typeface="Calibri" charset="0"/>
-                        <a:ea typeface="Calibri" charset="0"/>
-                        <a:cs typeface="Calibri" charset="0"/>
-                      </a:endParaRPr>
-                    </a:p>
-                  </a:txBody>
-                  <a:tcPr marL="109728" marR="109728" marT="0" marB="0" anchor="ctr">
-                    <a:lnL w="12700" cap="flat" cmpd="sng" algn="ctr">
-                      <a:solidFill>
-                        <a:srgbClr val="D9E1DF"/>
-                      </a:solidFill>
-                      <a:prstDash val="solid"/>
-                      <a:round/>
-                      <a:headEnd type="none" w="med" len="med"/>
-                      <a:tailEnd type="none" w="med" len="med"/>
-                    </a:lnL>
-                    <a:lnR w="12700" cap="flat" cmpd="sng" algn="ctr">
-                      <a:solidFill>
-                        <a:srgbClr val="D9E1DF"/>
-                      </a:solidFill>
-                      <a:prstDash val="solid"/>
-                      <a:round/>
-                      <a:headEnd type="none" w="med" len="med"/>
-                      <a:tailEnd type="none" w="med" len="med"/>
-                    </a:lnR>
-                    <a:lnT w="12700" cap="flat" cmpd="sng" algn="ctr">
-                      <a:solidFill>
-                        <a:srgbClr val="D9E1DF"/>
-                      </a:solidFill>
-                      <a:prstDash val="solid"/>
-                      <a:round/>
-                      <a:headEnd type="none" w="med" len="med"/>
-                      <a:tailEnd type="none" w="med" len="med"/>
-                    </a:lnT>
-                    <a:lnB w="12700" cap="flat" cmpd="sng" algn="ctr">
-                      <a:solidFill>
-                        <a:srgbClr val="D9E1DF"/>
-                      </a:solidFill>
-                      <a:prstDash val="solid"/>
-                      <a:round/>
-                      <a:headEnd type="none" w="med" len="med"/>
-                      <a:tailEnd type="none" w="med" len="med"/>
-                    </a:lnB>
-                    <a:solidFill>
-                      <a:srgbClr val="FBFCFB"/>
-                    </a:solidFill>
-                  </a:tcPr>
-                </a:tc>
-                <a:tc>
-                  <a:txBody>
-                    <a:bodyPr/>
-                    <a:lstStyle/>
-                    <a:p>
-                      <a:pPr indent="0" marL="0">
-                        <a:buNone/>
-                      </a:pPr>
-                      <a:r>
-                        <a:rPr lang="en-US" sz="1300" dirty="0">
-                          <a:solidFill>
-                            <a:srgbClr val="14202B"/>
-                          </a:solidFill>
-                          <a:latin typeface="Calibri" pitchFamily="34" charset="0"/>
-                          <a:ea typeface="Calibri" pitchFamily="34" charset="-122"/>
-                          <a:cs typeface="Calibri" pitchFamily="34" charset="-120"/>
-                        </a:rPr>
-                        <a:t>W → dust alert</a:t>
-                      </a:r>
-                      <a:endParaRPr lang="en-US" sz="1300" dirty="0">
-                        <a:latin typeface="Calibri" charset="0"/>
-                        <a:ea typeface="Calibri" charset="0"/>
-                        <a:cs typeface="Calibri" charset="0"/>
-                      </a:endParaRPr>
-                    </a:p>
-                  </a:txBody>
-                  <a:tcPr marL="109728" marR="109728" marT="0" marB="0" anchor="ctr">
-                    <a:lnL w="12700" cap="flat" cmpd="sng" algn="ctr">
-                      <a:solidFill>
-                        <a:srgbClr val="D9E1DF"/>
-                      </a:solidFill>
-                      <a:prstDash val="solid"/>
-                      <a:round/>
-                      <a:headEnd type="none" w="med" len="med"/>
-                      <a:tailEnd type="none" w="med" len="med"/>
-                    </a:lnL>
-                    <a:lnR w="12700" cap="flat" cmpd="sng" algn="ctr">
-                      <a:solidFill>
-                        <a:srgbClr val="D9E1DF"/>
-                      </a:solidFill>
-                      <a:prstDash val="solid"/>
-                      <a:round/>
-                      <a:headEnd type="none" w="med" len="med"/>
-                      <a:tailEnd type="none" w="med" len="med"/>
-                    </a:lnR>
-                    <a:lnT w="12700" cap="flat" cmpd="sng" algn="ctr">
-                      <a:solidFill>
-                        <a:srgbClr val="D9E1DF"/>
-                      </a:solidFill>
-                      <a:prstDash val="solid"/>
-                      <a:round/>
-                      <a:headEnd type="none" w="med" len="med"/>
-                      <a:tailEnd type="none" w="med" len="med"/>
-                    </a:lnT>
-                    <a:lnB w="12700" cap="flat" cmpd="sng" algn="ctr">
-                      <a:solidFill>
-                        <a:srgbClr val="D9E1DF"/>
-                      </a:solidFill>
-                      <a:prstDash val="solid"/>
-                      <a:round/>
-                      <a:headEnd type="none" w="med" len="med"/>
-                      <a:tailEnd type="none" w="med" len="med"/>
-                    </a:lnB>
-                    <a:solidFill>
-                      <a:srgbClr val="FBFCFB"/>
-                    </a:solidFill>
-                  </a:tcPr>
-                </a:tc>
-              </a:tr>
-              <a:tr h="384048">
-                <a:tc>
-                  <a:txBody>
-                    <a:bodyPr/>
-                    <a:lstStyle/>
-                    <a:p>
-                      <a:pPr indent="0" marL="0">
-                        <a:buNone/>
-                      </a:pPr>
-                      <a:r>
-                        <a:rPr lang="en-US" sz="1300" dirty="0">
-                          <a:solidFill>
-                            <a:srgbClr val="14202B"/>
-                          </a:solidFill>
-                          <a:latin typeface="Calibri" pitchFamily="34" charset="0"/>
-                          <a:ea typeface="Calibri" pitchFamily="34" charset="-122"/>
-                          <a:cs typeface="Calibri" pitchFamily="34" charset="-120"/>
-                        </a:rPr>
-                        <a:t>Relay board</a:t>
-                      </a:r>
-                      <a:endParaRPr lang="en-US" sz="1300" dirty="0">
-                        <a:latin typeface="Calibri" charset="0"/>
-                        <a:ea typeface="Calibri" charset="0"/>
-                        <a:cs typeface="Calibri" charset="0"/>
-                      </a:endParaRPr>
-                    </a:p>
-                  </a:txBody>
-                  <a:tcPr marL="109728" marR="109728" marT="0" marB="0" anchor="ctr">
-                    <a:lnL w="12700" cap="flat" cmpd="sng" algn="ctr">
-                      <a:solidFill>
-                        <a:srgbClr val="D9E1DF"/>
-                      </a:solidFill>
-                      <a:prstDash val="solid"/>
-                      <a:round/>
-                      <a:headEnd type="none" w="med" len="med"/>
-                      <a:tailEnd type="none" w="med" len="med"/>
-                    </a:lnL>
-                    <a:lnR w="12700" cap="flat" cmpd="sng" algn="ctr">
-                      <a:solidFill>
-                        <a:srgbClr val="D9E1DF"/>
-                      </a:solidFill>
-                      <a:prstDash val="solid"/>
-                      <a:round/>
-                      <a:headEnd type="none" w="med" len="med"/>
-                      <a:tailEnd type="none" w="med" len="med"/>
-                    </a:lnR>
-                    <a:lnT w="12700" cap="flat" cmpd="sng" algn="ctr">
-                      <a:solidFill>
-                        <a:srgbClr val="D9E1DF"/>
-                      </a:solidFill>
-                      <a:prstDash val="solid"/>
-                      <a:round/>
-                      <a:headEnd type="none" w="med" len="med"/>
-                      <a:tailEnd type="none" w="med" len="med"/>
-                    </a:lnT>
-                    <a:lnB w="12700" cap="flat" cmpd="sng" algn="ctr">
-                      <a:solidFill>
-                        <a:srgbClr val="D9E1DF"/>
-                      </a:solidFill>
-                      <a:prstDash val="solid"/>
-                      <a:round/>
-                      <a:headEnd type="none" w="med" len="med"/>
-                      <a:tailEnd type="none" w="med" len="med"/>
-                    </a:lnB>
-                    <a:solidFill>
-                      <a:srgbClr val="FBFCFB"/>
-                    </a:solidFill>
-                  </a:tcPr>
-                </a:tc>
-                <a:tc>
-                  <a:txBody>
-                    <a:bodyPr/>
-                    <a:lstStyle/>
-                    <a:p>
-                      <a:pPr indent="0" marL="0">
-                        <a:buNone/>
-                      </a:pPr>
-                      <a:r>
-                        <a:rPr lang="en-US" sz="1300" dirty="0">
-                          <a:solidFill>
-                            <a:srgbClr val="14202B"/>
-                          </a:solidFill>
-                          <a:latin typeface="Calibri" pitchFamily="34" charset="0"/>
-                          <a:ea typeface="Calibri" pitchFamily="34" charset="-122"/>
-                          <a:cs typeface="Calibri" pitchFamily="34" charset="-120"/>
-                        </a:rPr>
-                        <a:t>Fan + 2 ozone generators</a:t>
-                      </a:r>
-                      <a:endParaRPr lang="en-US" sz="1300" dirty="0">
-                        <a:latin typeface="Calibri" charset="0"/>
-                        <a:ea typeface="Calibri" charset="0"/>
-                        <a:cs typeface="Calibri" charset="0"/>
-                      </a:endParaRPr>
-                    </a:p>
-                  </a:txBody>
-                  <a:tcPr marL="109728" marR="109728" marT="0" marB="0" anchor="ctr">
-                    <a:lnL w="12700" cap="flat" cmpd="sng" algn="ctr">
-                      <a:solidFill>
-                        <a:srgbClr val="D9E1DF"/>
-                      </a:solidFill>
-                      <a:prstDash val="solid"/>
-                      <a:round/>
-                      <a:headEnd type="none" w="med" len="med"/>
-                      <a:tailEnd type="none" w="med" len="med"/>
-                    </a:lnL>
-                    <a:lnR w="12700" cap="flat" cmpd="sng" algn="ctr">
-                      <a:solidFill>
-                        <a:srgbClr val="D9E1DF"/>
-                      </a:solidFill>
-                      <a:prstDash val="solid"/>
-                      <a:round/>
-                      <a:headEnd type="none" w="med" len="med"/>
-                      <a:tailEnd type="none" w="med" len="med"/>
-                    </a:lnR>
-                    <a:lnT w="12700" cap="flat" cmpd="sng" algn="ctr">
-                      <a:solidFill>
-                        <a:srgbClr val="D9E1DF"/>
-                      </a:solidFill>
-                      <a:prstDash val="solid"/>
-                      <a:round/>
-                      <a:headEnd type="none" w="med" len="med"/>
-                      <a:tailEnd type="none" w="med" len="med"/>
-                    </a:lnT>
-                    <a:lnB w="12700" cap="flat" cmpd="sng" algn="ctr">
-                      <a:solidFill>
-                        <a:srgbClr val="D9E1DF"/>
-                      </a:solidFill>
-                      <a:prstDash val="solid"/>
-                      <a:round/>
-                      <a:headEnd type="none" w="med" len="med"/>
-                      <a:tailEnd type="none" w="med" len="med"/>
-                    </a:lnB>
-                    <a:solidFill>
-                      <a:srgbClr val="FBFCFB"/>
-                    </a:solidFill>
-                  </a:tcPr>
-                </a:tc>
-                <a:tc>
-                  <a:txBody>
-                    <a:bodyPr/>
-                    <a:lstStyle/>
-                    <a:p>
-                      <a:pPr indent="0" marL="0">
-                        <a:buNone/>
-                      </a:pPr>
-                      <a:r>
-                        <a:rPr lang="en-US" sz="1300" dirty="0">
-                          <a:solidFill>
-                            <a:srgbClr val="14202B"/>
-                          </a:solidFill>
-                          <a:latin typeface="Calibri" pitchFamily="34" charset="0"/>
-                          <a:ea typeface="Calibri" pitchFamily="34" charset="-122"/>
-                          <a:cs typeface="Calibri" pitchFamily="34" charset="-120"/>
-                        </a:rPr>
-                        <a:t>Active-low, interlocked</a:t>
-                      </a:r>
-                      <a:endParaRPr lang="en-US" sz="1300" dirty="0">
-                        <a:latin typeface="Calibri" charset="0"/>
-                        <a:ea typeface="Calibri" charset="0"/>
-                        <a:cs typeface="Calibri" charset="0"/>
-                      </a:endParaRPr>
-                    </a:p>
-                  </a:txBody>
-                  <a:tcPr marL="109728" marR="109728" marT="0" marB="0" anchor="ctr">
-                    <a:lnL w="12700" cap="flat" cmpd="sng" algn="ctr">
-                      <a:solidFill>
-                        <a:srgbClr val="D9E1DF"/>
-                      </a:solidFill>
-                      <a:prstDash val="solid"/>
-                      <a:round/>
-                      <a:headEnd type="none" w="med" len="med"/>
-                      <a:tailEnd type="none" w="med" len="med"/>
-                    </a:lnL>
-                    <a:lnR w="12700" cap="flat" cmpd="sng" algn="ctr">
-                      <a:solidFill>
-                        <a:srgbClr val="D9E1DF"/>
-                      </a:solidFill>
-                      <a:prstDash val="solid"/>
-                      <a:round/>
-                      <a:headEnd type="none" w="med" len="med"/>
-                      <a:tailEnd type="none" w="med" len="med"/>
-                    </a:lnR>
-                    <a:lnT w="12700" cap="flat" cmpd="sng" algn="ctr">
-                      <a:solidFill>
-                        <a:srgbClr val="D9E1DF"/>
-                      </a:solidFill>
-                      <a:prstDash val="solid"/>
-                      <a:round/>
-                      <a:headEnd type="none" w="med" len="med"/>
-                      <a:tailEnd type="none" w="med" len="med"/>
-                    </a:lnT>
-                    <a:lnB w="12700" cap="flat" cmpd="sng" algn="ctr">
-                      <a:solidFill>
-                        <a:srgbClr val="D9E1DF"/>
-                      </a:solidFill>
-                      <a:prstDash val="solid"/>
-                      <a:round/>
-                      <a:headEnd type="none" w="med" len="med"/>
-                      <a:tailEnd type="none" w="med" len="med"/>
-                    </a:lnB>
-                    <a:solidFill>
-                      <a:srgbClr val="FBFCFB"/>
-                    </a:solidFill>
-                  </a:tcPr>
-                </a:tc>
-              </a:tr>
-              <a:tr h="384048">
-                <a:tc>
-                  <a:txBody>
-                    <a:bodyPr/>
-                    <a:lstStyle/>
-                    <a:p>
-                      <a:pPr indent="0" marL="0">
-                        <a:buNone/>
-                      </a:pPr>
-                      <a:r>
-                        <a:rPr lang="en-US" sz="1300" dirty="0">
-                          <a:solidFill>
-                            <a:srgbClr val="14202B"/>
-                          </a:solidFill>
-                          <a:latin typeface="Calibri" pitchFamily="34" charset="0"/>
-                          <a:ea typeface="Calibri" pitchFamily="34" charset="-122"/>
-                          <a:cs typeface="Calibri" pitchFamily="34" charset="-120"/>
-                        </a:rPr>
-                        <a:t>16×2 LCD</a:t>
-                      </a:r>
-                      <a:endParaRPr lang="en-US" sz="1300" dirty="0">
-                        <a:latin typeface="Calibri" charset="0"/>
-                        <a:ea typeface="Calibri" charset="0"/>
-                        <a:cs typeface="Calibri" charset="0"/>
-                      </a:endParaRPr>
-                    </a:p>
-                  </a:txBody>
-                  <a:tcPr marL="109728" marR="109728" marT="0" marB="0" anchor="ctr">
-                    <a:lnL w="12700" cap="flat" cmpd="sng" algn="ctr">
-                      <a:solidFill>
-                        <a:srgbClr val="D9E1DF"/>
-                      </a:solidFill>
-                      <a:prstDash val="solid"/>
-                      <a:round/>
-                      <a:headEnd type="none" w="med" len="med"/>
-                      <a:tailEnd type="none" w="med" len="med"/>
-                    </a:lnL>
-                    <a:lnR w="12700" cap="flat" cmpd="sng" algn="ctr">
-                      <a:solidFill>
-                        <a:srgbClr val="D9E1DF"/>
-                      </a:solidFill>
-                      <a:prstDash val="solid"/>
-                      <a:round/>
-                      <a:headEnd type="none" w="med" len="med"/>
-                      <a:tailEnd type="none" w="med" len="med"/>
-                    </a:lnR>
-                    <a:lnT w="12700" cap="flat" cmpd="sng" algn="ctr">
-                      <a:solidFill>
-                        <a:srgbClr val="D9E1DF"/>
-                      </a:solidFill>
-                      <a:prstDash val="solid"/>
-                      <a:round/>
-                      <a:headEnd type="none" w="med" len="med"/>
-                      <a:tailEnd type="none" w="med" len="med"/>
-                    </a:lnT>
-                    <a:lnB w="12700" cap="flat" cmpd="sng" algn="ctr">
-                      <a:solidFill>
-                        <a:srgbClr val="D9E1DF"/>
-                      </a:solidFill>
-                      <a:prstDash val="solid"/>
-                      <a:round/>
-                      <a:headEnd type="none" w="med" len="med"/>
-                      <a:tailEnd type="none" w="med" len="med"/>
-                    </a:lnB>
-                    <a:solidFill>
-                      <a:srgbClr val="FBFCFB"/>
-                    </a:solidFill>
-                  </a:tcPr>
-                </a:tc>
-                <a:tc>
-                  <a:txBody>
-                    <a:bodyPr/>
-                    <a:lstStyle/>
-                    <a:p>
-                      <a:pPr indent="0" marL="0">
-                        <a:buNone/>
-                      </a:pPr>
-                      <a:r>
-                        <a:rPr lang="en-US" sz="1300" dirty="0">
-                          <a:solidFill>
-                            <a:srgbClr val="14202B"/>
-                          </a:solidFill>
-                          <a:latin typeface="Calibri" pitchFamily="34" charset="0"/>
-                          <a:ea typeface="Calibri" pitchFamily="34" charset="-122"/>
-                          <a:cs typeface="Calibri" pitchFamily="34" charset="-120"/>
-                        </a:rPr>
-                        <a:t>Verdict on the coach wall</a:t>
-                      </a:r>
-                      <a:endParaRPr lang="en-US" sz="1300" dirty="0">
-                        <a:latin typeface="Calibri" charset="0"/>
-                        <a:ea typeface="Calibri" charset="0"/>
-                        <a:cs typeface="Calibri" charset="0"/>
-                      </a:endParaRPr>
-                    </a:p>
-                  </a:txBody>
-                  <a:tcPr marL="109728" marR="109728" marT="0" marB="0" anchor="ctr">
-                    <a:lnL w="12700" cap="flat" cmpd="sng" algn="ctr">
-                      <a:solidFill>
-                        <a:srgbClr val="D9E1DF"/>
-                      </a:solidFill>
-                      <a:prstDash val="solid"/>
-                      <a:round/>
-                      <a:headEnd type="none" w="med" len="med"/>
-                      <a:tailEnd type="none" w="med" len="med"/>
-                    </a:lnL>
-                    <a:lnR w="12700" cap="flat" cmpd="sng" algn="ctr">
-                      <a:solidFill>
-                        <a:srgbClr val="D9E1DF"/>
-                      </a:solidFill>
-                      <a:prstDash val="solid"/>
-                      <a:round/>
-                      <a:headEnd type="none" w="med" len="med"/>
-                      <a:tailEnd type="none" w="med" len="med"/>
-                    </a:lnR>
-                    <a:lnT w="12700" cap="flat" cmpd="sng" algn="ctr">
-                      <a:solidFill>
-                        <a:srgbClr val="D9E1DF"/>
-                      </a:solidFill>
-                      <a:prstDash val="solid"/>
-                      <a:round/>
-                      <a:headEnd type="none" w="med" len="med"/>
-                      <a:tailEnd type="none" w="med" len="med"/>
-                    </a:lnT>
-                    <a:lnB w="12700" cap="flat" cmpd="sng" algn="ctr">
-                      <a:solidFill>
-                        <a:srgbClr val="D9E1DF"/>
-                      </a:solidFill>
-                      <a:prstDash val="solid"/>
-                      <a:round/>
-                      <a:headEnd type="none" w="med" len="med"/>
-                      <a:tailEnd type="none" w="med" len="med"/>
-                    </a:lnB>
-                    <a:solidFill>
-                      <a:srgbClr val="FBFCFB"/>
-                    </a:solidFill>
-                  </a:tcPr>
-                </a:tc>
-                <a:tc>
-                  <a:txBody>
-                    <a:bodyPr/>
-                    <a:lstStyle/>
-                    <a:p>
-                      <a:pPr indent="0" marL="0">
-                        <a:buNone/>
-                      </a:pPr>
-                      <a:r>
-                        <a:rPr lang="en-US" sz="1300" dirty="0">
-                          <a:solidFill>
-                            <a:srgbClr val="14202B"/>
-                          </a:solidFill>
-                          <a:latin typeface="Calibri" pitchFamily="34" charset="0"/>
-                          <a:ea typeface="Calibri" pitchFamily="34" charset="-122"/>
-                          <a:cs typeface="Calibri" pitchFamily="34" charset="-120"/>
-                        </a:rPr>
-                        <a:t>T → G → CO₂ → dust</a:t>
-                      </a:r>
-                      <a:endParaRPr lang="en-US" sz="1300" dirty="0">
-                        <a:latin typeface="Calibri" charset="0"/>
-                        <a:ea typeface="Calibri" charset="0"/>
-                        <a:cs typeface="Calibri" charset="0"/>
-                      </a:endParaRPr>
-                    </a:p>
-                  </a:txBody>
-                  <a:tcPr marL="109728" marR="109728" marT="0" marB="0" anchor="ctr">
-                    <a:lnL w="12700" cap="flat" cmpd="sng" algn="ctr">
-                      <a:solidFill>
-                        <a:srgbClr val="D9E1DF"/>
-                      </a:solidFill>
-                      <a:prstDash val="solid"/>
-                      <a:round/>
-                      <a:headEnd type="none" w="med" len="med"/>
-                      <a:tailEnd type="none" w="med" len="med"/>
-                    </a:lnL>
-                    <a:lnR w="12700" cap="flat" cmpd="sng" algn="ctr">
-                      <a:solidFill>
-                        <a:srgbClr val="D9E1DF"/>
-                      </a:solidFill>
-                      <a:prstDash val="solid"/>
-                      <a:round/>
-                      <a:headEnd type="none" w="med" len="med"/>
-                      <a:tailEnd type="none" w="med" len="med"/>
-                    </a:lnR>
-                    <a:lnT w="12700" cap="flat" cmpd="sng" algn="ctr">
-                      <a:solidFill>
-                        <a:srgbClr val="D9E1DF"/>
-                      </a:solidFill>
-                      <a:prstDash val="solid"/>
-                      <a:round/>
-                      <a:headEnd type="none" w="med" len="med"/>
-                      <a:tailEnd type="none" w="med" len="med"/>
-                    </a:lnT>
-                    <a:lnB w="12700" cap="flat" cmpd="sng" algn="ctr">
-                      <a:solidFill>
-                        <a:srgbClr val="D9E1DF"/>
-                      </a:solidFill>
-                      <a:prstDash val="solid"/>
-                      <a:round/>
-                      <a:headEnd type="none" w="med" len="med"/>
-                      <a:tailEnd type="none" w="med" len="med"/>
-                    </a:lnB>
-                    <a:solidFill>
-                      <a:srgbClr val="FBFCFB"/>
-                    </a:solidFill>
-                  </a:tcPr>
-                </a:tc>
-              </a:tr>
-              <a:tr h="384048">
-                <a:tc>
-                  <a:txBody>
-                    <a:bodyPr/>
-                    <a:lstStyle/>
-                    <a:p>
-                      <a:pPr indent="0" marL="0">
-                        <a:buNone/>
-                      </a:pPr>
-                      <a:r>
-                        <a:rPr lang="en-US" sz="1300" dirty="0">
-                          <a:solidFill>
-                            <a:srgbClr val="14202B"/>
-                          </a:solidFill>
-                          <a:latin typeface="Calibri" pitchFamily="34" charset="0"/>
-                          <a:ea typeface="Calibri" pitchFamily="34" charset="-122"/>
-                          <a:cs typeface="Calibri" pitchFamily="34" charset="-120"/>
-                        </a:rPr>
-                        <a:t>ESP8266</a:t>
-                      </a:r>
-                      <a:endParaRPr lang="en-US" sz="1300" dirty="0">
-                        <a:latin typeface="Calibri" charset="0"/>
-                        <a:ea typeface="Calibri" charset="0"/>
-                        <a:cs typeface="Calibri" charset="0"/>
-                      </a:endParaRPr>
-                    </a:p>
-                  </a:txBody>
-                  <a:tcPr marL="109728" marR="109728" marT="0" marB="0" anchor="ctr">
-                    <a:lnL w="12700" cap="flat" cmpd="sng" algn="ctr">
-                      <a:solidFill>
-                        <a:srgbClr val="D9E1DF"/>
-                      </a:solidFill>
-                      <a:prstDash val="solid"/>
-                      <a:round/>
-                      <a:headEnd type="none" w="med" len="med"/>
-                      <a:tailEnd type="none" w="med" len="med"/>
-                    </a:lnL>
-                    <a:lnR w="12700" cap="flat" cmpd="sng" algn="ctr">
-                      <a:solidFill>
-                        <a:srgbClr val="D9E1DF"/>
-                      </a:solidFill>
-                      <a:prstDash val="solid"/>
-                      <a:round/>
-                      <a:headEnd type="none" w="med" len="med"/>
-                      <a:tailEnd type="none" w="med" len="med"/>
-                    </a:lnR>
-                    <a:lnT w="12700" cap="flat" cmpd="sng" algn="ctr">
-                      <a:solidFill>
-                        <a:srgbClr val="D9E1DF"/>
-                      </a:solidFill>
-                      <a:prstDash val="solid"/>
-                      <a:round/>
-                      <a:headEnd type="none" w="med" len="med"/>
-                      <a:tailEnd type="none" w="med" len="med"/>
-                    </a:lnT>
-                    <a:lnB w="12700" cap="flat" cmpd="sng" algn="ctr">
-                      <a:solidFill>
-                        <a:srgbClr val="D9E1DF"/>
-                      </a:solidFill>
-                      <a:prstDash val="solid"/>
-                      <a:round/>
-                      <a:headEnd type="none" w="med" len="med"/>
-                      <a:tailEnd type="none" w="med" len="med"/>
-                    </a:lnB>
-                    <a:solidFill>
-                      <a:srgbClr val="FBFCFB"/>
-                    </a:solidFill>
-                  </a:tcPr>
-                </a:tc>
-                <a:tc>
-                  <a:txBody>
-                    <a:bodyPr/>
-                    <a:lstStyle/>
-                    <a:p>
-                      <a:pPr indent="0" marL="0">
-                        <a:buNone/>
-                      </a:pPr>
-                      <a:r>
-                        <a:rPr lang="en-US" sz="1300" dirty="0">
-                          <a:solidFill>
-                            <a:srgbClr val="14202B"/>
-                          </a:solidFill>
-                          <a:latin typeface="Calibri" pitchFamily="34" charset="0"/>
-                          <a:ea typeface="Calibri" pitchFamily="34" charset="-122"/>
-                          <a:cs typeface="Calibri" pitchFamily="34" charset="-120"/>
-                        </a:rPr>
-                        <a:t>Wi-Fi bridge</a:t>
-                      </a:r>
-                      <a:endParaRPr lang="en-US" sz="1300" dirty="0">
-                        <a:latin typeface="Calibri" charset="0"/>
-                        <a:ea typeface="Calibri" charset="0"/>
-                        <a:cs typeface="Calibri" charset="0"/>
-                      </a:endParaRPr>
-                    </a:p>
-                  </a:txBody>
-                  <a:tcPr marL="109728" marR="109728" marT="0" marB="0" anchor="ctr">
-                    <a:lnL w="12700" cap="flat" cmpd="sng" algn="ctr">
-                      <a:solidFill>
-                        <a:srgbClr val="D9E1DF"/>
-                      </a:solidFill>
-                      <a:prstDash val="solid"/>
-                      <a:round/>
-                      <a:headEnd type="none" w="med" len="med"/>
-                      <a:tailEnd type="none" w="med" len="med"/>
-                    </a:lnL>
-                    <a:lnR w="12700" cap="flat" cmpd="sng" algn="ctr">
-                      <a:solidFill>
-                        <a:srgbClr val="D9E1DF"/>
-                      </a:solidFill>
-                      <a:prstDash val="solid"/>
-                      <a:round/>
-                      <a:headEnd type="none" w="med" len="med"/>
-                      <a:tailEnd type="none" w="med" len="med"/>
-                    </a:lnR>
-                    <a:lnT w="12700" cap="flat" cmpd="sng" algn="ctr">
-                      <a:solidFill>
-                        <a:srgbClr val="D9E1DF"/>
-                      </a:solidFill>
-                      <a:prstDash val="solid"/>
-                      <a:round/>
-                      <a:headEnd type="none" w="med" len="med"/>
-                      <a:tailEnd type="none" w="med" len="med"/>
-                    </a:lnT>
-                    <a:lnB w="12700" cap="flat" cmpd="sng" algn="ctr">
-                      <a:solidFill>
-                        <a:srgbClr val="D9E1DF"/>
-                      </a:solidFill>
-                      <a:prstDash val="solid"/>
-                      <a:round/>
-                      <a:headEnd type="none" w="med" len="med"/>
-                      <a:tailEnd type="none" w="med" len="med"/>
-                    </a:lnB>
-                    <a:solidFill>
-                      <a:srgbClr val="FBFCFB"/>
-                    </a:solidFill>
-                  </a:tcPr>
-                </a:tc>
-                <a:tc>
-                  <a:txBody>
-                    <a:bodyPr/>
-                    <a:lstStyle/>
-                    <a:p>
-                      <a:pPr indent="0" marL="0">
-                        <a:buNone/>
-                      </a:pPr>
-                      <a:r>
-                        <a:rPr lang="en-US" sz="1300" dirty="0">
-                          <a:solidFill>
-                            <a:srgbClr val="14202B"/>
-                          </a:solidFill>
-                          <a:latin typeface="Calibri" pitchFamily="34" charset="0"/>
-                          <a:ea typeface="Calibri" pitchFamily="34" charset="-122"/>
-                          <a:cs typeface="Calibri" pitchFamily="34" charset="-120"/>
-                        </a:rPr>
-                        <a:t>To AWS IoT Core</a:t>
-                      </a:r>
-                      <a:endParaRPr lang="en-US" sz="1300" dirty="0">
-                        <a:latin typeface="Calibri" charset="0"/>
-                        <a:ea typeface="Calibri" charset="0"/>
-                        <a:cs typeface="Calibri" charset="0"/>
-                      </a:endParaRPr>
-                    </a:p>
-                  </a:txBody>
-                  <a:tcPr marL="109728" marR="109728" marT="0" marB="0" anchor="ctr">
-                    <a:lnL w="12700" cap="flat" cmpd="sng" algn="ctr">
-                      <a:solidFill>
-                        <a:srgbClr val="D9E1DF"/>
-                      </a:solidFill>
-                      <a:prstDash val="solid"/>
-                      <a:round/>
-                      <a:headEnd type="none" w="med" len="med"/>
-                      <a:tailEnd type="none" w="med" len="med"/>
-                    </a:lnL>
-                    <a:lnR w="12700" cap="flat" cmpd="sng" algn="ctr">
-                      <a:solidFill>
-                        <a:srgbClr val="D9E1DF"/>
-                      </a:solidFill>
-                      <a:prstDash val="solid"/>
-                      <a:round/>
-                      <a:headEnd type="none" w="med" len="med"/>
-                      <a:tailEnd type="none" w="med" len="med"/>
-                    </a:lnR>
-                    <a:lnT w="12700" cap="flat" cmpd="sng" algn="ctr">
-                      <a:solidFill>
-                        <a:srgbClr val="D9E1DF"/>
-                      </a:solidFill>
-                      <a:prstDash val="solid"/>
-                      <a:round/>
-                      <a:headEnd type="none" w="med" len="med"/>
-                      <a:tailEnd type="none" w="med" len="med"/>
-                    </a:lnT>
-                    <a:lnB w="12700" cap="flat" cmpd="sng" algn="ctr">
-                      <a:solidFill>
-                        <a:srgbClr val="D9E1DF"/>
-                      </a:solidFill>
-                      <a:prstDash val="solid"/>
-                      <a:round/>
-                      <a:headEnd type="none" w="med" len="med"/>
-                      <a:tailEnd type="none" w="med" len="med"/>
-                    </a:lnB>
-                    <a:solidFill>
-                      <a:srgbClr val="FBFCFB"/>
-                    </a:solidFill>
-                  </a:tcPr>
-                </a:tc>
-              </a:tr>
-            </a:tbl>
-          </a:graphicData>
-        </a:graphic>
-      </p:graphicFrame>
-      <p:sp>
-        <p:nvSpPr>
-          <p:cNvPr id="5" name="Shape 2"/>
+      <p:sp>
+        <p:nvSpPr>
+          <p:cNvPr id="4" name="Shape 2"/>
           <p:cNvSpPr/>
           <p:nvPr/>
         </p:nvSpPr>
         <p:spPr>
           <a:xfrm>
-            <a:off x="8129016" y="2514600"/>
-            <a:ext cx="3248863" cy="3072384"/>
+            <a:off x="786384" y="2487168"/>
+            <a:ext cx="6393319" cy="3621024"/>
+          </a:xfrm>
+          <a:prstGeom prst="rect">
+            <a:avLst/>
+          </a:prstGeom>
+          <a:solidFill>
+            <a:srgbClr val="D9E1DF"/>
+          </a:solidFill>
+          <a:ln w="12700">
+            <a:solidFill>
+              <a:srgbClr val="D9E1DF"/>
+            </a:solidFill>
+            <a:prstDash val="solid"/>
+          </a:ln>
+        </p:spPr>
+      </p:sp>
+      <p:pic>
+        <p:nvPicPr>
+          <p:cNvPr id="5" name="Image 0" descr="Photo of the working BreatheIQ prototype on a wooden board: Arduino Mega 2560, DHT11, MQ-2 and MQ-135 gas sensors, PMS7003 dust sensor, 16x2 LCD, relay board, exhaust fan and two ozone generators, each marked with a number">    </p:cNvPr>
+          <p:cNvPicPr>
+            <a:picLocks noChangeAspect="1"/>
+          </p:cNvPicPr>
+          <p:nvPr/>
+        </p:nvPicPr>
+        <p:blipFill>
+          <a:blip r:embed="rId1"/>
+          <a:stretch>
+            <a:fillRect/>
+          </a:stretch>
+        </p:blipFill>
+        <p:spPr>
+          <a:xfrm>
+            <a:off x="813816" y="2514600"/>
+            <a:ext cx="6338455" cy="3566160"/>
+          </a:xfrm>
+          <a:prstGeom prst="rect">
+            <a:avLst/>
+          </a:prstGeom>
+        </p:spPr>
+      </p:pic>
+      <p:sp>
+        <p:nvSpPr>
+          <p:cNvPr id="6" name="Shape 3"/>
+          <p:cNvSpPr/>
+          <p:nvPr/>
+        </p:nvSpPr>
+        <p:spPr>
+          <a:xfrm>
+            <a:off x="2310107" y="3241964"/>
+            <a:ext cx="274320" cy="274320"/>
+          </a:xfrm>
+          <a:prstGeom prst="ellipse">
+            <a:avLst/>
+          </a:prstGeom>
+          <a:solidFill>
+            <a:srgbClr val="0F766E"/>
+          </a:solidFill>
+          <a:ln w="19050">
+            <a:solidFill>
+              <a:srgbClr val="FFFFFF"/>
+            </a:solidFill>
+            <a:prstDash val="solid"/>
+          </a:ln>
+        </p:spPr>
+      </p:sp>
+      <p:sp>
+        <p:nvSpPr>
+          <p:cNvPr id="7" name="Text 4"/>
+          <p:cNvSpPr txBox="1"/>
+          <p:nvPr/>
+        </p:nvSpPr>
+        <p:spPr>
+          <a:xfrm>
+            <a:off x="2310107" y="3241964"/>
+            <a:ext cx="274320" cy="274320"/>
+          </a:xfrm>
+          <a:prstGeom prst="rect">
+            <a:avLst/>
+          </a:prstGeom>
+          <a:noFill/>
+          <a:ln/>
+        </p:spPr>
+        <p:txBody>
+          <a:bodyPr wrap="square" lIns="0" tIns="0" rIns="0" bIns="0" rtlCol="0" anchor="ctr"/>
+          <a:lstStyle/>
+          <a:p>
+            <a:pPr algn="ctr" indent="0" marL="0">
+              <a:buNone/>
+            </a:pPr>
+            <a:r>
+              <a:rPr lang="en-US" sz="1200" b="1" dirty="0">
+                <a:solidFill>
+                  <a:srgbClr val="FFFFFF"/>
+                </a:solidFill>
+                <a:latin typeface="Calibri" pitchFamily="34" charset="0"/>
+                <a:ea typeface="Calibri" pitchFamily="34" charset="-122"/>
+                <a:cs typeface="Calibri" pitchFamily="34" charset="-120"/>
+              </a:rPr>
+              <a:t>1</a:t>
+            </a:r>
+            <a:endParaRPr lang="en-US" sz="1200" dirty="0"/>
+          </a:p>
+        </p:txBody>
+      </p:sp>
+      <p:sp>
+        <p:nvSpPr>
+          <p:cNvPr id="8" name="Shape 5"/>
+          <p:cNvSpPr/>
+          <p:nvPr/>
+        </p:nvSpPr>
+        <p:spPr>
+          <a:xfrm>
+            <a:off x="3178787" y="4148051"/>
+            <a:ext cx="274320" cy="274320"/>
+          </a:xfrm>
+          <a:prstGeom prst="ellipse">
+            <a:avLst/>
+          </a:prstGeom>
+          <a:solidFill>
+            <a:srgbClr val="0F766E"/>
+          </a:solidFill>
+          <a:ln w="19050">
+            <a:solidFill>
+              <a:srgbClr val="FFFFFF"/>
+            </a:solidFill>
+            <a:prstDash val="solid"/>
+          </a:ln>
+        </p:spPr>
+      </p:sp>
+      <p:sp>
+        <p:nvSpPr>
+          <p:cNvPr id="9" name="Text 6"/>
+          <p:cNvSpPr txBox="1"/>
+          <p:nvPr/>
+        </p:nvSpPr>
+        <p:spPr>
+          <a:xfrm>
+            <a:off x="3178787" y="4148051"/>
+            <a:ext cx="274320" cy="274320"/>
+          </a:xfrm>
+          <a:prstGeom prst="rect">
+            <a:avLst/>
+          </a:prstGeom>
+          <a:noFill/>
+          <a:ln/>
+        </p:spPr>
+        <p:txBody>
+          <a:bodyPr wrap="square" lIns="0" tIns="0" rIns="0" bIns="0" rtlCol="0" anchor="ctr"/>
+          <a:lstStyle/>
+          <a:p>
+            <a:pPr algn="ctr" indent="0" marL="0">
+              <a:buNone/>
+            </a:pPr>
+            <a:r>
+              <a:rPr lang="en-US" sz="1200" b="1" dirty="0">
+                <a:solidFill>
+                  <a:srgbClr val="FFFFFF"/>
+                </a:solidFill>
+                <a:latin typeface="Calibri" pitchFamily="34" charset="0"/>
+                <a:ea typeface="Calibri" pitchFamily="34" charset="-122"/>
+                <a:cs typeface="Calibri" pitchFamily="34" charset="-120"/>
+              </a:rPr>
+              <a:t>2</a:t>
+            </a:r>
+            <a:endParaRPr lang="en-US" sz="1200" dirty="0"/>
+          </a:p>
+        </p:txBody>
+      </p:sp>
+      <p:sp>
+        <p:nvSpPr>
+          <p:cNvPr id="10" name="Shape 7"/>
+          <p:cNvSpPr/>
+          <p:nvPr/>
+        </p:nvSpPr>
+        <p:spPr>
+          <a:xfrm>
+            <a:off x="2102289" y="4530436"/>
+            <a:ext cx="274320" cy="274320"/>
+          </a:xfrm>
+          <a:prstGeom prst="ellipse">
+            <a:avLst/>
+          </a:prstGeom>
+          <a:solidFill>
+            <a:srgbClr val="0F766E"/>
+          </a:solidFill>
+          <a:ln w="19050">
+            <a:solidFill>
+              <a:srgbClr val="FFFFFF"/>
+            </a:solidFill>
+            <a:prstDash val="solid"/>
+          </a:ln>
+        </p:spPr>
+      </p:sp>
+      <p:sp>
+        <p:nvSpPr>
+          <p:cNvPr id="11" name="Text 8"/>
+          <p:cNvSpPr txBox="1"/>
+          <p:nvPr/>
+        </p:nvSpPr>
+        <p:spPr>
+          <a:xfrm>
+            <a:off x="2102289" y="4530436"/>
+            <a:ext cx="274320" cy="274320"/>
+          </a:xfrm>
+          <a:prstGeom prst="rect">
+            <a:avLst/>
+          </a:prstGeom>
+          <a:noFill/>
+          <a:ln/>
+        </p:spPr>
+        <p:txBody>
+          <a:bodyPr wrap="square" lIns="0" tIns="0" rIns="0" bIns="0" rtlCol="0" anchor="ctr"/>
+          <a:lstStyle/>
+          <a:p>
+            <a:pPr algn="ctr" indent="0" marL="0">
+              <a:buNone/>
+            </a:pPr>
+            <a:r>
+              <a:rPr lang="en-US" sz="1200" b="1" dirty="0">
+                <a:solidFill>
+                  <a:srgbClr val="FFFFFF"/>
+                </a:solidFill>
+                <a:latin typeface="Calibri" pitchFamily="34" charset="0"/>
+                <a:ea typeface="Calibri" pitchFamily="34" charset="-122"/>
+                <a:cs typeface="Calibri" pitchFamily="34" charset="-120"/>
+              </a:rPr>
+              <a:t>3</a:t>
+            </a:r>
+            <a:endParaRPr lang="en-US" sz="1200" dirty="0"/>
+          </a:p>
+        </p:txBody>
+      </p:sp>
+      <p:sp>
+        <p:nvSpPr>
+          <p:cNvPr id="12" name="Shape 9"/>
+          <p:cNvSpPr/>
+          <p:nvPr/>
+        </p:nvSpPr>
+        <p:spPr>
+          <a:xfrm>
+            <a:off x="1424801" y="4696691"/>
+            <a:ext cx="274320" cy="274320"/>
+          </a:xfrm>
+          <a:prstGeom prst="ellipse">
+            <a:avLst/>
+          </a:prstGeom>
+          <a:solidFill>
+            <a:srgbClr val="0F766E"/>
+          </a:solidFill>
+          <a:ln w="19050">
+            <a:solidFill>
+              <a:srgbClr val="FFFFFF"/>
+            </a:solidFill>
+            <a:prstDash val="solid"/>
+          </a:ln>
+        </p:spPr>
+      </p:sp>
+      <p:sp>
+        <p:nvSpPr>
+          <p:cNvPr id="13" name="Text 10"/>
+          <p:cNvSpPr txBox="1"/>
+          <p:nvPr/>
+        </p:nvSpPr>
+        <p:spPr>
+          <a:xfrm>
+            <a:off x="1424801" y="4696691"/>
+            <a:ext cx="274320" cy="274320"/>
+          </a:xfrm>
+          <a:prstGeom prst="rect">
+            <a:avLst/>
+          </a:prstGeom>
+          <a:noFill/>
+          <a:ln/>
+        </p:spPr>
+        <p:txBody>
+          <a:bodyPr wrap="square" lIns="0" tIns="0" rIns="0" bIns="0" rtlCol="0" anchor="ctr"/>
+          <a:lstStyle/>
+          <a:p>
+            <a:pPr algn="ctr" indent="0" marL="0">
+              <a:buNone/>
+            </a:pPr>
+            <a:r>
+              <a:rPr lang="en-US" sz="1200" b="1" dirty="0">
+                <a:solidFill>
+                  <a:srgbClr val="FFFFFF"/>
+                </a:solidFill>
+                <a:latin typeface="Calibri" pitchFamily="34" charset="0"/>
+                <a:ea typeface="Calibri" pitchFamily="34" charset="-122"/>
+                <a:cs typeface="Calibri" pitchFamily="34" charset="-120"/>
+              </a:rPr>
+              <a:t>4</a:t>
+            </a:r>
+            <a:endParaRPr lang="en-US" sz="1200" dirty="0"/>
+          </a:p>
+        </p:txBody>
+      </p:sp>
+      <p:sp>
+        <p:nvSpPr>
+          <p:cNvPr id="14" name="Shape 11"/>
+          <p:cNvSpPr/>
+          <p:nvPr/>
+        </p:nvSpPr>
+        <p:spPr>
+          <a:xfrm>
+            <a:off x="2588583" y="5070764"/>
+            <a:ext cx="274320" cy="274320"/>
+          </a:xfrm>
+          <a:prstGeom prst="ellipse">
+            <a:avLst/>
+          </a:prstGeom>
+          <a:solidFill>
+            <a:srgbClr val="0F766E"/>
+          </a:solidFill>
+          <a:ln w="19050">
+            <a:solidFill>
+              <a:srgbClr val="FFFFFF"/>
+            </a:solidFill>
+            <a:prstDash val="solid"/>
+          </a:ln>
+        </p:spPr>
+      </p:sp>
+      <p:sp>
+        <p:nvSpPr>
+          <p:cNvPr id="15" name="Text 12"/>
+          <p:cNvSpPr txBox="1"/>
+          <p:nvPr/>
+        </p:nvSpPr>
+        <p:spPr>
+          <a:xfrm>
+            <a:off x="2588583" y="5070764"/>
+            <a:ext cx="274320" cy="274320"/>
+          </a:xfrm>
+          <a:prstGeom prst="rect">
+            <a:avLst/>
+          </a:prstGeom>
+          <a:noFill/>
+          <a:ln/>
+        </p:spPr>
+        <p:txBody>
+          <a:bodyPr wrap="square" lIns="0" tIns="0" rIns="0" bIns="0" rtlCol="0" anchor="ctr"/>
+          <a:lstStyle/>
+          <a:p>
+            <a:pPr algn="ctr" indent="0" marL="0">
+              <a:buNone/>
+            </a:pPr>
+            <a:r>
+              <a:rPr lang="en-US" sz="1200" b="1" dirty="0">
+                <a:solidFill>
+                  <a:srgbClr val="FFFFFF"/>
+                </a:solidFill>
+                <a:latin typeface="Calibri" pitchFamily="34" charset="0"/>
+                <a:ea typeface="Calibri" pitchFamily="34" charset="-122"/>
+                <a:cs typeface="Calibri" pitchFamily="34" charset="-120"/>
+              </a:rPr>
+              <a:t>4</a:t>
+            </a:r>
+            <a:endParaRPr lang="en-US" sz="1200" dirty="0"/>
+          </a:p>
+        </p:txBody>
+      </p:sp>
+      <p:sp>
+        <p:nvSpPr>
+          <p:cNvPr id="16" name="Shape 13"/>
+          <p:cNvSpPr/>
+          <p:nvPr/>
+        </p:nvSpPr>
+        <p:spPr>
+          <a:xfrm>
+            <a:off x="2463892" y="5590309"/>
+            <a:ext cx="274320" cy="274320"/>
+          </a:xfrm>
+          <a:prstGeom prst="ellipse">
+            <a:avLst/>
+          </a:prstGeom>
+          <a:solidFill>
+            <a:srgbClr val="0F766E"/>
+          </a:solidFill>
+          <a:ln w="19050">
+            <a:solidFill>
+              <a:srgbClr val="FFFFFF"/>
+            </a:solidFill>
+            <a:prstDash val="solid"/>
+          </a:ln>
+        </p:spPr>
+      </p:sp>
+      <p:sp>
+        <p:nvSpPr>
+          <p:cNvPr id="17" name="Text 14"/>
+          <p:cNvSpPr txBox="1"/>
+          <p:nvPr/>
+        </p:nvSpPr>
+        <p:spPr>
+          <a:xfrm>
+            <a:off x="2463892" y="5590309"/>
+            <a:ext cx="274320" cy="274320"/>
+          </a:xfrm>
+          <a:prstGeom prst="rect">
+            <a:avLst/>
+          </a:prstGeom>
+          <a:noFill/>
+          <a:ln/>
+        </p:spPr>
+        <p:txBody>
+          <a:bodyPr wrap="square" lIns="0" tIns="0" rIns="0" bIns="0" rtlCol="0" anchor="ctr"/>
+          <a:lstStyle/>
+          <a:p>
+            <a:pPr algn="ctr" indent="0" marL="0">
+              <a:buNone/>
+            </a:pPr>
+            <a:r>
+              <a:rPr lang="en-US" sz="1200" b="1" dirty="0">
+                <a:solidFill>
+                  <a:srgbClr val="FFFFFF"/>
+                </a:solidFill>
+                <a:latin typeface="Calibri" pitchFamily="34" charset="0"/>
+                <a:ea typeface="Calibri" pitchFamily="34" charset="-122"/>
+                <a:cs typeface="Calibri" pitchFamily="34" charset="-120"/>
+              </a:rPr>
+              <a:t>5</a:t>
+            </a:r>
+            <a:endParaRPr lang="en-US" sz="1200" dirty="0"/>
+          </a:p>
+        </p:txBody>
+      </p:sp>
+      <p:sp>
+        <p:nvSpPr>
+          <p:cNvPr id="18" name="Shape 15"/>
+          <p:cNvSpPr/>
+          <p:nvPr/>
+        </p:nvSpPr>
+        <p:spPr>
+          <a:xfrm>
+            <a:off x="4271911" y="3886200"/>
+            <a:ext cx="274320" cy="274320"/>
+          </a:xfrm>
+          <a:prstGeom prst="ellipse">
+            <a:avLst/>
+          </a:prstGeom>
+          <a:solidFill>
+            <a:srgbClr val="0F766E"/>
+          </a:solidFill>
+          <a:ln w="19050">
+            <a:solidFill>
+              <a:srgbClr val="FFFFFF"/>
+            </a:solidFill>
+            <a:prstDash val="solid"/>
+          </a:ln>
+        </p:spPr>
+      </p:sp>
+      <p:sp>
+        <p:nvSpPr>
+          <p:cNvPr id="19" name="Text 16"/>
+          <p:cNvSpPr txBox="1"/>
+          <p:nvPr/>
+        </p:nvSpPr>
+        <p:spPr>
+          <a:xfrm>
+            <a:off x="4271911" y="3886200"/>
+            <a:ext cx="274320" cy="274320"/>
+          </a:xfrm>
+          <a:prstGeom prst="rect">
+            <a:avLst/>
+          </a:prstGeom>
+          <a:noFill/>
+          <a:ln/>
+        </p:spPr>
+        <p:txBody>
+          <a:bodyPr wrap="square" lIns="0" tIns="0" rIns="0" bIns="0" rtlCol="0" anchor="ctr"/>
+          <a:lstStyle/>
+          <a:p>
+            <a:pPr algn="ctr" indent="0" marL="0">
+              <a:buNone/>
+            </a:pPr>
+            <a:r>
+              <a:rPr lang="en-US" sz="1200" b="1" dirty="0">
+                <a:solidFill>
+                  <a:srgbClr val="FFFFFF"/>
+                </a:solidFill>
+                <a:latin typeface="Calibri" pitchFamily="34" charset="0"/>
+                <a:ea typeface="Calibri" pitchFamily="34" charset="-122"/>
+                <a:cs typeface="Calibri" pitchFamily="34" charset="-120"/>
+              </a:rPr>
+              <a:t>6</a:t>
+            </a:r>
+            <a:endParaRPr lang="en-US" sz="1200" dirty="0"/>
+          </a:p>
+        </p:txBody>
+      </p:sp>
+      <p:sp>
+        <p:nvSpPr>
+          <p:cNvPr id="20" name="Shape 17"/>
+          <p:cNvSpPr/>
+          <p:nvPr/>
+        </p:nvSpPr>
+        <p:spPr>
+          <a:xfrm>
+            <a:off x="4251129" y="2930236"/>
+            <a:ext cx="274320" cy="274320"/>
+          </a:xfrm>
+          <a:prstGeom prst="ellipse">
+            <a:avLst/>
+          </a:prstGeom>
+          <a:solidFill>
+            <a:srgbClr val="0F766E"/>
+          </a:solidFill>
+          <a:ln w="19050">
+            <a:solidFill>
+              <a:srgbClr val="FFFFFF"/>
+            </a:solidFill>
+            <a:prstDash val="solid"/>
+          </a:ln>
+        </p:spPr>
+      </p:sp>
+      <p:sp>
+        <p:nvSpPr>
+          <p:cNvPr id="21" name="Text 18"/>
+          <p:cNvSpPr txBox="1"/>
+          <p:nvPr/>
+        </p:nvSpPr>
+        <p:spPr>
+          <a:xfrm>
+            <a:off x="4251129" y="2930236"/>
+            <a:ext cx="274320" cy="274320"/>
+          </a:xfrm>
+          <a:prstGeom prst="rect">
+            <a:avLst/>
+          </a:prstGeom>
+          <a:noFill/>
+          <a:ln/>
+        </p:spPr>
+        <p:txBody>
+          <a:bodyPr wrap="square" lIns="0" tIns="0" rIns="0" bIns="0" rtlCol="0" anchor="ctr"/>
+          <a:lstStyle/>
+          <a:p>
+            <a:pPr algn="ctr" indent="0" marL="0">
+              <a:buNone/>
+            </a:pPr>
+            <a:r>
+              <a:rPr lang="en-US" sz="1200" b="1" dirty="0">
+                <a:solidFill>
+                  <a:srgbClr val="FFFFFF"/>
+                </a:solidFill>
+                <a:latin typeface="Calibri" pitchFamily="34" charset="0"/>
+                <a:ea typeface="Calibri" pitchFamily="34" charset="-122"/>
+                <a:cs typeface="Calibri" pitchFamily="34" charset="-120"/>
+              </a:rPr>
+              <a:t>7</a:t>
+            </a:r>
+            <a:endParaRPr lang="en-US" sz="1200" dirty="0"/>
+          </a:p>
+        </p:txBody>
+      </p:sp>
+      <p:sp>
+        <p:nvSpPr>
+          <p:cNvPr id="22" name="Shape 19"/>
+          <p:cNvSpPr/>
+          <p:nvPr/>
+        </p:nvSpPr>
+        <p:spPr>
+          <a:xfrm>
+            <a:off x="5290220" y="3969327"/>
+            <a:ext cx="274320" cy="274320"/>
+          </a:xfrm>
+          <a:prstGeom prst="ellipse">
+            <a:avLst/>
+          </a:prstGeom>
+          <a:solidFill>
+            <a:srgbClr val="0F766E"/>
+          </a:solidFill>
+          <a:ln w="19050">
+            <a:solidFill>
+              <a:srgbClr val="FFFFFF"/>
+            </a:solidFill>
+            <a:prstDash val="solid"/>
+          </a:ln>
+        </p:spPr>
+      </p:sp>
+      <p:sp>
+        <p:nvSpPr>
+          <p:cNvPr id="23" name="Text 20"/>
+          <p:cNvSpPr txBox="1"/>
+          <p:nvPr/>
+        </p:nvSpPr>
+        <p:spPr>
+          <a:xfrm>
+            <a:off x="5290220" y="3969327"/>
+            <a:ext cx="274320" cy="274320"/>
+          </a:xfrm>
+          <a:prstGeom prst="rect">
+            <a:avLst/>
+          </a:prstGeom>
+          <a:noFill/>
+          <a:ln/>
+        </p:spPr>
+        <p:txBody>
+          <a:bodyPr wrap="square" lIns="0" tIns="0" rIns="0" bIns="0" rtlCol="0" anchor="ctr"/>
+          <a:lstStyle/>
+          <a:p>
+            <a:pPr algn="ctr" indent="0" marL="0">
+              <a:buNone/>
+            </a:pPr>
+            <a:r>
+              <a:rPr lang="en-US" sz="1200" b="1" dirty="0">
+                <a:solidFill>
+                  <a:srgbClr val="FFFFFF"/>
+                </a:solidFill>
+                <a:latin typeface="Calibri" pitchFamily="34" charset="0"/>
+                <a:ea typeface="Calibri" pitchFamily="34" charset="-122"/>
+                <a:cs typeface="Calibri" pitchFamily="34" charset="-120"/>
+              </a:rPr>
+              <a:t>8</a:t>
+            </a:r>
+            <a:endParaRPr lang="en-US" sz="1200" dirty="0"/>
+          </a:p>
+        </p:txBody>
+      </p:sp>
+      <p:sp>
+        <p:nvSpPr>
+          <p:cNvPr id="24" name="Shape 21"/>
+          <p:cNvSpPr/>
+          <p:nvPr/>
+        </p:nvSpPr>
+        <p:spPr>
+          <a:xfrm>
+            <a:off x="6370874" y="3844636"/>
+            <a:ext cx="274320" cy="274320"/>
+          </a:xfrm>
+          <a:prstGeom prst="ellipse">
+            <a:avLst/>
+          </a:prstGeom>
+          <a:solidFill>
+            <a:srgbClr val="0F766E"/>
+          </a:solidFill>
+          <a:ln w="19050">
+            <a:solidFill>
+              <a:srgbClr val="FFFFFF"/>
+            </a:solidFill>
+            <a:prstDash val="solid"/>
+          </a:ln>
+        </p:spPr>
+      </p:sp>
+      <p:sp>
+        <p:nvSpPr>
+          <p:cNvPr id="25" name="Text 22"/>
+          <p:cNvSpPr txBox="1"/>
+          <p:nvPr/>
+        </p:nvSpPr>
+        <p:spPr>
+          <a:xfrm>
+            <a:off x="6370874" y="3844636"/>
+            <a:ext cx="274320" cy="274320"/>
+          </a:xfrm>
+          <a:prstGeom prst="rect">
+            <a:avLst/>
+          </a:prstGeom>
+          <a:noFill/>
+          <a:ln/>
+        </p:spPr>
+        <p:txBody>
+          <a:bodyPr wrap="square" lIns="0" tIns="0" rIns="0" bIns="0" rtlCol="0" anchor="ctr"/>
+          <a:lstStyle/>
+          <a:p>
+            <a:pPr algn="ctr" indent="0" marL="0">
+              <a:buNone/>
+            </a:pPr>
+            <a:r>
+              <a:rPr lang="en-US" sz="1200" b="1" dirty="0">
+                <a:solidFill>
+                  <a:srgbClr val="FFFFFF"/>
+                </a:solidFill>
+                <a:latin typeface="Calibri" pitchFamily="34" charset="0"/>
+                <a:ea typeface="Calibri" pitchFamily="34" charset="-122"/>
+                <a:cs typeface="Calibri" pitchFamily="34" charset="-120"/>
+              </a:rPr>
+              <a:t>8</a:t>
+            </a:r>
+            <a:endParaRPr lang="en-US" sz="1200" dirty="0"/>
+          </a:p>
+        </p:txBody>
+      </p:sp>
+      <p:sp>
+        <p:nvSpPr>
+          <p:cNvPr id="26" name="Shape 23"/>
+          <p:cNvSpPr/>
+          <p:nvPr/>
+        </p:nvSpPr>
+        <p:spPr>
+          <a:xfrm>
+            <a:off x="7472311" y="2551176"/>
+            <a:ext cx="274320" cy="274320"/>
+          </a:xfrm>
+          <a:prstGeom prst="ellipse">
+            <a:avLst/>
+          </a:prstGeom>
+          <a:solidFill>
+            <a:srgbClr val="0F766E"/>
+          </a:solidFill>
+          <a:ln w="19050">
+            <a:solidFill>
+              <a:srgbClr val="0F766E"/>
+            </a:solidFill>
+            <a:prstDash val="solid"/>
+          </a:ln>
+        </p:spPr>
+      </p:sp>
+      <p:sp>
+        <p:nvSpPr>
+          <p:cNvPr id="27" name="Text 24"/>
+          <p:cNvSpPr txBox="1"/>
+          <p:nvPr/>
+        </p:nvSpPr>
+        <p:spPr>
+          <a:xfrm>
+            <a:off x="7472311" y="2551176"/>
+            <a:ext cx="274320" cy="274320"/>
+          </a:xfrm>
+          <a:prstGeom prst="rect">
+            <a:avLst/>
+          </a:prstGeom>
+          <a:noFill/>
+          <a:ln/>
+        </p:spPr>
+        <p:txBody>
+          <a:bodyPr wrap="square" lIns="0" tIns="0" rIns="0" bIns="0" rtlCol="0" anchor="ctr"/>
+          <a:lstStyle/>
+          <a:p>
+            <a:pPr algn="ctr" indent="0" marL="0">
+              <a:buNone/>
+            </a:pPr>
+            <a:r>
+              <a:rPr lang="en-US" sz="1200" b="1" dirty="0">
+                <a:solidFill>
+                  <a:srgbClr val="FFFFFF"/>
+                </a:solidFill>
+                <a:latin typeface="Calibri" pitchFamily="34" charset="0"/>
+                <a:ea typeface="Calibri" pitchFamily="34" charset="-122"/>
+                <a:cs typeface="Calibri" pitchFamily="34" charset="-120"/>
+              </a:rPr>
+              <a:t>1</a:t>
+            </a:r>
+            <a:endParaRPr lang="en-US" sz="1200" dirty="0"/>
+          </a:p>
+        </p:txBody>
+      </p:sp>
+      <p:sp>
+        <p:nvSpPr>
+          <p:cNvPr id="28" name="Text 25"/>
+          <p:cNvSpPr txBox="1"/>
+          <p:nvPr/>
+        </p:nvSpPr>
+        <p:spPr>
+          <a:xfrm>
+            <a:off x="7856359" y="2514600"/>
+            <a:ext cx="3521521" cy="192024"/>
+          </a:xfrm>
+          <a:prstGeom prst="rect">
+            <a:avLst/>
+          </a:prstGeom>
+          <a:noFill/>
+          <a:ln/>
+        </p:spPr>
+        <p:txBody>
+          <a:bodyPr wrap="square" lIns="0" tIns="0" rIns="0" bIns="0" rtlCol="0" anchor="t"/>
+          <a:lstStyle/>
+          <a:p>
+            <a:pPr indent="0" marL="0">
+              <a:buNone/>
+            </a:pPr>
+            <a:r>
+              <a:rPr lang="en-US" sz="1300" b="1" dirty="0">
+                <a:solidFill>
+                  <a:srgbClr val="14202B"/>
+                </a:solidFill>
+                <a:latin typeface="Calibri" pitchFamily="34" charset="0"/>
+                <a:ea typeface="Calibri" pitchFamily="34" charset="-122"/>
+                <a:cs typeface="Calibri" pitchFamily="34" charset="-120"/>
+              </a:rPr>
+              <a:t>Arduino Mega 2560</a:t>
+            </a:r>
+            <a:endParaRPr lang="en-US" sz="1300" dirty="0"/>
+          </a:p>
+        </p:txBody>
+      </p:sp>
+      <p:sp>
+        <p:nvSpPr>
+          <p:cNvPr id="29" name="Text 26"/>
+          <p:cNvSpPr txBox="1"/>
+          <p:nvPr/>
+        </p:nvSpPr>
+        <p:spPr>
+          <a:xfrm>
+            <a:off x="7856359" y="2697480"/>
+            <a:ext cx="3521521" cy="182880"/>
+          </a:xfrm>
+          <a:prstGeom prst="rect">
+            <a:avLst/>
+          </a:prstGeom>
+          <a:noFill/>
+          <a:ln/>
+        </p:spPr>
+        <p:txBody>
+          <a:bodyPr wrap="square" lIns="0" tIns="0" rIns="0" bIns="0" rtlCol="0" anchor="t"/>
+          <a:lstStyle/>
+          <a:p>
+            <a:pPr indent="0" marL="0">
+              <a:buNone/>
+            </a:pPr>
+            <a:r>
+              <a:rPr lang="en-US" sz="1100" dirty="0">
+                <a:solidFill>
+                  <a:srgbClr val="4A5A68"/>
+                </a:solidFill>
+                <a:latin typeface="Calibri" pitchFamily="34" charset="0"/>
+                <a:ea typeface="Calibri" pitchFamily="34" charset="-122"/>
+                <a:cs typeface="Calibri" pitchFamily="34" charset="-120"/>
+              </a:rPr>
+              <a:t>Runs the firmware, one frame every 2 s</a:t>
+            </a:r>
+            <a:endParaRPr lang="en-US" sz="1100" dirty="0"/>
+          </a:p>
+        </p:txBody>
+      </p:sp>
+      <p:sp>
+        <p:nvSpPr>
+          <p:cNvPr id="30" name="Shape 27"/>
+          <p:cNvSpPr/>
+          <p:nvPr/>
+        </p:nvSpPr>
+        <p:spPr>
+          <a:xfrm>
+            <a:off x="7472311" y="2935224"/>
+            <a:ext cx="274320" cy="274320"/>
+          </a:xfrm>
+          <a:prstGeom prst="ellipse">
+            <a:avLst/>
+          </a:prstGeom>
+          <a:solidFill>
+            <a:srgbClr val="0F766E"/>
+          </a:solidFill>
+          <a:ln w="19050">
+            <a:solidFill>
+              <a:srgbClr val="0F766E"/>
+            </a:solidFill>
+            <a:prstDash val="solid"/>
+          </a:ln>
+        </p:spPr>
+      </p:sp>
+      <p:sp>
+        <p:nvSpPr>
+          <p:cNvPr id="31" name="Text 28"/>
+          <p:cNvSpPr txBox="1"/>
+          <p:nvPr/>
+        </p:nvSpPr>
+        <p:spPr>
+          <a:xfrm>
+            <a:off x="7472311" y="2935224"/>
+            <a:ext cx="274320" cy="274320"/>
+          </a:xfrm>
+          <a:prstGeom prst="rect">
+            <a:avLst/>
+          </a:prstGeom>
+          <a:noFill/>
+          <a:ln/>
+        </p:spPr>
+        <p:txBody>
+          <a:bodyPr wrap="square" lIns="0" tIns="0" rIns="0" bIns="0" rtlCol="0" anchor="ctr"/>
+          <a:lstStyle/>
+          <a:p>
+            <a:pPr algn="ctr" indent="0" marL="0">
+              <a:buNone/>
+            </a:pPr>
+            <a:r>
+              <a:rPr lang="en-US" sz="1200" b="1" dirty="0">
+                <a:solidFill>
+                  <a:srgbClr val="FFFFFF"/>
+                </a:solidFill>
+                <a:latin typeface="Calibri" pitchFamily="34" charset="0"/>
+                <a:ea typeface="Calibri" pitchFamily="34" charset="-122"/>
+                <a:cs typeface="Calibri" pitchFamily="34" charset="-120"/>
+              </a:rPr>
+              <a:t>2</a:t>
+            </a:r>
+            <a:endParaRPr lang="en-US" sz="1200" dirty="0"/>
+          </a:p>
+        </p:txBody>
+      </p:sp>
+      <p:sp>
+        <p:nvSpPr>
+          <p:cNvPr id="32" name="Text 29"/>
+          <p:cNvSpPr txBox="1"/>
+          <p:nvPr/>
+        </p:nvSpPr>
+        <p:spPr>
+          <a:xfrm>
+            <a:off x="7856359" y="2898648"/>
+            <a:ext cx="3521521" cy="192024"/>
+          </a:xfrm>
+          <a:prstGeom prst="rect">
+            <a:avLst/>
+          </a:prstGeom>
+          <a:noFill/>
+          <a:ln/>
+        </p:spPr>
+        <p:txBody>
+          <a:bodyPr wrap="square" lIns="0" tIns="0" rIns="0" bIns="0" rtlCol="0" anchor="t"/>
+          <a:lstStyle/>
+          <a:p>
+            <a:pPr indent="0" marL="0">
+              <a:buNone/>
+            </a:pPr>
+            <a:r>
+              <a:rPr lang="en-US" sz="1300" b="1" dirty="0">
+                <a:solidFill>
+                  <a:srgbClr val="14202B"/>
+                </a:solidFill>
+                <a:latin typeface="Calibri" pitchFamily="34" charset="0"/>
+                <a:ea typeface="Calibri" pitchFamily="34" charset="-122"/>
+                <a:cs typeface="Calibri" pitchFamily="34" charset="-120"/>
+              </a:rPr>
+              <a:t>16×2 LCD</a:t>
+            </a:r>
+            <a:endParaRPr lang="en-US" sz="1300" dirty="0"/>
+          </a:p>
+        </p:txBody>
+      </p:sp>
+      <p:sp>
+        <p:nvSpPr>
+          <p:cNvPr id="33" name="Text 30"/>
+          <p:cNvSpPr txBox="1"/>
+          <p:nvPr/>
+        </p:nvSpPr>
+        <p:spPr>
+          <a:xfrm>
+            <a:off x="7856359" y="3081528"/>
+            <a:ext cx="3521521" cy="182880"/>
+          </a:xfrm>
+          <a:prstGeom prst="rect">
+            <a:avLst/>
+          </a:prstGeom>
+          <a:noFill/>
+          <a:ln/>
+        </p:spPr>
+        <p:txBody>
+          <a:bodyPr wrap="square" lIns="0" tIns="0" rIns="0" bIns="0" rtlCol="0" anchor="t"/>
+          <a:lstStyle/>
+          <a:p>
+            <a:pPr indent="0" marL="0">
+              <a:buNone/>
+            </a:pPr>
+            <a:r>
+              <a:rPr lang="en-US" sz="1100" dirty="0">
+                <a:solidFill>
+                  <a:srgbClr val="4A5A68"/>
+                </a:solidFill>
+                <a:latin typeface="Calibri" pitchFamily="34" charset="0"/>
+                <a:ea typeface="Calibri" pitchFamily="34" charset="-122"/>
+                <a:cs typeface="Calibri" pitchFamily="34" charset="-120"/>
+              </a:rPr>
+              <a:t>The verdict, on the coach wall</a:t>
+            </a:r>
+            <a:endParaRPr lang="en-US" sz="1100" dirty="0"/>
+          </a:p>
+        </p:txBody>
+      </p:sp>
+      <p:sp>
+        <p:nvSpPr>
+          <p:cNvPr id="34" name="Shape 31"/>
+          <p:cNvSpPr/>
+          <p:nvPr/>
+        </p:nvSpPr>
+        <p:spPr>
+          <a:xfrm>
+            <a:off x="7472311" y="3319272"/>
+            <a:ext cx="274320" cy="274320"/>
+          </a:xfrm>
+          <a:prstGeom prst="ellipse">
+            <a:avLst/>
+          </a:prstGeom>
+          <a:solidFill>
+            <a:srgbClr val="0F766E"/>
+          </a:solidFill>
+          <a:ln w="19050">
+            <a:solidFill>
+              <a:srgbClr val="0F766E"/>
+            </a:solidFill>
+            <a:prstDash val="solid"/>
+          </a:ln>
+        </p:spPr>
+      </p:sp>
+      <p:sp>
+        <p:nvSpPr>
+          <p:cNvPr id="35" name="Text 32"/>
+          <p:cNvSpPr txBox="1"/>
+          <p:nvPr/>
+        </p:nvSpPr>
+        <p:spPr>
+          <a:xfrm>
+            <a:off x="7472311" y="3319272"/>
+            <a:ext cx="274320" cy="274320"/>
+          </a:xfrm>
+          <a:prstGeom prst="rect">
+            <a:avLst/>
+          </a:prstGeom>
+          <a:noFill/>
+          <a:ln/>
+        </p:spPr>
+        <p:txBody>
+          <a:bodyPr wrap="square" lIns="0" tIns="0" rIns="0" bIns="0" rtlCol="0" anchor="ctr"/>
+          <a:lstStyle/>
+          <a:p>
+            <a:pPr algn="ctr" indent="0" marL="0">
+              <a:buNone/>
+            </a:pPr>
+            <a:r>
+              <a:rPr lang="en-US" sz="1200" b="1" dirty="0">
+                <a:solidFill>
+                  <a:srgbClr val="FFFFFF"/>
+                </a:solidFill>
+                <a:latin typeface="Calibri" pitchFamily="34" charset="0"/>
+                <a:ea typeface="Calibri" pitchFamily="34" charset="-122"/>
+                <a:cs typeface="Calibri" pitchFamily="34" charset="-120"/>
+              </a:rPr>
+              <a:t>3</a:t>
+            </a:r>
+            <a:endParaRPr lang="en-US" sz="1200" dirty="0"/>
+          </a:p>
+        </p:txBody>
+      </p:sp>
+      <p:sp>
+        <p:nvSpPr>
+          <p:cNvPr id="36" name="Text 33"/>
+          <p:cNvSpPr txBox="1"/>
+          <p:nvPr/>
+        </p:nvSpPr>
+        <p:spPr>
+          <a:xfrm>
+            <a:off x="7856359" y="3282696"/>
+            <a:ext cx="3521521" cy="192024"/>
+          </a:xfrm>
+          <a:prstGeom prst="rect">
+            <a:avLst/>
+          </a:prstGeom>
+          <a:noFill/>
+          <a:ln/>
+        </p:spPr>
+        <p:txBody>
+          <a:bodyPr wrap="square" lIns="0" tIns="0" rIns="0" bIns="0" rtlCol="0" anchor="t"/>
+          <a:lstStyle/>
+          <a:p>
+            <a:pPr indent="0" marL="0">
+              <a:buNone/>
+            </a:pPr>
+            <a:r>
+              <a:rPr lang="en-US" sz="1300" b="1" dirty="0">
+                <a:solidFill>
+                  <a:srgbClr val="14202B"/>
+                </a:solidFill>
+                <a:latin typeface="Calibri" pitchFamily="34" charset="0"/>
+                <a:ea typeface="Calibri" pitchFamily="34" charset="-122"/>
+                <a:cs typeface="Calibri" pitchFamily="34" charset="-120"/>
+              </a:rPr>
+              <a:t>DHT11</a:t>
+            </a:r>
+            <a:endParaRPr lang="en-US" sz="1300" dirty="0"/>
+          </a:p>
+        </p:txBody>
+      </p:sp>
+      <p:sp>
+        <p:nvSpPr>
+          <p:cNvPr id="37" name="Text 34"/>
+          <p:cNvSpPr txBox="1"/>
+          <p:nvPr/>
+        </p:nvSpPr>
+        <p:spPr>
+          <a:xfrm>
+            <a:off x="7856359" y="3465576"/>
+            <a:ext cx="3521521" cy="182880"/>
+          </a:xfrm>
+          <a:prstGeom prst="rect">
+            <a:avLst/>
+          </a:prstGeom>
+          <a:noFill/>
+          <a:ln/>
+        </p:spPr>
+        <p:txBody>
+          <a:bodyPr wrap="square" lIns="0" tIns="0" rIns="0" bIns="0" rtlCol="0" anchor="t"/>
+          <a:lstStyle/>
+          <a:p>
+            <a:pPr indent="0" marL="0">
+              <a:buNone/>
+            </a:pPr>
+            <a:r>
+              <a:rPr lang="en-US" sz="1100" dirty="0">
+                <a:solidFill>
+                  <a:srgbClr val="4A5A68"/>
+                </a:solidFill>
+                <a:latin typeface="Calibri" pitchFamily="34" charset="0"/>
+                <a:ea typeface="Calibri" pitchFamily="34" charset="-122"/>
+                <a:cs typeface="Calibri" pitchFamily="34" charset="-120"/>
+              </a:rPr>
+              <a:t>Temperature, humidity → head X</a:t>
+            </a:r>
+            <a:endParaRPr lang="en-US" sz="1100" dirty="0"/>
+          </a:p>
+        </p:txBody>
+      </p:sp>
+      <p:sp>
+        <p:nvSpPr>
+          <p:cNvPr id="38" name="Shape 35"/>
+          <p:cNvSpPr/>
+          <p:nvPr/>
+        </p:nvSpPr>
+        <p:spPr>
+          <a:xfrm>
+            <a:off x="7472311" y="3703320"/>
+            <a:ext cx="274320" cy="274320"/>
+          </a:xfrm>
+          <a:prstGeom prst="ellipse">
+            <a:avLst/>
+          </a:prstGeom>
+          <a:solidFill>
+            <a:srgbClr val="0F766E"/>
+          </a:solidFill>
+          <a:ln w="19050">
+            <a:solidFill>
+              <a:srgbClr val="0F766E"/>
+            </a:solidFill>
+            <a:prstDash val="solid"/>
+          </a:ln>
+        </p:spPr>
+      </p:sp>
+      <p:sp>
+        <p:nvSpPr>
+          <p:cNvPr id="39" name="Text 36"/>
+          <p:cNvSpPr txBox="1"/>
+          <p:nvPr/>
+        </p:nvSpPr>
+        <p:spPr>
+          <a:xfrm>
+            <a:off x="7472311" y="3703320"/>
+            <a:ext cx="274320" cy="274320"/>
+          </a:xfrm>
+          <a:prstGeom prst="rect">
+            <a:avLst/>
+          </a:prstGeom>
+          <a:noFill/>
+          <a:ln/>
+        </p:spPr>
+        <p:txBody>
+          <a:bodyPr wrap="square" lIns="0" tIns="0" rIns="0" bIns="0" rtlCol="0" anchor="ctr"/>
+          <a:lstStyle/>
+          <a:p>
+            <a:pPr algn="ctr" indent="0" marL="0">
+              <a:buNone/>
+            </a:pPr>
+            <a:r>
+              <a:rPr lang="en-US" sz="1200" b="1" dirty="0">
+                <a:solidFill>
+                  <a:srgbClr val="FFFFFF"/>
+                </a:solidFill>
+                <a:latin typeface="Calibri" pitchFamily="34" charset="0"/>
+                <a:ea typeface="Calibri" pitchFamily="34" charset="-122"/>
+                <a:cs typeface="Calibri" pitchFamily="34" charset="-120"/>
+              </a:rPr>
+              <a:t>4</a:t>
+            </a:r>
+            <a:endParaRPr lang="en-US" sz="1200" dirty="0"/>
+          </a:p>
+        </p:txBody>
+      </p:sp>
+      <p:sp>
+        <p:nvSpPr>
+          <p:cNvPr id="40" name="Text 37"/>
+          <p:cNvSpPr txBox="1"/>
+          <p:nvPr/>
+        </p:nvSpPr>
+        <p:spPr>
+          <a:xfrm>
+            <a:off x="7856359" y="3666744"/>
+            <a:ext cx="3521521" cy="192024"/>
+          </a:xfrm>
+          <a:prstGeom prst="rect">
+            <a:avLst/>
+          </a:prstGeom>
+          <a:noFill/>
+          <a:ln/>
+        </p:spPr>
+        <p:txBody>
+          <a:bodyPr wrap="square" lIns="0" tIns="0" rIns="0" bIns="0" rtlCol="0" anchor="t"/>
+          <a:lstStyle/>
+          <a:p>
+            <a:pPr indent="0" marL="0">
+              <a:buNone/>
+            </a:pPr>
+            <a:r>
+              <a:rPr lang="en-US" sz="1300" b="1" dirty="0">
+                <a:solidFill>
+                  <a:srgbClr val="14202B"/>
+                </a:solidFill>
+                <a:latin typeface="Calibri" pitchFamily="34" charset="0"/>
+                <a:ea typeface="Calibri" pitchFamily="34" charset="-122"/>
+                <a:cs typeface="Calibri" pitchFamily="34" charset="-120"/>
+              </a:rPr>
+              <a:t>MQ-2 · MQ-135</a:t>
+            </a:r>
+            <a:endParaRPr lang="en-US" sz="1300" dirty="0"/>
+          </a:p>
+        </p:txBody>
+      </p:sp>
+      <p:sp>
+        <p:nvSpPr>
+          <p:cNvPr id="41" name="Text 38"/>
+          <p:cNvSpPr txBox="1"/>
+          <p:nvPr/>
+        </p:nvSpPr>
+        <p:spPr>
+          <a:xfrm>
+            <a:off x="7856359" y="3849624"/>
+            <a:ext cx="3521521" cy="182880"/>
+          </a:xfrm>
+          <a:prstGeom prst="rect">
+            <a:avLst/>
+          </a:prstGeom>
+          <a:noFill/>
+          <a:ln/>
+        </p:spPr>
+        <p:txBody>
+          <a:bodyPr wrap="square" lIns="0" tIns="0" rIns="0" bIns="0" rtlCol="0" anchor="t"/>
+          <a:lstStyle/>
+          <a:p>
+            <a:pPr indent="0" marL="0">
+              <a:buNone/>
+            </a:pPr>
+            <a:r>
+              <a:rPr lang="en-US" sz="1100" dirty="0">
+                <a:solidFill>
+                  <a:srgbClr val="4A5A68"/>
+                </a:solidFill>
+                <a:latin typeface="Calibri" pitchFamily="34" charset="0"/>
+                <a:ea typeface="Calibri" pitchFamily="34" charset="-122"/>
+                <a:cs typeface="Calibri" pitchFamily="34" charset="-120"/>
+              </a:rPr>
+              <a:t>Gas and smoke → Y · CO₂ → Z</a:t>
+            </a:r>
+            <a:endParaRPr lang="en-US" sz="1100" dirty="0"/>
+          </a:p>
+        </p:txBody>
+      </p:sp>
+      <p:sp>
+        <p:nvSpPr>
+          <p:cNvPr id="42" name="Shape 39"/>
+          <p:cNvSpPr/>
+          <p:nvPr/>
+        </p:nvSpPr>
+        <p:spPr>
+          <a:xfrm>
+            <a:off x="7472311" y="4087368"/>
+            <a:ext cx="274320" cy="274320"/>
+          </a:xfrm>
+          <a:prstGeom prst="ellipse">
+            <a:avLst/>
+          </a:prstGeom>
+          <a:solidFill>
+            <a:srgbClr val="0F766E"/>
+          </a:solidFill>
+          <a:ln w="19050">
+            <a:solidFill>
+              <a:srgbClr val="0F766E"/>
+            </a:solidFill>
+            <a:prstDash val="solid"/>
+          </a:ln>
+        </p:spPr>
+      </p:sp>
+      <p:sp>
+        <p:nvSpPr>
+          <p:cNvPr id="43" name="Text 40"/>
+          <p:cNvSpPr txBox="1"/>
+          <p:nvPr/>
+        </p:nvSpPr>
+        <p:spPr>
+          <a:xfrm>
+            <a:off x="7472311" y="4087368"/>
+            <a:ext cx="274320" cy="274320"/>
+          </a:xfrm>
+          <a:prstGeom prst="rect">
+            <a:avLst/>
+          </a:prstGeom>
+          <a:noFill/>
+          <a:ln/>
+        </p:spPr>
+        <p:txBody>
+          <a:bodyPr wrap="square" lIns="0" tIns="0" rIns="0" bIns="0" rtlCol="0" anchor="ctr"/>
+          <a:lstStyle/>
+          <a:p>
+            <a:pPr algn="ctr" indent="0" marL="0">
+              <a:buNone/>
+            </a:pPr>
+            <a:r>
+              <a:rPr lang="en-US" sz="1200" b="1" dirty="0">
+                <a:solidFill>
+                  <a:srgbClr val="FFFFFF"/>
+                </a:solidFill>
+                <a:latin typeface="Calibri" pitchFamily="34" charset="0"/>
+                <a:ea typeface="Calibri" pitchFamily="34" charset="-122"/>
+                <a:cs typeface="Calibri" pitchFamily="34" charset="-120"/>
+              </a:rPr>
+              <a:t>5</a:t>
+            </a:r>
+            <a:endParaRPr lang="en-US" sz="1200" dirty="0"/>
+          </a:p>
+        </p:txBody>
+      </p:sp>
+      <p:sp>
+        <p:nvSpPr>
+          <p:cNvPr id="44" name="Text 41"/>
+          <p:cNvSpPr txBox="1"/>
+          <p:nvPr/>
+        </p:nvSpPr>
+        <p:spPr>
+          <a:xfrm>
+            <a:off x="7856359" y="4050792"/>
+            <a:ext cx="3521521" cy="192024"/>
+          </a:xfrm>
+          <a:prstGeom prst="rect">
+            <a:avLst/>
+          </a:prstGeom>
+          <a:noFill/>
+          <a:ln/>
+        </p:spPr>
+        <p:txBody>
+          <a:bodyPr wrap="square" lIns="0" tIns="0" rIns="0" bIns="0" rtlCol="0" anchor="t"/>
+          <a:lstStyle/>
+          <a:p>
+            <a:pPr indent="0" marL="0">
+              <a:buNone/>
+            </a:pPr>
+            <a:r>
+              <a:rPr lang="en-US" sz="1300" b="1" dirty="0">
+                <a:solidFill>
+                  <a:srgbClr val="14202B"/>
+                </a:solidFill>
+                <a:latin typeface="Calibri" pitchFamily="34" charset="0"/>
+                <a:ea typeface="Calibri" pitchFamily="34" charset="-122"/>
+                <a:cs typeface="Calibri" pitchFamily="34" charset="-120"/>
+              </a:rPr>
+              <a:t>PMS7003</a:t>
+            </a:r>
+            <a:endParaRPr lang="en-US" sz="1300" dirty="0"/>
+          </a:p>
+        </p:txBody>
+      </p:sp>
+      <p:sp>
+        <p:nvSpPr>
+          <p:cNvPr id="45" name="Text 42"/>
+          <p:cNvSpPr txBox="1"/>
+          <p:nvPr/>
+        </p:nvSpPr>
+        <p:spPr>
+          <a:xfrm>
+            <a:off x="7856359" y="4233672"/>
+            <a:ext cx="3521521" cy="182880"/>
+          </a:xfrm>
+          <a:prstGeom prst="rect">
+            <a:avLst/>
+          </a:prstGeom>
+          <a:noFill/>
+          <a:ln/>
+        </p:spPr>
+        <p:txBody>
+          <a:bodyPr wrap="square" lIns="0" tIns="0" rIns="0" bIns="0" rtlCol="0" anchor="t"/>
+          <a:lstStyle/>
+          <a:p>
+            <a:pPr indent="0" marL="0">
+              <a:buNone/>
+            </a:pPr>
+            <a:r>
+              <a:rPr lang="en-US" sz="1100" dirty="0">
+                <a:solidFill>
+                  <a:srgbClr val="4A5A68"/>
+                </a:solidFill>
+                <a:latin typeface="Calibri" pitchFamily="34" charset="0"/>
+                <a:ea typeface="Calibri" pitchFamily="34" charset="-122"/>
+                <a:cs typeface="Calibri" pitchFamily="34" charset="-120"/>
+              </a:rPr>
+              <a:t>PM1.0, PM2.5, PM10 → head W</a:t>
+            </a:r>
+            <a:endParaRPr lang="en-US" sz="1100" dirty="0"/>
+          </a:p>
+        </p:txBody>
+      </p:sp>
+      <p:sp>
+        <p:nvSpPr>
+          <p:cNvPr id="46" name="Shape 43"/>
+          <p:cNvSpPr/>
+          <p:nvPr/>
+        </p:nvSpPr>
+        <p:spPr>
+          <a:xfrm>
+            <a:off x="7472311" y="4471416"/>
+            <a:ext cx="274320" cy="274320"/>
+          </a:xfrm>
+          <a:prstGeom prst="ellipse">
+            <a:avLst/>
+          </a:prstGeom>
+          <a:solidFill>
+            <a:srgbClr val="0F766E"/>
+          </a:solidFill>
+          <a:ln w="19050">
+            <a:solidFill>
+              <a:srgbClr val="0F766E"/>
+            </a:solidFill>
+            <a:prstDash val="solid"/>
+          </a:ln>
+        </p:spPr>
+      </p:sp>
+      <p:sp>
+        <p:nvSpPr>
+          <p:cNvPr id="47" name="Text 44"/>
+          <p:cNvSpPr txBox="1"/>
+          <p:nvPr/>
+        </p:nvSpPr>
+        <p:spPr>
+          <a:xfrm>
+            <a:off x="7472311" y="4471416"/>
+            <a:ext cx="274320" cy="274320"/>
+          </a:xfrm>
+          <a:prstGeom prst="rect">
+            <a:avLst/>
+          </a:prstGeom>
+          <a:noFill/>
+          <a:ln/>
+        </p:spPr>
+        <p:txBody>
+          <a:bodyPr wrap="square" lIns="0" tIns="0" rIns="0" bIns="0" rtlCol="0" anchor="ctr"/>
+          <a:lstStyle/>
+          <a:p>
+            <a:pPr algn="ctr" indent="0" marL="0">
+              <a:buNone/>
+            </a:pPr>
+            <a:r>
+              <a:rPr lang="en-US" sz="1200" b="1" dirty="0">
+                <a:solidFill>
+                  <a:srgbClr val="FFFFFF"/>
+                </a:solidFill>
+                <a:latin typeface="Calibri" pitchFamily="34" charset="0"/>
+                <a:ea typeface="Calibri" pitchFamily="34" charset="-122"/>
+                <a:cs typeface="Calibri" pitchFamily="34" charset="-120"/>
+              </a:rPr>
+              <a:t>6</a:t>
+            </a:r>
+            <a:endParaRPr lang="en-US" sz="1200" dirty="0"/>
+          </a:p>
+        </p:txBody>
+      </p:sp>
+      <p:sp>
+        <p:nvSpPr>
+          <p:cNvPr id="48" name="Text 45"/>
+          <p:cNvSpPr txBox="1"/>
+          <p:nvPr/>
+        </p:nvSpPr>
+        <p:spPr>
+          <a:xfrm>
+            <a:off x="7856359" y="4434840"/>
+            <a:ext cx="3521521" cy="192024"/>
+          </a:xfrm>
+          <a:prstGeom prst="rect">
+            <a:avLst/>
+          </a:prstGeom>
+          <a:noFill/>
+          <a:ln/>
+        </p:spPr>
+        <p:txBody>
+          <a:bodyPr wrap="square" lIns="0" tIns="0" rIns="0" bIns="0" rtlCol="0" anchor="t"/>
+          <a:lstStyle/>
+          <a:p>
+            <a:pPr indent="0" marL="0">
+              <a:buNone/>
+            </a:pPr>
+            <a:r>
+              <a:rPr lang="en-US" sz="1300" b="1" dirty="0">
+                <a:solidFill>
+                  <a:srgbClr val="14202B"/>
+                </a:solidFill>
+                <a:latin typeface="Calibri" pitchFamily="34" charset="0"/>
+                <a:ea typeface="Calibri" pitchFamily="34" charset="-122"/>
+                <a:cs typeface="Calibri" pitchFamily="34" charset="-120"/>
+              </a:rPr>
+              <a:t>Relay board</a:t>
+            </a:r>
+            <a:endParaRPr lang="en-US" sz="1300" dirty="0"/>
+          </a:p>
+        </p:txBody>
+      </p:sp>
+      <p:sp>
+        <p:nvSpPr>
+          <p:cNvPr id="49" name="Text 46"/>
+          <p:cNvSpPr txBox="1"/>
+          <p:nvPr/>
+        </p:nvSpPr>
+        <p:spPr>
+          <a:xfrm>
+            <a:off x="7856359" y="4617720"/>
+            <a:ext cx="3521521" cy="182880"/>
+          </a:xfrm>
+          <a:prstGeom prst="rect">
+            <a:avLst/>
+          </a:prstGeom>
+          <a:noFill/>
+          <a:ln/>
+        </p:spPr>
+        <p:txBody>
+          <a:bodyPr wrap="square" lIns="0" tIns="0" rIns="0" bIns="0" rtlCol="0" anchor="t"/>
+          <a:lstStyle/>
+          <a:p>
+            <a:pPr indent="0" marL="0">
+              <a:buNone/>
+            </a:pPr>
+            <a:r>
+              <a:rPr lang="en-US" sz="1100" dirty="0">
+                <a:solidFill>
+                  <a:srgbClr val="4A5A68"/>
+                </a:solidFill>
+                <a:latin typeface="Calibri" pitchFamily="34" charset="0"/>
+                <a:ea typeface="Calibri" pitchFamily="34" charset="-122"/>
+                <a:cs typeface="Calibri" pitchFamily="34" charset="-120"/>
+              </a:rPr>
+              <a:t>Active-low, behind the interlock</a:t>
+            </a:r>
+            <a:endParaRPr lang="en-US" sz="1100" dirty="0"/>
+          </a:p>
+        </p:txBody>
+      </p:sp>
+      <p:sp>
+        <p:nvSpPr>
+          <p:cNvPr id="50" name="Shape 47"/>
+          <p:cNvSpPr/>
+          <p:nvPr/>
+        </p:nvSpPr>
+        <p:spPr>
+          <a:xfrm>
+            <a:off x="7472311" y="4855464"/>
+            <a:ext cx="274320" cy="274320"/>
+          </a:xfrm>
+          <a:prstGeom prst="ellipse">
+            <a:avLst/>
+          </a:prstGeom>
+          <a:solidFill>
+            <a:srgbClr val="0F766E"/>
+          </a:solidFill>
+          <a:ln w="19050">
+            <a:solidFill>
+              <a:srgbClr val="0F766E"/>
+            </a:solidFill>
+            <a:prstDash val="solid"/>
+          </a:ln>
+        </p:spPr>
+      </p:sp>
+      <p:sp>
+        <p:nvSpPr>
+          <p:cNvPr id="51" name="Text 48"/>
+          <p:cNvSpPr txBox="1"/>
+          <p:nvPr/>
+        </p:nvSpPr>
+        <p:spPr>
+          <a:xfrm>
+            <a:off x="7472311" y="4855464"/>
+            <a:ext cx="274320" cy="274320"/>
+          </a:xfrm>
+          <a:prstGeom prst="rect">
+            <a:avLst/>
+          </a:prstGeom>
+          <a:noFill/>
+          <a:ln/>
+        </p:spPr>
+        <p:txBody>
+          <a:bodyPr wrap="square" lIns="0" tIns="0" rIns="0" bIns="0" rtlCol="0" anchor="ctr"/>
+          <a:lstStyle/>
+          <a:p>
+            <a:pPr algn="ctr" indent="0" marL="0">
+              <a:buNone/>
+            </a:pPr>
+            <a:r>
+              <a:rPr lang="en-US" sz="1200" b="1" dirty="0">
+                <a:solidFill>
+                  <a:srgbClr val="FFFFFF"/>
+                </a:solidFill>
+                <a:latin typeface="Calibri" pitchFamily="34" charset="0"/>
+                <a:ea typeface="Calibri" pitchFamily="34" charset="-122"/>
+                <a:cs typeface="Calibri" pitchFamily="34" charset="-120"/>
+              </a:rPr>
+              <a:t>7</a:t>
+            </a:r>
+            <a:endParaRPr lang="en-US" sz="1200" dirty="0"/>
+          </a:p>
+        </p:txBody>
+      </p:sp>
+      <p:sp>
+        <p:nvSpPr>
+          <p:cNvPr id="52" name="Text 49"/>
+          <p:cNvSpPr txBox="1"/>
+          <p:nvPr/>
+        </p:nvSpPr>
+        <p:spPr>
+          <a:xfrm>
+            <a:off x="7856359" y="4818888"/>
+            <a:ext cx="3521521" cy="192024"/>
+          </a:xfrm>
+          <a:prstGeom prst="rect">
+            <a:avLst/>
+          </a:prstGeom>
+          <a:noFill/>
+          <a:ln/>
+        </p:spPr>
+        <p:txBody>
+          <a:bodyPr wrap="square" lIns="0" tIns="0" rIns="0" bIns="0" rtlCol="0" anchor="t"/>
+          <a:lstStyle/>
+          <a:p>
+            <a:pPr indent="0" marL="0">
+              <a:buNone/>
+            </a:pPr>
+            <a:r>
+              <a:rPr lang="en-US" sz="1300" b="1" dirty="0">
+                <a:solidFill>
+                  <a:srgbClr val="14202B"/>
+                </a:solidFill>
+                <a:latin typeface="Calibri" pitchFamily="34" charset="0"/>
+                <a:ea typeface="Calibri" pitchFamily="34" charset="-122"/>
+                <a:cs typeface="Calibri" pitchFamily="34" charset="-120"/>
+              </a:rPr>
+              <a:t>Exhaust fan</a:t>
+            </a:r>
+            <a:endParaRPr lang="en-US" sz="1300" dirty="0"/>
+          </a:p>
+        </p:txBody>
+      </p:sp>
+      <p:sp>
+        <p:nvSpPr>
+          <p:cNvPr id="53" name="Text 50"/>
+          <p:cNvSpPr txBox="1"/>
+          <p:nvPr/>
+        </p:nvSpPr>
+        <p:spPr>
+          <a:xfrm>
+            <a:off x="7856359" y="5001768"/>
+            <a:ext cx="3521521" cy="182880"/>
+          </a:xfrm>
+          <a:prstGeom prst="rect">
+            <a:avLst/>
+          </a:prstGeom>
+          <a:noFill/>
+          <a:ln/>
+        </p:spPr>
+        <p:txBody>
+          <a:bodyPr wrap="square" lIns="0" tIns="0" rIns="0" bIns="0" rtlCol="0" anchor="t"/>
+          <a:lstStyle/>
+          <a:p>
+            <a:pPr indent="0" marL="0">
+              <a:buNone/>
+            </a:pPr>
+            <a:r>
+              <a:rPr lang="en-US" sz="1100" dirty="0">
+                <a:solidFill>
+                  <a:srgbClr val="4A5A68"/>
+                </a:solidFill>
+                <a:latin typeface="Calibri" pitchFamily="34" charset="0"/>
+                <a:ea typeface="Calibri" pitchFamily="34" charset="-122"/>
+                <a:cs typeface="Calibri" pitchFamily="34" charset="-120"/>
+              </a:rPr>
+              <a:t>Ventilation, switched by head X</a:t>
+            </a:r>
+            <a:endParaRPr lang="en-US" sz="1100" dirty="0"/>
+          </a:p>
+        </p:txBody>
+      </p:sp>
+      <p:sp>
+        <p:nvSpPr>
+          <p:cNvPr id="54" name="Shape 51"/>
+          <p:cNvSpPr/>
+          <p:nvPr/>
+        </p:nvSpPr>
+        <p:spPr>
+          <a:xfrm>
+            <a:off x="7472311" y="5239512"/>
+            <a:ext cx="274320" cy="274320"/>
+          </a:xfrm>
+          <a:prstGeom prst="ellipse">
+            <a:avLst/>
+          </a:prstGeom>
+          <a:solidFill>
+            <a:srgbClr val="0F766E"/>
+          </a:solidFill>
+          <a:ln w="19050">
+            <a:solidFill>
+              <a:srgbClr val="0F766E"/>
+            </a:solidFill>
+            <a:prstDash val="solid"/>
+          </a:ln>
+        </p:spPr>
+      </p:sp>
+      <p:sp>
+        <p:nvSpPr>
+          <p:cNvPr id="55" name="Text 52"/>
+          <p:cNvSpPr txBox="1"/>
+          <p:nvPr/>
+        </p:nvSpPr>
+        <p:spPr>
+          <a:xfrm>
+            <a:off x="7472311" y="5239512"/>
+            <a:ext cx="274320" cy="274320"/>
+          </a:xfrm>
+          <a:prstGeom prst="rect">
+            <a:avLst/>
+          </a:prstGeom>
+          <a:noFill/>
+          <a:ln/>
+        </p:spPr>
+        <p:txBody>
+          <a:bodyPr wrap="square" lIns="0" tIns="0" rIns="0" bIns="0" rtlCol="0" anchor="ctr"/>
+          <a:lstStyle/>
+          <a:p>
+            <a:pPr algn="ctr" indent="0" marL="0">
+              <a:buNone/>
+            </a:pPr>
+            <a:r>
+              <a:rPr lang="en-US" sz="1200" b="1" dirty="0">
+                <a:solidFill>
+                  <a:srgbClr val="FFFFFF"/>
+                </a:solidFill>
+                <a:latin typeface="Calibri" pitchFamily="34" charset="0"/>
+                <a:ea typeface="Calibri" pitchFamily="34" charset="-122"/>
+                <a:cs typeface="Calibri" pitchFamily="34" charset="-120"/>
+              </a:rPr>
+              <a:t>8</a:t>
+            </a:r>
+            <a:endParaRPr lang="en-US" sz="1200" dirty="0"/>
+          </a:p>
+        </p:txBody>
+      </p:sp>
+      <p:sp>
+        <p:nvSpPr>
+          <p:cNvPr id="56" name="Text 53"/>
+          <p:cNvSpPr txBox="1"/>
+          <p:nvPr/>
+        </p:nvSpPr>
+        <p:spPr>
+          <a:xfrm>
+            <a:off x="7856359" y="5202936"/>
+            <a:ext cx="3521521" cy="192024"/>
+          </a:xfrm>
+          <a:prstGeom prst="rect">
+            <a:avLst/>
+          </a:prstGeom>
+          <a:noFill/>
+          <a:ln/>
+        </p:spPr>
+        <p:txBody>
+          <a:bodyPr wrap="square" lIns="0" tIns="0" rIns="0" bIns="0" rtlCol="0" anchor="t"/>
+          <a:lstStyle/>
+          <a:p>
+            <a:pPr indent="0" marL="0">
+              <a:buNone/>
+            </a:pPr>
+            <a:r>
+              <a:rPr lang="en-US" sz="1300" b="1" dirty="0">
+                <a:solidFill>
+                  <a:srgbClr val="14202B"/>
+                </a:solidFill>
+                <a:latin typeface="Calibri" pitchFamily="34" charset="0"/>
+                <a:ea typeface="Calibri" pitchFamily="34" charset="-122"/>
+                <a:cs typeface="Calibri" pitchFamily="34" charset="-120"/>
+              </a:rPr>
+              <a:t>Two ozone generators</a:t>
+            </a:r>
+            <a:endParaRPr lang="en-US" sz="1300" dirty="0"/>
+          </a:p>
+        </p:txBody>
+      </p:sp>
+      <p:sp>
+        <p:nvSpPr>
+          <p:cNvPr id="57" name="Text 54"/>
+          <p:cNvSpPr txBox="1"/>
+          <p:nvPr/>
+        </p:nvSpPr>
+        <p:spPr>
+          <a:xfrm>
+            <a:off x="7856359" y="5385816"/>
+            <a:ext cx="3521521" cy="182880"/>
+          </a:xfrm>
+          <a:prstGeom prst="rect">
+            <a:avLst/>
+          </a:prstGeom>
+          <a:noFill/>
+          <a:ln/>
+        </p:spPr>
+        <p:txBody>
+          <a:bodyPr wrap="square" lIns="0" tIns="0" rIns="0" bIns="0" rtlCol="0" anchor="t"/>
+          <a:lstStyle/>
+          <a:p>
+            <a:pPr indent="0" marL="0">
+              <a:buNone/>
+            </a:pPr>
+            <a:r>
+              <a:rPr lang="en-US" sz="1100" dirty="0">
+                <a:solidFill>
+                  <a:srgbClr val="4A5A68"/>
+                </a:solidFill>
+                <a:latin typeface="Calibri" pitchFamily="34" charset="0"/>
+                <a:ea typeface="Calibri" pitchFamily="34" charset="-122"/>
+                <a:cs typeface="Calibri" pitchFamily="34" charset="-120"/>
+              </a:rPr>
+              <a:t>Purify only if the interlock allows</a:t>
+            </a:r>
+            <a:endParaRPr lang="en-US" sz="1100" dirty="0"/>
+          </a:p>
+        </p:txBody>
+      </p:sp>
+      <p:sp>
+        <p:nvSpPr>
+          <p:cNvPr id="58" name="Shape 55"/>
+          <p:cNvSpPr/>
+          <p:nvPr/>
+        </p:nvSpPr>
+        <p:spPr>
+          <a:xfrm>
+            <a:off x="7472311" y="5623560"/>
+            <a:ext cx="3905569" cy="457200"/>
           </a:xfrm>
           <a:prstGeom prst="roundRect">
             <a:avLst>
-              <a:gd name="adj" fmla="val 2976"/>
+              <a:gd name="adj" fmla="val 20000"/>
             </a:avLst>
           </a:prstGeom>
           <a:solidFill>
@@ -11656,258 +12717,68 @@
       </p:sp>
       <p:sp>
         <p:nvSpPr>
-          <p:cNvPr id="6" name="Text 3"/>
-          <p:cNvSpPr txBox="1"/>
-          <p:nvPr/>
-        </p:nvSpPr>
-        <p:spPr>
-          <a:xfrm>
-            <a:off x="8403336" y="2770632"/>
-            <a:ext cx="2700223" cy="274320"/>
-          </a:xfrm>
-          <a:prstGeom prst="rect">
-            <a:avLst/>
-          </a:prstGeom>
-          <a:noFill/>
-          <a:ln/>
-        </p:spPr>
-        <p:txBody>
-          <a:bodyPr wrap="square" lIns="0" tIns="0" rIns="0" bIns="0" rtlCol="0" anchor="t"/>
-          <a:lstStyle/>
-          <a:p>
-            <a:pPr indent="0" marL="0">
-              <a:buNone/>
-            </a:pPr>
-            <a:r>
-              <a:rPr lang="en-US" sz="1200" spc="300" kern="0" dirty="0">
-                <a:solidFill>
-                  <a:srgbClr val="9AABBA"/>
+          <p:cNvPr id="59" name="Text 56"/>
+          <p:cNvSpPr txBox="1"/>
+          <p:nvPr/>
+        </p:nvSpPr>
+        <p:spPr>
+          <a:xfrm>
+            <a:off x="7655191" y="5623560"/>
+            <a:ext cx="3539809" cy="457200"/>
+          </a:xfrm>
+          <a:prstGeom prst="rect">
+            <a:avLst/>
+          </a:prstGeom>
+          <a:noFill/>
+          <a:ln/>
+        </p:spPr>
+        <p:txBody>
+          <a:bodyPr wrap="square" lIns="0" tIns="0" rIns="0" bIns="0" rtlCol="0" anchor="ctr"/>
+          <a:lstStyle/>
+          <a:p>
+            <a:pPr indent="0" marL="0">
+              <a:buNone/>
+            </a:pPr>
+            <a:r>
+              <a:rPr lang="en-US" sz="1400" b="1" dirty="0">
+                <a:solidFill>
+                  <a:srgbClr val="5EEAD4"/>
                 </a:solidFill>
                 <a:latin typeface="Consolas" pitchFamily="34" charset="0"/>
                 <a:ea typeface="Consolas" pitchFamily="34" charset="-122"/>
                 <a:cs typeface="Consolas" pitchFamily="34" charset="-120"/>
               </a:rPr>
-              <a:t>COACH → CLOUD</a:t>
-            </a:r>
-            <a:endParaRPr lang="en-US" sz="1200" dirty="0"/>
-          </a:p>
-        </p:txBody>
-      </p:sp>
-      <p:sp>
-        <p:nvSpPr>
-          <p:cNvPr id="7" name="Text 4"/>
-          <p:cNvSpPr txBox="1"/>
-          <p:nvPr/>
-        </p:nvSpPr>
-        <p:spPr>
-          <a:xfrm>
-            <a:off x="8403336" y="3063240"/>
-            <a:ext cx="2700223" cy="411480"/>
-          </a:xfrm>
-          <a:prstGeom prst="rect">
-            <a:avLst/>
-          </a:prstGeom>
-          <a:noFill/>
-          <a:ln/>
-        </p:spPr>
-        <p:txBody>
-          <a:bodyPr wrap="square" lIns="0" tIns="0" rIns="0" bIns="0" rtlCol="0" anchor="t"/>
-          <a:lstStyle/>
-          <a:p>
-            <a:pPr indent="0" marL="0">
-              <a:buNone/>
-            </a:pPr>
-            <a:r>
-              <a:rPr lang="en-US" sz="2200" b="1" dirty="0">
-                <a:solidFill>
-                  <a:srgbClr val="5EEAD4"/>
+              <a:t>a26.60b1c1d3e</a:t>
+            </a:r>
+            <a:pPr indent="0" marL="0">
+              <a:buNone/>
+            </a:pPr>
+            <a:r>
+              <a:rPr lang="en-US" sz="1400" dirty="0">
+                <a:solidFill>
+                  <a:srgbClr val="9AABBA"/>
                 </a:solidFill>
                 <a:latin typeface="Consolas" pitchFamily="34" charset="0"/>
                 <a:ea typeface="Consolas" pitchFamily="34" charset="-122"/>
                 <a:cs typeface="Consolas" pitchFamily="34" charset="-120"/>
               </a:rPr>
-              <a:t>a26.60b1c1d3e</a:t>
-            </a:r>
-            <a:endParaRPr lang="en-US" sz="2200" dirty="0"/>
-          </a:p>
-        </p:txBody>
-      </p:sp>
-      <p:sp>
-        <p:nvSpPr>
-          <p:cNvPr id="8" name="Text 5"/>
-          <p:cNvSpPr txBox="1"/>
-          <p:nvPr/>
-        </p:nvSpPr>
-        <p:spPr>
-          <a:xfrm>
-            <a:off x="8403336" y="3502152"/>
-            <a:ext cx="2700223" cy="274320"/>
-          </a:xfrm>
-          <a:prstGeom prst="rect">
-            <a:avLst/>
-          </a:prstGeom>
-          <a:noFill/>
-          <a:ln/>
-        </p:spPr>
-        <p:txBody>
-          <a:bodyPr wrap="square" lIns="0" tIns="0" rIns="0" bIns="0" rtlCol="0" anchor="t"/>
-          <a:lstStyle/>
-          <a:p>
-            <a:pPr indent="0" marL="0">
-              <a:buNone/>
-            </a:pPr>
-            <a:r>
-              <a:rPr lang="en-US" sz="1200" dirty="0">
-                <a:solidFill>
-                  <a:srgbClr val="C7D3DD"/>
-                </a:solidFill>
-                <a:latin typeface="Calibri" pitchFamily="34" charset="0"/>
-                <a:ea typeface="Calibri" pitchFamily="34" charset="-122"/>
-                <a:cs typeface="Calibri" pitchFamily="34" charset="-120"/>
-              </a:rPr>
-              <a:t>a temp · b gas · c CO₂ · d PM</a:t>
-            </a:r>
-            <a:endParaRPr lang="en-US" sz="1200" dirty="0"/>
-          </a:p>
-        </p:txBody>
-      </p:sp>
-      <p:sp>
-        <p:nvSpPr>
-          <p:cNvPr id="9" name="Shape 6"/>
-          <p:cNvSpPr/>
-          <p:nvPr/>
-        </p:nvSpPr>
-        <p:spPr>
-          <a:xfrm>
-            <a:off x="8403336" y="3886200"/>
-            <a:ext cx="2700223" cy="0"/>
-          </a:xfrm>
-          <a:prstGeom prst="line">
-            <a:avLst/>
-          </a:prstGeom>
-          <a:noFill/>
-          <a:ln w="12700">
-            <a:solidFill>
-              <a:srgbClr val="22303D"/>
-            </a:solidFill>
-            <a:prstDash val="solid"/>
-          </a:ln>
-        </p:spPr>
-      </p:sp>
-      <p:sp>
-        <p:nvSpPr>
-          <p:cNvPr id="10" name="Text 7"/>
-          <p:cNvSpPr txBox="1"/>
-          <p:nvPr/>
-        </p:nvSpPr>
-        <p:spPr>
-          <a:xfrm>
-            <a:off x="8403336" y="4023360"/>
-            <a:ext cx="2700223" cy="274320"/>
-          </a:xfrm>
-          <a:prstGeom prst="rect">
-            <a:avLst/>
-          </a:prstGeom>
-          <a:noFill/>
-          <a:ln/>
-        </p:spPr>
-        <p:txBody>
-          <a:bodyPr wrap="square" lIns="0" tIns="0" rIns="0" bIns="0" rtlCol="0" anchor="t"/>
-          <a:lstStyle/>
-          <a:p>
-            <a:pPr indent="0" marL="0">
-              <a:buNone/>
-            </a:pPr>
-            <a:r>
-              <a:rPr lang="en-US" sz="1200" spc="300" kern="0" dirty="0">
-                <a:solidFill>
-                  <a:srgbClr val="9AABBA"/>
+              <a:t>  →  </a:t>
+            </a:r>
+            <a:pPr indent="0" marL="0">
+              <a:buNone/>
+            </a:pPr>
+            <a:r>
+              <a:rPr lang="en-US" sz="1400" b="1" dirty="0">
+                <a:solidFill>
+                  <a:srgbClr val="5EEAD4"/>
                 </a:solidFill>
                 <a:latin typeface="Consolas" pitchFamily="34" charset="0"/>
                 <a:ea typeface="Consolas" pitchFamily="34" charset="-122"/>
                 <a:cs typeface="Consolas" pitchFamily="34" charset="-120"/>
               </a:rPr>
-              <a:t>CLOUD → COACH</a:t>
-            </a:r>
-            <a:endParaRPr lang="en-US" sz="1200" dirty="0"/>
-          </a:p>
-        </p:txBody>
-      </p:sp>
-      <p:sp>
-        <p:nvSpPr>
-          <p:cNvPr id="11" name="Text 8"/>
-          <p:cNvSpPr txBox="1"/>
-          <p:nvPr/>
-        </p:nvSpPr>
-        <p:spPr>
-          <a:xfrm>
-            <a:off x="8403336" y="4315968"/>
-            <a:ext cx="2700223" cy="411480"/>
-          </a:xfrm>
-          <a:prstGeom prst="rect">
-            <a:avLst/>
-          </a:prstGeom>
-          <a:noFill/>
-          <a:ln/>
-        </p:spPr>
-        <p:txBody>
-          <a:bodyPr wrap="square" lIns="0" tIns="0" rIns="0" bIns="0" rtlCol="0" anchor="t"/>
-          <a:lstStyle/>
-          <a:p>
-            <a:pPr indent="0" marL="0">
-              <a:buNone/>
-            </a:pPr>
-            <a:r>
-              <a:rPr lang="en-US" sz="2200" b="1" dirty="0">
-                <a:solidFill>
-                  <a:srgbClr val="5EEAD4"/>
-                </a:solidFill>
-                <a:latin typeface="Consolas" pitchFamily="34" charset="0"/>
-                <a:ea typeface="Consolas" pitchFamily="34" charset="-122"/>
-                <a:cs typeface="Consolas" pitchFamily="34" charset="-120"/>
-              </a:rPr>
               <a:t>t0u0v0x0y</a:t>
             </a:r>
-            <a:endParaRPr lang="en-US" sz="2200" dirty="0"/>
-          </a:p>
-        </p:txBody>
-      </p:sp>
-      <p:sp>
-        <p:nvSpPr>
-          <p:cNvPr id="12" name="Text 9"/>
-          <p:cNvSpPr txBox="1"/>
-          <p:nvPr/>
-        </p:nvSpPr>
-        <p:spPr>
-          <a:xfrm>
-            <a:off x="8403336" y="4754880"/>
-            <a:ext cx="2700223" cy="640080"/>
-          </a:xfrm>
-          <a:prstGeom prst="rect">
-            <a:avLst/>
-          </a:prstGeom>
-          <a:noFill/>
-          <a:ln/>
-        </p:spPr>
-        <p:txBody>
-          <a:bodyPr wrap="square" lIns="0" tIns="0" rIns="0" bIns="0" rtlCol="0" anchor="t"/>
-          <a:lstStyle/>
-          <a:p>
-            <a:pPr indent="0" marL="0">
-              <a:buNone/>
-            </a:pPr>
-            <a:r>
-              <a:rPr lang="en-US" sz="1200" dirty="0">
-                <a:solidFill>
-                  <a:srgbClr val="C7D3DD"/>
-                </a:solidFill>
-                <a:latin typeface="Calibri" pitchFamily="34" charset="0"/>
-                <a:ea typeface="Calibri" pitchFamily="34" charset="-122"/>
-                <a:cs typeface="Calibri" pitchFamily="34" charset="-120"/>
-              </a:rPr>
-              <a:t>One bit per head: X Y Z W. A frame every two seconds, over MQTT.</a:t>
-            </a:r>
-            <a:endParaRPr lang="en-US" sz="1200" dirty="0"/>
+            <a:endParaRPr lang="en-US" sz="1400" dirty="0"/>
           </a:p>
         </p:txBody>
       </p:sp>
